--- a/Evolucion Stack Clasico DS/Evolucion-Stack-Clasico-DS.pptx
+++ b/Evolucion Stack Clasico DS/Evolucion-Stack-Clasico-DS.pptx
@@ -2,22 +2,22 @@
 <file path=ppt/presentation.xml><?xml version="1.0" encoding="utf-8"?>
 <p:presentation xmlns:p="http://schemas.openxmlformats.org/presentationml/2006/main">
   <p:sldMasterIdLst>
-    <p:sldMasterId xmlns:r="http://schemas.openxmlformats.org/officeDocument/2006/relationships" id="2147483648" r:id="R5394fdd9220e400f"/>
+    <p:sldMasterId xmlns:r="http://schemas.openxmlformats.org/officeDocument/2006/relationships" id="2147483648" r:id="R7ef27a6ed3de4ee6"/>
   </p:sldMasterIdLst>
   <p:notesMasterIdLst>
-    <p:notesMasterId xmlns:r="http://schemas.openxmlformats.org/officeDocument/2006/relationships" r:id="R0091f2b7e76345db"/>
+    <p:notesMasterId xmlns:r="http://schemas.openxmlformats.org/officeDocument/2006/relationships" r:id="R05c272d5ca254f33"/>
   </p:notesMasterIdLst>
   <p:sldIdLst>
-    <p:sldId xmlns:r="http://schemas.openxmlformats.org/officeDocument/2006/relationships" id="256" r:id="R84a29e7e828148d0"/>
-    <p:sldId xmlns:r="http://schemas.openxmlformats.org/officeDocument/2006/relationships" id="257" r:id="R71ec1c58bd094e4c"/>
-    <p:sldId xmlns:r="http://schemas.openxmlformats.org/officeDocument/2006/relationships" id="258" r:id="R7b44b9880ecc4db8"/>
-    <p:sldId xmlns:r="http://schemas.openxmlformats.org/officeDocument/2006/relationships" id="259" r:id="R560d5d3d2fcc4c67"/>
-    <p:sldId xmlns:r="http://schemas.openxmlformats.org/officeDocument/2006/relationships" id="260" r:id="R0fac37ddb4ae4e1f"/>
-    <p:sldId xmlns:r="http://schemas.openxmlformats.org/officeDocument/2006/relationships" id="261" r:id="Racf40a4768bd46dc"/>
-    <p:sldId xmlns:r="http://schemas.openxmlformats.org/officeDocument/2006/relationships" id="262" r:id="R980f190cbb23458e"/>
-    <p:sldId xmlns:r="http://schemas.openxmlformats.org/officeDocument/2006/relationships" id="263" r:id="R725d8b9556cb4251"/>
-    <p:sldId xmlns:r="http://schemas.openxmlformats.org/officeDocument/2006/relationships" id="264" r:id="Rb20f1f63b5dd43a1"/>
-    <p:sldId xmlns:r="http://schemas.openxmlformats.org/officeDocument/2006/relationships" id="265" r:id="Rfdea5de42ce145f4"/>
+    <p:sldId xmlns:r="http://schemas.openxmlformats.org/officeDocument/2006/relationships" id="256" r:id="Rb6ecd9873cf04b22"/>
+    <p:sldId xmlns:r="http://schemas.openxmlformats.org/officeDocument/2006/relationships" id="257" r:id="R856f96607324482f"/>
+    <p:sldId xmlns:r="http://schemas.openxmlformats.org/officeDocument/2006/relationships" id="258" r:id="R9c78202ef7d04163"/>
+    <p:sldId xmlns:r="http://schemas.openxmlformats.org/officeDocument/2006/relationships" id="259" r:id="Re39609980d2b4536"/>
+    <p:sldId xmlns:r="http://schemas.openxmlformats.org/officeDocument/2006/relationships" id="260" r:id="Rfeec60fbadb34a93"/>
+    <p:sldId xmlns:r="http://schemas.openxmlformats.org/officeDocument/2006/relationships" id="261" r:id="Rc97fb25bcf6f46d0"/>
+    <p:sldId xmlns:r="http://schemas.openxmlformats.org/officeDocument/2006/relationships" id="262" r:id="R5528a5efd7cd4129"/>
+    <p:sldId xmlns:r="http://schemas.openxmlformats.org/officeDocument/2006/relationships" id="263" r:id="Ra0bca18b052e474c"/>
+    <p:sldId xmlns:r="http://schemas.openxmlformats.org/officeDocument/2006/relationships" id="264" r:id="Rf13b51c517074378"/>
+    <p:sldId xmlns:r="http://schemas.openxmlformats.org/officeDocument/2006/relationships" id="265" r:id="R8d78789c298d4c90"/>
   </p:sldIdLst>
   <p:sldSz cx="12192000" cy="6858000"/>
   <p:notesSz cx="6858000" cy="9144000"/>
@@ -1158,7 +1158,7 @@
   </p:cSld>
   <p:clrMap bg1="lt1" tx1="dk1" bg2="lt2" tx2="dk2" accent1="accent1" accent2="accent2" accent3="accent3" accent4="accent4" accent5="accent5" accent6="accent6" hlink="hlink" folHlink="folHlink"/>
   <p:sldLayoutIdLst>
-    <p:sldLayoutId xmlns:r="http://schemas.openxmlformats.org/officeDocument/2006/relationships" id="2147483649" r:id="R03b50072accf4bdc"/>
+    <p:sldLayoutId xmlns:r="http://schemas.openxmlformats.org/officeDocument/2006/relationships" id="2147483649" r:id="R72869cac256d4699"/>
   </p:sldLayoutIdLst>
   <p:txStyles>
     <p:titleStyle>
@@ -1656,7 +1656,7 @@
           <p:cNvPr id="1" name="">
             <a:extLst xmlns:a="http://schemas.openxmlformats.org/drawingml/2006/main">
               <a:ext uri="{FF2B5EF4-FFF2-40B4-BE49-F238E27FC236}">
-                <a16:creationId xmlns:a16="http://schemas.microsoft.com/office/drawing/2014/main" id="{921604ED-450B-4164-AD69-117BC032D6E3}"/>
+                <a16:creationId xmlns:a16="http://schemas.microsoft.com/office/drawing/2014/main" id="{45F3EDD1-2986-4899-9EB4-EE31BACAB50E}"/>
               </a:ext>
             </a:extLst>
           </p:cNvPr>
@@ -1689,7 +1689,7 @@
           <p:cNvPr id="2" name="">
             <a:extLst xmlns:a="http://schemas.openxmlformats.org/drawingml/2006/main">
               <a:ext uri="{FF2B5EF4-FFF2-40B4-BE49-F238E27FC236}">
-                <a16:creationId xmlns:a16="http://schemas.microsoft.com/office/drawing/2014/main" id="{3C016874-1228-486E-AAEF-48B34F7EAE65}"/>
+                <a16:creationId xmlns:a16="http://schemas.microsoft.com/office/drawing/2014/main" id="{605A926F-6513-4A38-8B36-C4AFE5035831}"/>
               </a:ext>
             </a:extLst>
           </p:cNvPr>
@@ -1722,7 +1722,7 @@
           <p:cNvPr id="3" name="">
             <a:extLst xmlns:a="http://schemas.openxmlformats.org/drawingml/2006/main">
               <a:ext uri="{FF2B5EF4-FFF2-40B4-BE49-F238E27FC236}">
-                <a16:creationId xmlns:a16="http://schemas.microsoft.com/office/drawing/2014/main" id="{FDF493ED-2A27-4DA3-BC27-896F9FFC3D17}"/>
+                <a16:creationId xmlns:a16="http://schemas.microsoft.com/office/drawing/2014/main" id="{EDBCEA9B-5B00-425C-9D9B-6218FFDD1C14}"/>
               </a:ext>
             </a:extLst>
           </p:cNvPr>
@@ -1786,7 +1786,7 @@
           <p:cNvPr id="4" name="">
             <a:extLst xmlns:a="http://schemas.openxmlformats.org/drawingml/2006/main">
               <a:ext uri="{FF2B5EF4-FFF2-40B4-BE49-F238E27FC236}">
-                <a16:creationId xmlns:a16="http://schemas.microsoft.com/office/drawing/2014/main" id="{29D36998-7EBB-4D77-A5BF-DC0FF2BB740D}"/>
+                <a16:creationId xmlns:a16="http://schemas.microsoft.com/office/drawing/2014/main" id="{8C048D0A-C041-4ED0-B7AB-7A0ABB9B5225}"/>
               </a:ext>
             </a:extLst>
           </p:cNvPr>
@@ -1896,7 +1896,7 @@
           <p:cNvPr id="5" name="">
             <a:extLst xmlns:a="http://schemas.openxmlformats.org/drawingml/2006/main">
               <a:ext uri="{FF2B5EF4-FFF2-40B4-BE49-F238E27FC236}">
-                <a16:creationId xmlns:a16="http://schemas.microsoft.com/office/drawing/2014/main" id="{E7A84B31-F054-42AE-B022-AA93C2E3583A}"/>
+                <a16:creationId xmlns:a16="http://schemas.microsoft.com/office/drawing/2014/main" id="{CD21FC15-CCE1-41E4-805E-5A74F5BD3C7D}"/>
               </a:ext>
             </a:extLst>
           </p:cNvPr>
@@ -1960,7 +1960,7 @@
           <p:cNvPr id="6" name="">
             <a:extLst xmlns:a="http://schemas.openxmlformats.org/drawingml/2006/main">
               <a:ext uri="{FF2B5EF4-FFF2-40B4-BE49-F238E27FC236}">
-                <a16:creationId xmlns:a16="http://schemas.microsoft.com/office/drawing/2014/main" id="{5F7DCAC7-409D-430D-8DB3-3621BB39BE86}"/>
+                <a16:creationId xmlns:a16="http://schemas.microsoft.com/office/drawing/2014/main" id="{A03C51F0-E1B0-4A47-A8A5-F5BDA6B42923}"/>
               </a:ext>
             </a:extLst>
           </p:cNvPr>
@@ -1993,7 +1993,7 @@
           <p:cNvPr id="7" name="">
             <a:extLst xmlns:a="http://schemas.openxmlformats.org/drawingml/2006/main">
               <a:ext uri="{FF2B5EF4-FFF2-40B4-BE49-F238E27FC236}">
-                <a16:creationId xmlns:a16="http://schemas.microsoft.com/office/drawing/2014/main" id="{6EB891F3-A7AD-4B93-BBA7-EECC59149B15}"/>
+                <a16:creationId xmlns:a16="http://schemas.microsoft.com/office/drawing/2014/main" id="{79440EAF-81C5-41EE-A1A8-15249B412F55}"/>
               </a:ext>
             </a:extLst>
           </p:cNvPr>
@@ -2057,7 +2057,7 @@
           <p:cNvPr id="8" name="">
             <a:extLst xmlns:a="http://schemas.openxmlformats.org/drawingml/2006/main">
               <a:ext uri="{FF2B5EF4-FFF2-40B4-BE49-F238E27FC236}">
-                <a16:creationId xmlns:a16="http://schemas.microsoft.com/office/drawing/2014/main" id="{5D8D2FB3-F1E9-415E-8B12-6571CE282FC6}"/>
+                <a16:creationId xmlns:a16="http://schemas.microsoft.com/office/drawing/2014/main" id="{55B4E1DF-67C9-437B-9675-C12CDDD01A2C}"/>
               </a:ext>
             </a:extLst>
           </p:cNvPr>
@@ -2121,7 +2121,7 @@
           <p:cNvPr id="9" name="">
             <a:extLst xmlns:a="http://schemas.openxmlformats.org/drawingml/2006/main">
               <a:ext uri="{FF2B5EF4-FFF2-40B4-BE49-F238E27FC236}">
-                <a16:creationId xmlns:a16="http://schemas.microsoft.com/office/drawing/2014/main" id="{03D0DED4-0034-44D8-9ECB-EFA9B3AEA90F}"/>
+                <a16:creationId xmlns:a16="http://schemas.microsoft.com/office/drawing/2014/main" id="{6847F5C3-C11A-4EDF-9C5A-E8F6348BA36C}"/>
               </a:ext>
             </a:extLst>
           </p:cNvPr>
@@ -2185,7 +2185,7 @@
           <p:cNvPr id="10" name="">
             <a:extLst xmlns:a="http://schemas.openxmlformats.org/drawingml/2006/main">
               <a:ext uri="{FF2B5EF4-FFF2-40B4-BE49-F238E27FC236}">
-                <a16:creationId xmlns:a16="http://schemas.microsoft.com/office/drawing/2014/main" id="{9952D928-6414-43AD-A0A6-1B595A5A4477}"/>
+                <a16:creationId xmlns:a16="http://schemas.microsoft.com/office/drawing/2014/main" id="{831DFBF0-2633-4E71-A183-5D573EBE5489}"/>
               </a:ext>
             </a:extLst>
           </p:cNvPr>
@@ -2249,7 +2249,7 @@
           <p:cNvPr id="11" name="">
             <a:extLst xmlns:a="http://schemas.openxmlformats.org/drawingml/2006/main">
               <a:ext uri="{FF2B5EF4-FFF2-40B4-BE49-F238E27FC236}">
-                <a16:creationId xmlns:a16="http://schemas.microsoft.com/office/drawing/2014/main" id="{F6EFEA0A-01A6-445B-BAAC-5C439C46B1B7}"/>
+                <a16:creationId xmlns:a16="http://schemas.microsoft.com/office/drawing/2014/main" id="{0D7654EA-00FF-4E05-BC34-D192CB47034E}"/>
               </a:ext>
             </a:extLst>
           </p:cNvPr>
@@ -2313,7 +2313,7 @@
           <p:cNvPr id="12" name="">
             <a:extLst xmlns:a="http://schemas.openxmlformats.org/drawingml/2006/main">
               <a:ext uri="{FF2B5EF4-FFF2-40B4-BE49-F238E27FC236}">
-                <a16:creationId xmlns:a16="http://schemas.microsoft.com/office/drawing/2014/main" id="{2C270B54-DD37-4DDF-8104-64769C09DCDB}"/>
+                <a16:creationId xmlns:a16="http://schemas.microsoft.com/office/drawing/2014/main" id="{362567AE-6821-482B-9337-15C958F33256}"/>
               </a:ext>
             </a:extLst>
           </p:cNvPr>
@@ -2377,7 +2377,7 @@
           <p:cNvPr id="13" name="">
             <a:extLst xmlns:a="http://schemas.openxmlformats.org/drawingml/2006/main">
               <a:ext uri="{FF2B5EF4-FFF2-40B4-BE49-F238E27FC236}">
-                <a16:creationId xmlns:a16="http://schemas.microsoft.com/office/drawing/2014/main" id="{0191F451-3E5E-450E-971E-6984742358D8}"/>
+                <a16:creationId xmlns:a16="http://schemas.microsoft.com/office/drawing/2014/main" id="{05142840-2043-4D2C-9B07-F58D6AEB3D96}"/>
               </a:ext>
             </a:extLst>
           </p:cNvPr>
@@ -2441,7 +2441,7 @@
           <p:cNvPr id="14" name="">
             <a:extLst xmlns:a="http://schemas.openxmlformats.org/drawingml/2006/main">
               <a:ext uri="{FF2B5EF4-FFF2-40B4-BE49-F238E27FC236}">
-                <a16:creationId xmlns:a16="http://schemas.microsoft.com/office/drawing/2014/main" id="{A8E076BF-0055-4B04-9F4A-BF44944876E4}"/>
+                <a16:creationId xmlns:a16="http://schemas.microsoft.com/office/drawing/2014/main" id="{4A46F48F-D410-4581-98D2-06DC90EAC592}"/>
               </a:ext>
             </a:extLst>
           </p:cNvPr>
@@ -2505,7 +2505,7 @@
           <p:cNvPr id="15" name="">
             <a:extLst xmlns:a="http://schemas.openxmlformats.org/drawingml/2006/main">
               <a:ext uri="{FF2B5EF4-FFF2-40B4-BE49-F238E27FC236}">
-                <a16:creationId xmlns:a16="http://schemas.microsoft.com/office/drawing/2014/main" id="{762567B2-162B-4CD7-BC2D-D0D1D71E8F48}"/>
+                <a16:creationId xmlns:a16="http://schemas.microsoft.com/office/drawing/2014/main" id="{7AF9DA60-C2B8-4B55-82AB-B35B73874A80}"/>
               </a:ext>
             </a:extLst>
           </p:cNvPr>
@@ -2538,7 +2538,7 @@
           <p:cNvPr id="16" name="">
             <a:extLst xmlns:a="http://schemas.openxmlformats.org/drawingml/2006/main">
               <a:ext uri="{FF2B5EF4-FFF2-40B4-BE49-F238E27FC236}">
-                <a16:creationId xmlns:a16="http://schemas.microsoft.com/office/drawing/2014/main" id="{D1B55A8D-DBD1-4026-9809-DBE6DE79AD13}"/>
+                <a16:creationId xmlns:a16="http://schemas.microsoft.com/office/drawing/2014/main" id="{0134FAA3-7379-4D50-8A6E-033E97846D7B}"/>
               </a:ext>
             </a:extLst>
           </p:cNvPr>
@@ -2602,7 +2602,7 @@
           <p:cNvPr id="17" name="">
             <a:extLst xmlns:a="http://schemas.openxmlformats.org/drawingml/2006/main">
               <a:ext uri="{FF2B5EF4-FFF2-40B4-BE49-F238E27FC236}">
-                <a16:creationId xmlns:a16="http://schemas.microsoft.com/office/drawing/2014/main" id="{6700B397-3060-4B09-90FB-D9E1AAD54F82}"/>
+                <a16:creationId xmlns:a16="http://schemas.microsoft.com/office/drawing/2014/main" id="{D527AC08-E31F-4098-ABE1-7044D3A39E8D}"/>
               </a:ext>
             </a:extLst>
           </p:cNvPr>
@@ -2666,7 +2666,7 @@
           <p:cNvPr id="18" name="">
             <a:extLst xmlns:a="http://schemas.openxmlformats.org/drawingml/2006/main">
               <a:ext uri="{FF2B5EF4-FFF2-40B4-BE49-F238E27FC236}">
-                <a16:creationId xmlns:a16="http://schemas.microsoft.com/office/drawing/2014/main" id="{F0C6E4FC-5BAA-44AA-B3A7-9F9D3E6B6937}"/>
+                <a16:creationId xmlns:a16="http://schemas.microsoft.com/office/drawing/2014/main" id="{F88AD5E9-75F3-46FB-80C7-A42506BF1DB5}"/>
               </a:ext>
             </a:extLst>
           </p:cNvPr>
@@ -2699,7 +2699,7 @@
           <p:cNvPr id="19" name="">
             <a:extLst xmlns:a="http://schemas.openxmlformats.org/drawingml/2006/main">
               <a:ext uri="{FF2B5EF4-FFF2-40B4-BE49-F238E27FC236}">
-                <a16:creationId xmlns:a16="http://schemas.microsoft.com/office/drawing/2014/main" id="{E0FD66DD-8052-42F9-98EC-DEAEAE0B3E92}"/>
+                <a16:creationId xmlns:a16="http://schemas.microsoft.com/office/drawing/2014/main" id="{DA3DF7C2-CC9D-4016-88BF-FE0875F7CC54}"/>
               </a:ext>
             </a:extLst>
           </p:cNvPr>
@@ -2763,7 +2763,7 @@
           <p:cNvPr id="20" name="">
             <a:extLst xmlns:a="http://schemas.openxmlformats.org/drawingml/2006/main">
               <a:ext uri="{FF2B5EF4-FFF2-40B4-BE49-F238E27FC236}">
-                <a16:creationId xmlns:a16="http://schemas.microsoft.com/office/drawing/2014/main" id="{F9A1DFD4-67D5-40A9-B4C3-36C4A78AA1FE}"/>
+                <a16:creationId xmlns:a16="http://schemas.microsoft.com/office/drawing/2014/main" id="{1687E2B6-85D5-422C-BBEA-C7541C670B2F}"/>
               </a:ext>
             </a:extLst>
           </p:cNvPr>
@@ -2827,7 +2827,7 @@
           <p:cNvPr id="21" name="">
             <a:extLst xmlns:a="http://schemas.openxmlformats.org/drawingml/2006/main">
               <a:ext uri="{FF2B5EF4-FFF2-40B4-BE49-F238E27FC236}">
-                <a16:creationId xmlns:a16="http://schemas.microsoft.com/office/drawing/2014/main" id="{2792C6DE-1BB3-421C-9376-62E3160C8182}"/>
+                <a16:creationId xmlns:a16="http://schemas.microsoft.com/office/drawing/2014/main" id="{09C947A4-CF3C-4976-82FC-5E48D188B530}"/>
               </a:ext>
             </a:extLst>
           </p:cNvPr>
@@ -2860,7 +2860,7 @@
           <p:cNvPr id="22" name="">
             <a:extLst xmlns:a="http://schemas.openxmlformats.org/drawingml/2006/main">
               <a:ext uri="{FF2B5EF4-FFF2-40B4-BE49-F238E27FC236}">
-                <a16:creationId xmlns:a16="http://schemas.microsoft.com/office/drawing/2014/main" id="{01FAE268-6B20-4178-8A85-016F06C19E19}"/>
+                <a16:creationId xmlns:a16="http://schemas.microsoft.com/office/drawing/2014/main" id="{D643027C-48D6-438A-9E77-1E5A217240E8}"/>
               </a:ext>
             </a:extLst>
           </p:cNvPr>
@@ -2924,7 +2924,7 @@
           <p:cNvPr id="23" name="">
             <a:extLst xmlns:a="http://schemas.openxmlformats.org/drawingml/2006/main">
               <a:ext uri="{FF2B5EF4-FFF2-40B4-BE49-F238E27FC236}">
-                <a16:creationId xmlns:a16="http://schemas.microsoft.com/office/drawing/2014/main" id="{5D6AFA43-0C74-4105-93C6-521FB203C509}"/>
+                <a16:creationId xmlns:a16="http://schemas.microsoft.com/office/drawing/2014/main" id="{3487E754-7158-483A-94B3-ACAE6BEEB4B9}"/>
               </a:ext>
             </a:extLst>
           </p:cNvPr>
@@ -2988,7 +2988,7 @@
           <p:cNvPr id="24" name="">
             <a:extLst xmlns:a="http://schemas.openxmlformats.org/drawingml/2006/main">
               <a:ext uri="{FF2B5EF4-FFF2-40B4-BE49-F238E27FC236}">
-                <a16:creationId xmlns:a16="http://schemas.microsoft.com/office/drawing/2014/main" id="{951E744C-3A68-4238-8011-C3C8C0DA0002}"/>
+                <a16:creationId xmlns:a16="http://schemas.microsoft.com/office/drawing/2014/main" id="{9797771F-1B67-4657-899E-8CF731504E1C}"/>
               </a:ext>
             </a:extLst>
           </p:cNvPr>
@@ -3021,7 +3021,7 @@
           <p:cNvPr id="25" name="">
             <a:extLst xmlns:a="http://schemas.openxmlformats.org/drawingml/2006/main">
               <a:ext uri="{FF2B5EF4-FFF2-40B4-BE49-F238E27FC236}">
-                <a16:creationId xmlns:a16="http://schemas.microsoft.com/office/drawing/2014/main" id="{023CC9E7-C1B9-45C9-A118-E12A4C8C7AAF}"/>
+                <a16:creationId xmlns:a16="http://schemas.microsoft.com/office/drawing/2014/main" id="{0787C97F-4ACD-4C43-A629-374FA790731D}"/>
               </a:ext>
             </a:extLst>
           </p:cNvPr>
@@ -3085,7 +3085,7 @@
           <p:cNvPr id="26" name="">
             <a:extLst xmlns:a="http://schemas.openxmlformats.org/drawingml/2006/main">
               <a:ext uri="{FF2B5EF4-FFF2-40B4-BE49-F238E27FC236}">
-                <a16:creationId xmlns:a16="http://schemas.microsoft.com/office/drawing/2014/main" id="{9358E32C-C29A-4953-B833-99A2A964007B}"/>
+                <a16:creationId xmlns:a16="http://schemas.microsoft.com/office/drawing/2014/main" id="{DA32FB23-CBC4-461E-BD13-EC3485EA6F1A}"/>
               </a:ext>
             </a:extLst>
           </p:cNvPr>
@@ -3149,7 +3149,7 @@
           <p:cNvPr id="27" name="">
             <a:extLst xmlns:a="http://schemas.openxmlformats.org/drawingml/2006/main">
               <a:ext uri="{FF2B5EF4-FFF2-40B4-BE49-F238E27FC236}">
-                <a16:creationId xmlns:a16="http://schemas.microsoft.com/office/drawing/2014/main" id="{A35C497E-BAF7-4E4C-8129-5E745398AF59}"/>
+                <a16:creationId xmlns:a16="http://schemas.microsoft.com/office/drawing/2014/main" id="{AE252713-CD41-409E-AB76-2FCCE156AE3F}"/>
               </a:ext>
             </a:extLst>
           </p:cNvPr>
@@ -3213,7 +3213,7 @@
           <p:cNvPr id="28" name="">
             <a:extLst xmlns:a="http://schemas.openxmlformats.org/drawingml/2006/main">
               <a:ext uri="{FF2B5EF4-FFF2-40B4-BE49-F238E27FC236}">
-                <a16:creationId xmlns:a16="http://schemas.microsoft.com/office/drawing/2014/main" id="{CA536DBB-F58B-4CE1-A5F4-04137DDAB1D0}"/>
+                <a16:creationId xmlns:a16="http://schemas.microsoft.com/office/drawing/2014/main" id="{F8612EBC-ECEE-4995-B352-98D822C81D82}"/>
               </a:ext>
             </a:extLst>
           </p:cNvPr>
@@ -3275,7 +3275,7 @@
     </p:spTree>
     <p:extLst>
       <p:ext uri="{BB962C8B-B14F-4D97-AF65-F5344CB8AC3E}">
-        <p14:creationId xmlns:p14="http://schemas.microsoft.com/office/powerpoint/2010/main" val="669330941"/>
+        <p14:creationId xmlns:p14="http://schemas.microsoft.com/office/powerpoint/2010/main" val="1919111407"/>
       </p:ext>
     </p:extLst>
   </p:cSld>
@@ -3303,8 +3303,8 @@
           <p:nvPr/>
         </p:nvPicPr>
         <p:blipFill>
-          <a:blip xmlns:r="http://schemas.openxmlformats.org/officeDocument/2006/relationships" xmlns:a="http://schemas.openxmlformats.org/drawingml/2006/main" r:embed="Ra14c7990b6f5459c"/>
-          <a:srcRect xmlns:a="http://schemas.openxmlformats.org/drawingml/2006/main" l="0" t="0" r="0" b="0"/>
+          <a:blip xmlns:r="http://schemas.openxmlformats.org/officeDocument/2006/relationships" xmlns:a="http://schemas.openxmlformats.org/drawingml/2006/main" r:embed="Rae224844aa654177"/>
+          <a:srcRect xmlns:a="http://schemas.openxmlformats.org/drawingml/2006/main" l="0" t="27" r="0" b="27"/>
           <a:stretch xmlns:a="http://schemas.openxmlformats.org/drawingml/2006/main">
             <a:fillRect l="0" t="0" r="0" b="0"/>
           </a:stretch>
@@ -3324,7 +3324,7 @@
           <p:cNvPr id="2" name="">
             <a:extLst xmlns:a="http://schemas.openxmlformats.org/drawingml/2006/main">
               <a:ext uri="{FF2B5EF4-FFF2-40B4-BE49-F238E27FC236}">
-                <a16:creationId xmlns:a16="http://schemas.microsoft.com/office/drawing/2014/main" id="{8BBDBE39-18DC-4D39-BBDA-85967DCB2355}"/>
+                <a16:creationId xmlns:a16="http://schemas.microsoft.com/office/drawing/2014/main" id="{A09BB1C8-593A-4964-BA73-C64CE4903DC2}"/>
               </a:ext>
             </a:extLst>
           </p:cNvPr>
@@ -3361,7 +3361,7 @@
           <p:cNvPr id="3" name="">
             <a:extLst xmlns:a="http://schemas.openxmlformats.org/drawingml/2006/main">
               <a:ext uri="{FF2B5EF4-FFF2-40B4-BE49-F238E27FC236}">
-                <a16:creationId xmlns:a16="http://schemas.microsoft.com/office/drawing/2014/main" id="{27BB9349-C351-4FFF-AEB1-7AE90AAA32DD}"/>
+                <a16:creationId xmlns:a16="http://schemas.microsoft.com/office/drawing/2014/main" id="{7C1BE563-563E-4745-AA9E-28D083D58230}"/>
               </a:ext>
             </a:extLst>
           </p:cNvPr>
@@ -3425,7 +3425,7 @@
           <p:cNvPr id="4" name="">
             <a:extLst xmlns:a="http://schemas.openxmlformats.org/drawingml/2006/main">
               <a:ext uri="{FF2B5EF4-FFF2-40B4-BE49-F238E27FC236}">
-                <a16:creationId xmlns:a16="http://schemas.microsoft.com/office/drawing/2014/main" id="{FBD27C8D-EF94-4D23-8EF8-CB0450A1746B}"/>
+                <a16:creationId xmlns:a16="http://schemas.microsoft.com/office/drawing/2014/main" id="{60E6EE46-F5DE-4DCF-B200-8436B8D856B9}"/>
               </a:ext>
             </a:extLst>
           </p:cNvPr>
@@ -3489,7 +3489,7 @@
           <p:cNvPr id="5" name="">
             <a:extLst xmlns:a="http://schemas.openxmlformats.org/drawingml/2006/main">
               <a:ext uri="{FF2B5EF4-FFF2-40B4-BE49-F238E27FC236}">
-                <a16:creationId xmlns:a16="http://schemas.microsoft.com/office/drawing/2014/main" id="{AA3E19A4-B51E-4670-AB73-3CEBF42C55BF}"/>
+                <a16:creationId xmlns:a16="http://schemas.microsoft.com/office/drawing/2014/main" id="{EB9626E6-D2A0-475B-B2E4-8D18C67C5AD9}"/>
               </a:ext>
             </a:extLst>
           </p:cNvPr>
@@ -3553,7 +3553,7 @@
           <p:cNvPr id="6" name="">
             <a:extLst xmlns:a="http://schemas.openxmlformats.org/drawingml/2006/main">
               <a:ext uri="{FF2B5EF4-FFF2-40B4-BE49-F238E27FC236}">
-                <a16:creationId xmlns:a16="http://schemas.microsoft.com/office/drawing/2014/main" id="{2C0E65DD-71B5-4AAD-9C60-15EB43BEA629}"/>
+                <a16:creationId xmlns:a16="http://schemas.microsoft.com/office/drawing/2014/main" id="{6DF3CCA1-AD53-4813-9C1D-B5D28AA3F30D}"/>
               </a:ext>
             </a:extLst>
           </p:cNvPr>
@@ -3617,7 +3617,7 @@
           <p:cNvPr id="7" name="">
             <a:extLst xmlns:a="http://schemas.openxmlformats.org/drawingml/2006/main">
               <a:ext uri="{FF2B5EF4-FFF2-40B4-BE49-F238E27FC236}">
-                <a16:creationId xmlns:a16="http://schemas.microsoft.com/office/drawing/2014/main" id="{C80E3B27-5BE6-47B2-9328-89A204E88A39}"/>
+                <a16:creationId xmlns:a16="http://schemas.microsoft.com/office/drawing/2014/main" id="{781CA12C-BE0E-42E1-9FEE-1965F7137BD4}"/>
               </a:ext>
             </a:extLst>
           </p:cNvPr>
@@ -3681,7 +3681,7 @@
           <p:cNvPr id="8" name="">
             <a:extLst xmlns:a="http://schemas.openxmlformats.org/drawingml/2006/main">
               <a:ext uri="{FF2B5EF4-FFF2-40B4-BE49-F238E27FC236}">
-                <a16:creationId xmlns:a16="http://schemas.microsoft.com/office/drawing/2014/main" id="{4C3F67CF-EB31-46D8-8D78-DE276F6EDD30}"/>
+                <a16:creationId xmlns:a16="http://schemas.microsoft.com/office/drawing/2014/main" id="{7378B9C5-7427-425A-9283-E31BBFFB9FA3}"/>
               </a:ext>
             </a:extLst>
           </p:cNvPr>
@@ -3743,7 +3743,7 @@
     </p:spTree>
     <p:extLst>
       <p:ext uri="{BB962C8B-B14F-4D97-AF65-F5344CB8AC3E}">
-        <p14:creationId xmlns:p14="http://schemas.microsoft.com/office/powerpoint/2010/main" val="81006070"/>
+        <p14:creationId xmlns:p14="http://schemas.microsoft.com/office/powerpoint/2010/main" val="1410243930"/>
       </p:ext>
     </p:extLst>
   </p:cSld>
@@ -3767,7 +3767,7 @@
           <p:cNvPr id="1" name="">
             <a:extLst xmlns:a="http://schemas.openxmlformats.org/drawingml/2006/main">
               <a:ext uri="{FF2B5EF4-FFF2-40B4-BE49-F238E27FC236}">
-                <a16:creationId xmlns:a16="http://schemas.microsoft.com/office/drawing/2014/main" id="{8DC65AD2-DF58-477D-945E-93FDE596CFB5}"/>
+                <a16:creationId xmlns:a16="http://schemas.microsoft.com/office/drawing/2014/main" id="{9279DD9B-EA61-4E86-AC27-6B5AFFB79600}"/>
               </a:ext>
             </a:extLst>
           </p:cNvPr>
@@ -3800,7 +3800,7 @@
           <p:cNvPr id="2" name="">
             <a:extLst xmlns:a="http://schemas.openxmlformats.org/drawingml/2006/main">
               <a:ext uri="{FF2B5EF4-FFF2-40B4-BE49-F238E27FC236}">
-                <a16:creationId xmlns:a16="http://schemas.microsoft.com/office/drawing/2014/main" id="{704A5E49-F6D4-4D5A-A605-2F3BC9D667BE}"/>
+                <a16:creationId xmlns:a16="http://schemas.microsoft.com/office/drawing/2014/main" id="{71C07E1B-DF75-4FB1-86C4-DE5C7BB6249D}"/>
               </a:ext>
             </a:extLst>
           </p:cNvPr>
@@ -3833,7 +3833,7 @@
           <p:cNvPr id="3" name="">
             <a:extLst xmlns:a="http://schemas.openxmlformats.org/drawingml/2006/main">
               <a:ext uri="{FF2B5EF4-FFF2-40B4-BE49-F238E27FC236}">
-                <a16:creationId xmlns:a16="http://schemas.microsoft.com/office/drawing/2014/main" id="{8E1CFFCF-3F21-4FF3-B94A-C04E64F96BDF}"/>
+                <a16:creationId xmlns:a16="http://schemas.microsoft.com/office/drawing/2014/main" id="{98659E33-8150-43A8-A16C-A061303C97EA}"/>
               </a:ext>
             </a:extLst>
           </p:cNvPr>
@@ -3897,7 +3897,7 @@
           <p:cNvPr id="4" name="">
             <a:extLst xmlns:a="http://schemas.openxmlformats.org/drawingml/2006/main">
               <a:ext uri="{FF2B5EF4-FFF2-40B4-BE49-F238E27FC236}">
-                <a16:creationId xmlns:a16="http://schemas.microsoft.com/office/drawing/2014/main" id="{81D6925F-F6A3-4C72-BA2C-D2F59100C9BF}"/>
+                <a16:creationId xmlns:a16="http://schemas.microsoft.com/office/drawing/2014/main" id="{31F06948-0A16-4A47-BD60-35F43F476533}"/>
               </a:ext>
             </a:extLst>
           </p:cNvPr>
@@ -3961,7 +3961,7 @@
           <p:cNvPr id="5" name="">
             <a:extLst xmlns:a="http://schemas.openxmlformats.org/drawingml/2006/main">
               <a:ext uri="{FF2B5EF4-FFF2-40B4-BE49-F238E27FC236}">
-                <a16:creationId xmlns:a16="http://schemas.microsoft.com/office/drawing/2014/main" id="{DFED2205-BDA7-42C4-B989-04B28CA71664}"/>
+                <a16:creationId xmlns:a16="http://schemas.microsoft.com/office/drawing/2014/main" id="{4222D1FF-5F44-4F47-BB77-B5D98E6B8361}"/>
               </a:ext>
             </a:extLst>
           </p:cNvPr>
@@ -3994,7 +3994,7 @@
           <p:cNvPr id="6" name="">
             <a:extLst xmlns:a="http://schemas.openxmlformats.org/drawingml/2006/main">
               <a:ext uri="{FF2B5EF4-FFF2-40B4-BE49-F238E27FC236}">
-                <a16:creationId xmlns:a16="http://schemas.microsoft.com/office/drawing/2014/main" id="{51D6A40C-5DD2-4DDF-93EE-42BDB1F40F99}"/>
+                <a16:creationId xmlns:a16="http://schemas.microsoft.com/office/drawing/2014/main" id="{3BA37F11-7BC5-47F3-A2D1-E017C898C62C}"/>
               </a:ext>
             </a:extLst>
           </p:cNvPr>
@@ -4058,7 +4058,7 @@
           <p:cNvPr id="7" name="">
             <a:extLst xmlns:a="http://schemas.openxmlformats.org/drawingml/2006/main">
               <a:ext uri="{FF2B5EF4-FFF2-40B4-BE49-F238E27FC236}">
-                <a16:creationId xmlns:a16="http://schemas.microsoft.com/office/drawing/2014/main" id="{820FD207-F450-4AF0-BD51-CA3848EC4768}"/>
+                <a16:creationId xmlns:a16="http://schemas.microsoft.com/office/drawing/2014/main" id="{4A073240-5FBA-4220-BF55-4FFC946D192D}"/>
               </a:ext>
             </a:extLst>
           </p:cNvPr>
@@ -4091,7 +4091,7 @@
           <p:cNvPr id="8" name="">
             <a:extLst xmlns:a="http://schemas.openxmlformats.org/drawingml/2006/main">
               <a:ext uri="{FF2B5EF4-FFF2-40B4-BE49-F238E27FC236}">
-                <a16:creationId xmlns:a16="http://schemas.microsoft.com/office/drawing/2014/main" id="{AE38F07E-4BEF-479F-AEAB-810EF0A73088}"/>
+                <a16:creationId xmlns:a16="http://schemas.microsoft.com/office/drawing/2014/main" id="{FE49A7A9-1F2D-4AB9-BEB1-D3B026E68911}"/>
               </a:ext>
             </a:extLst>
           </p:cNvPr>
@@ -4155,7 +4155,7 @@
           <p:cNvPr id="9" name="">
             <a:extLst xmlns:a="http://schemas.openxmlformats.org/drawingml/2006/main">
               <a:ext uri="{FF2B5EF4-FFF2-40B4-BE49-F238E27FC236}">
-                <a16:creationId xmlns:a16="http://schemas.microsoft.com/office/drawing/2014/main" id="{9D201E03-5D2D-4539-B806-A0D651C36451}"/>
+                <a16:creationId xmlns:a16="http://schemas.microsoft.com/office/drawing/2014/main" id="{3E5314F7-18C2-4178-8697-FD6C94C177CC}"/>
               </a:ext>
             </a:extLst>
           </p:cNvPr>
@@ -4219,7 +4219,7 @@
           <p:cNvPr id="10" name="">
             <a:extLst xmlns:a="http://schemas.openxmlformats.org/drawingml/2006/main">
               <a:ext uri="{FF2B5EF4-FFF2-40B4-BE49-F238E27FC236}">
-                <a16:creationId xmlns:a16="http://schemas.microsoft.com/office/drawing/2014/main" id="{5498EBB5-E63B-4A26-ABAC-9AF4EBEBDF1B}"/>
+                <a16:creationId xmlns:a16="http://schemas.microsoft.com/office/drawing/2014/main" id="{93CF60D6-7B9D-460A-AD34-839D689877DB}"/>
               </a:ext>
             </a:extLst>
           </p:cNvPr>
@@ -4283,7 +4283,7 @@
           <p:cNvPr id="11" name="">
             <a:extLst xmlns:a="http://schemas.openxmlformats.org/drawingml/2006/main">
               <a:ext uri="{FF2B5EF4-FFF2-40B4-BE49-F238E27FC236}">
-                <a16:creationId xmlns:a16="http://schemas.microsoft.com/office/drawing/2014/main" id="{1814FFF3-F77B-4BF8-8925-E7ADBFBA5E8A}"/>
+                <a16:creationId xmlns:a16="http://schemas.microsoft.com/office/drawing/2014/main" id="{676476E2-0CF0-413C-9898-BD7E83F15036}"/>
               </a:ext>
             </a:extLst>
           </p:cNvPr>
@@ -4316,7 +4316,7 @@
           <p:cNvPr id="12" name="">
             <a:extLst xmlns:a="http://schemas.openxmlformats.org/drawingml/2006/main">
               <a:ext uri="{FF2B5EF4-FFF2-40B4-BE49-F238E27FC236}">
-                <a16:creationId xmlns:a16="http://schemas.microsoft.com/office/drawing/2014/main" id="{34173BDC-D394-4CB1-8882-2F7CBCB4C2B2}"/>
+                <a16:creationId xmlns:a16="http://schemas.microsoft.com/office/drawing/2014/main" id="{85192E03-0920-4505-90E1-B421CF3FF2E7}"/>
               </a:ext>
             </a:extLst>
           </p:cNvPr>
@@ -4380,7 +4380,7 @@
           <p:cNvPr id="13" name="">
             <a:extLst xmlns:a="http://schemas.openxmlformats.org/drawingml/2006/main">
               <a:ext uri="{FF2B5EF4-FFF2-40B4-BE49-F238E27FC236}">
-                <a16:creationId xmlns:a16="http://schemas.microsoft.com/office/drawing/2014/main" id="{4EA8EC4B-D99B-4597-A520-CC8CA2E40FAD}"/>
+                <a16:creationId xmlns:a16="http://schemas.microsoft.com/office/drawing/2014/main" id="{BF0D9403-08E5-441E-8B68-20DD4B1EE2F1}"/>
               </a:ext>
             </a:extLst>
           </p:cNvPr>
@@ -4444,7 +4444,7 @@
           <p:cNvPr id="14" name="">
             <a:extLst xmlns:a="http://schemas.openxmlformats.org/drawingml/2006/main">
               <a:ext uri="{FF2B5EF4-FFF2-40B4-BE49-F238E27FC236}">
-                <a16:creationId xmlns:a16="http://schemas.microsoft.com/office/drawing/2014/main" id="{C8EDA570-F0B7-470E-8D7F-2DD20B9EF130}"/>
+                <a16:creationId xmlns:a16="http://schemas.microsoft.com/office/drawing/2014/main" id="{66CCD3C9-8A95-48E2-9FBA-6786F4C75D37}"/>
               </a:ext>
             </a:extLst>
           </p:cNvPr>
@@ -4508,7 +4508,7 @@
           <p:cNvPr id="15" name="">
             <a:extLst xmlns:a="http://schemas.openxmlformats.org/drawingml/2006/main">
               <a:ext uri="{FF2B5EF4-FFF2-40B4-BE49-F238E27FC236}">
-                <a16:creationId xmlns:a16="http://schemas.microsoft.com/office/drawing/2014/main" id="{223E2B92-E6C0-4372-995A-C20705EEA28F}"/>
+                <a16:creationId xmlns:a16="http://schemas.microsoft.com/office/drawing/2014/main" id="{3834F617-0DA2-4D07-8054-78E93685481B}"/>
               </a:ext>
             </a:extLst>
           </p:cNvPr>
@@ -4541,7 +4541,7 @@
           <p:cNvPr id="16" name="">
             <a:extLst xmlns:a="http://schemas.openxmlformats.org/drawingml/2006/main">
               <a:ext uri="{FF2B5EF4-FFF2-40B4-BE49-F238E27FC236}">
-                <a16:creationId xmlns:a16="http://schemas.microsoft.com/office/drawing/2014/main" id="{CC54816B-8F49-4009-AD08-7C822BC27B70}"/>
+                <a16:creationId xmlns:a16="http://schemas.microsoft.com/office/drawing/2014/main" id="{C1FAEA06-0504-4471-ADFC-CD99C2EABB51}"/>
               </a:ext>
             </a:extLst>
           </p:cNvPr>
@@ -4605,7 +4605,7 @@
           <p:cNvPr id="17" name="">
             <a:extLst xmlns:a="http://schemas.openxmlformats.org/drawingml/2006/main">
               <a:ext uri="{FF2B5EF4-FFF2-40B4-BE49-F238E27FC236}">
-                <a16:creationId xmlns:a16="http://schemas.microsoft.com/office/drawing/2014/main" id="{4B17591D-85AB-4459-85C6-BB566B2CA826}"/>
+                <a16:creationId xmlns:a16="http://schemas.microsoft.com/office/drawing/2014/main" id="{14A1D766-AFB5-4C76-A4D4-04031564B807}"/>
               </a:ext>
             </a:extLst>
           </p:cNvPr>
@@ -4669,7 +4669,7 @@
           <p:cNvPr id="18" name="">
             <a:extLst xmlns:a="http://schemas.openxmlformats.org/drawingml/2006/main">
               <a:ext uri="{FF2B5EF4-FFF2-40B4-BE49-F238E27FC236}">
-                <a16:creationId xmlns:a16="http://schemas.microsoft.com/office/drawing/2014/main" id="{8BDE0E5B-ABC1-4F18-95DE-B21A5B42478E}"/>
+                <a16:creationId xmlns:a16="http://schemas.microsoft.com/office/drawing/2014/main" id="{B13DD993-793F-4DB5-BD67-2F1D631AF0A5}"/>
               </a:ext>
             </a:extLst>
           </p:cNvPr>
@@ -4733,7 +4733,7 @@
           <p:cNvPr id="19" name="">
             <a:extLst xmlns:a="http://schemas.openxmlformats.org/drawingml/2006/main">
               <a:ext uri="{FF2B5EF4-FFF2-40B4-BE49-F238E27FC236}">
-                <a16:creationId xmlns:a16="http://schemas.microsoft.com/office/drawing/2014/main" id="{8BED52B4-E7E8-433A-B356-D57C2932CF5D}"/>
+                <a16:creationId xmlns:a16="http://schemas.microsoft.com/office/drawing/2014/main" id="{E49AC658-B698-429C-B2BA-7C0279E3ED64}"/>
               </a:ext>
             </a:extLst>
           </p:cNvPr>
@@ -4766,7 +4766,7 @@
           <p:cNvPr id="20" name="">
             <a:extLst xmlns:a="http://schemas.openxmlformats.org/drawingml/2006/main">
               <a:ext uri="{FF2B5EF4-FFF2-40B4-BE49-F238E27FC236}">
-                <a16:creationId xmlns:a16="http://schemas.microsoft.com/office/drawing/2014/main" id="{4B4C9286-4C3F-4F22-B85A-EC61DF94DDF2}"/>
+                <a16:creationId xmlns:a16="http://schemas.microsoft.com/office/drawing/2014/main" id="{EC5D1119-46C5-4767-95E3-B68571CC82EB}"/>
               </a:ext>
             </a:extLst>
           </p:cNvPr>
@@ -4830,7 +4830,7 @@
           <p:cNvPr id="21" name="">
             <a:extLst xmlns:a="http://schemas.openxmlformats.org/drawingml/2006/main">
               <a:ext uri="{FF2B5EF4-FFF2-40B4-BE49-F238E27FC236}">
-                <a16:creationId xmlns:a16="http://schemas.microsoft.com/office/drawing/2014/main" id="{62B2DF5F-E057-4B9C-97E7-28F22D534C30}"/>
+                <a16:creationId xmlns:a16="http://schemas.microsoft.com/office/drawing/2014/main" id="{D05D0506-5003-4478-AF07-62C270A874FE}"/>
               </a:ext>
             </a:extLst>
           </p:cNvPr>
@@ -4894,7 +4894,7 @@
           <p:cNvPr id="22" name="">
             <a:extLst xmlns:a="http://schemas.openxmlformats.org/drawingml/2006/main">
               <a:ext uri="{FF2B5EF4-FFF2-40B4-BE49-F238E27FC236}">
-                <a16:creationId xmlns:a16="http://schemas.microsoft.com/office/drawing/2014/main" id="{73E0E29D-6DE4-4AB0-85F7-D481978D3346}"/>
+                <a16:creationId xmlns:a16="http://schemas.microsoft.com/office/drawing/2014/main" id="{EB889D4C-A578-45DD-AB77-E4B34C5CB2FF}"/>
               </a:ext>
             </a:extLst>
           </p:cNvPr>
@@ -4958,7 +4958,7 @@
           <p:cNvPr id="23" name="">
             <a:extLst xmlns:a="http://schemas.openxmlformats.org/drawingml/2006/main">
               <a:ext uri="{FF2B5EF4-FFF2-40B4-BE49-F238E27FC236}">
-                <a16:creationId xmlns:a16="http://schemas.microsoft.com/office/drawing/2014/main" id="{FEA1B0B7-B00E-4D4F-AEB7-38A784742F82}"/>
+                <a16:creationId xmlns:a16="http://schemas.microsoft.com/office/drawing/2014/main" id="{D0F102CE-623D-498E-8B01-6D212EE377ED}"/>
               </a:ext>
             </a:extLst>
           </p:cNvPr>
@@ -4991,7 +4991,7 @@
           <p:cNvPr id="24" name="">
             <a:extLst xmlns:a="http://schemas.openxmlformats.org/drawingml/2006/main">
               <a:ext uri="{FF2B5EF4-FFF2-40B4-BE49-F238E27FC236}">
-                <a16:creationId xmlns:a16="http://schemas.microsoft.com/office/drawing/2014/main" id="{DD0782FE-B3F8-4050-A18D-B4A1CD43F16B}"/>
+                <a16:creationId xmlns:a16="http://schemas.microsoft.com/office/drawing/2014/main" id="{E93D362B-64D0-4EB2-8D2E-D6D7D7FC0569}"/>
               </a:ext>
             </a:extLst>
           </p:cNvPr>
@@ -5055,7 +5055,7 @@
           <p:cNvPr id="25" name="">
             <a:extLst xmlns:a="http://schemas.openxmlformats.org/drawingml/2006/main">
               <a:ext uri="{FF2B5EF4-FFF2-40B4-BE49-F238E27FC236}">
-                <a16:creationId xmlns:a16="http://schemas.microsoft.com/office/drawing/2014/main" id="{2AF7689F-B302-46D2-B4BC-2FD7D517F0D9}"/>
+                <a16:creationId xmlns:a16="http://schemas.microsoft.com/office/drawing/2014/main" id="{3535C21C-5FB9-44E5-BB4E-CD803F55A20E}"/>
               </a:ext>
             </a:extLst>
           </p:cNvPr>
@@ -5119,7 +5119,7 @@
           <p:cNvPr id="26" name="">
             <a:extLst xmlns:a="http://schemas.openxmlformats.org/drawingml/2006/main">
               <a:ext uri="{FF2B5EF4-FFF2-40B4-BE49-F238E27FC236}">
-                <a16:creationId xmlns:a16="http://schemas.microsoft.com/office/drawing/2014/main" id="{312A0692-A58E-494D-883A-EFFAEAB873F4}"/>
+                <a16:creationId xmlns:a16="http://schemas.microsoft.com/office/drawing/2014/main" id="{0A76CB7E-8E5D-422E-BDC2-84BBD501C458}"/>
               </a:ext>
             </a:extLst>
           </p:cNvPr>
@@ -5183,7 +5183,7 @@
           <p:cNvPr id="27" name="">
             <a:extLst xmlns:a="http://schemas.openxmlformats.org/drawingml/2006/main">
               <a:ext uri="{FF2B5EF4-FFF2-40B4-BE49-F238E27FC236}">
-                <a16:creationId xmlns:a16="http://schemas.microsoft.com/office/drawing/2014/main" id="{AC90A731-DAED-47E9-97B2-1DDFE0473DB4}"/>
+                <a16:creationId xmlns:a16="http://schemas.microsoft.com/office/drawing/2014/main" id="{A7328676-1B66-4461-89AB-4D3A2C658648}"/>
               </a:ext>
             </a:extLst>
           </p:cNvPr>
@@ -5216,7 +5216,7 @@
           <p:cNvPr id="28" name="">
             <a:extLst xmlns:a="http://schemas.openxmlformats.org/drawingml/2006/main">
               <a:ext uri="{FF2B5EF4-FFF2-40B4-BE49-F238E27FC236}">
-                <a16:creationId xmlns:a16="http://schemas.microsoft.com/office/drawing/2014/main" id="{7D3DB30B-3982-4D16-B616-C4F2326312F3}"/>
+                <a16:creationId xmlns:a16="http://schemas.microsoft.com/office/drawing/2014/main" id="{5ECDB13E-1E30-4202-B27D-3DB038DEF77C}"/>
               </a:ext>
             </a:extLst>
           </p:cNvPr>
@@ -5280,7 +5280,7 @@
           <p:cNvPr id="29" name="">
             <a:extLst xmlns:a="http://schemas.openxmlformats.org/drawingml/2006/main">
               <a:ext uri="{FF2B5EF4-FFF2-40B4-BE49-F238E27FC236}">
-                <a16:creationId xmlns:a16="http://schemas.microsoft.com/office/drawing/2014/main" id="{028ACA3E-F657-499F-A362-4DCC38EDEE8A}"/>
+                <a16:creationId xmlns:a16="http://schemas.microsoft.com/office/drawing/2014/main" id="{5A0BB735-DB2E-458E-AD46-EB49931CF806}"/>
               </a:ext>
             </a:extLst>
           </p:cNvPr>
@@ -5344,7 +5344,7 @@
           <p:cNvPr id="30" name="">
             <a:extLst xmlns:a="http://schemas.openxmlformats.org/drawingml/2006/main">
               <a:ext uri="{FF2B5EF4-FFF2-40B4-BE49-F238E27FC236}">
-                <a16:creationId xmlns:a16="http://schemas.microsoft.com/office/drawing/2014/main" id="{381B04A2-6140-47A5-904A-99208FD942A9}"/>
+                <a16:creationId xmlns:a16="http://schemas.microsoft.com/office/drawing/2014/main" id="{E417D83E-2347-4496-B78B-C33750F53FFD}"/>
               </a:ext>
             </a:extLst>
           </p:cNvPr>
@@ -5408,7 +5408,7 @@
           <p:cNvPr id="31" name="">
             <a:extLst xmlns:a="http://schemas.openxmlformats.org/drawingml/2006/main">
               <a:ext uri="{FF2B5EF4-FFF2-40B4-BE49-F238E27FC236}">
-                <a16:creationId xmlns:a16="http://schemas.microsoft.com/office/drawing/2014/main" id="{D0AEF9EC-CFF0-4EF6-9C30-9E19B3C2A5A2}"/>
+                <a16:creationId xmlns:a16="http://schemas.microsoft.com/office/drawing/2014/main" id="{6D2B1183-FF43-49BF-94D6-DDC9EC79F3B1}"/>
               </a:ext>
             </a:extLst>
           </p:cNvPr>
@@ -5441,7 +5441,7 @@
           <p:cNvPr id="32" name="">
             <a:extLst xmlns:a="http://schemas.openxmlformats.org/drawingml/2006/main">
               <a:ext uri="{FF2B5EF4-FFF2-40B4-BE49-F238E27FC236}">
-                <a16:creationId xmlns:a16="http://schemas.microsoft.com/office/drawing/2014/main" id="{0D526AE3-34AA-4ECF-85A6-CCE931A323A7}"/>
+                <a16:creationId xmlns:a16="http://schemas.microsoft.com/office/drawing/2014/main" id="{103E97DB-7C45-4037-95EA-A6DB16CACBDE}"/>
               </a:ext>
             </a:extLst>
           </p:cNvPr>
@@ -5505,7 +5505,7 @@
           <p:cNvPr id="33" name="">
             <a:extLst xmlns:a="http://schemas.openxmlformats.org/drawingml/2006/main">
               <a:ext uri="{FF2B5EF4-FFF2-40B4-BE49-F238E27FC236}">
-                <a16:creationId xmlns:a16="http://schemas.microsoft.com/office/drawing/2014/main" id="{86B84418-0118-463D-8395-DDDA37309979}"/>
+                <a16:creationId xmlns:a16="http://schemas.microsoft.com/office/drawing/2014/main" id="{1A1A033A-B807-49D8-9D82-85313A413ACA}"/>
               </a:ext>
             </a:extLst>
           </p:cNvPr>
@@ -5569,7 +5569,7 @@
           <p:cNvPr id="34" name="">
             <a:extLst xmlns:a="http://schemas.openxmlformats.org/drawingml/2006/main">
               <a:ext uri="{FF2B5EF4-FFF2-40B4-BE49-F238E27FC236}">
-                <a16:creationId xmlns:a16="http://schemas.microsoft.com/office/drawing/2014/main" id="{414FE4FB-512C-4780-806C-7E44383287E3}"/>
+                <a16:creationId xmlns:a16="http://schemas.microsoft.com/office/drawing/2014/main" id="{4ED99390-9CFA-4925-B3CC-37D85CED5AAA}"/>
               </a:ext>
             </a:extLst>
           </p:cNvPr>
@@ -5633,7 +5633,7 @@
           <p:cNvPr id="35" name="">
             <a:extLst xmlns:a="http://schemas.openxmlformats.org/drawingml/2006/main">
               <a:ext uri="{FF2B5EF4-FFF2-40B4-BE49-F238E27FC236}">
-                <a16:creationId xmlns:a16="http://schemas.microsoft.com/office/drawing/2014/main" id="{1D19F329-52B0-4416-8A7C-D5B3C511AB76}"/>
+                <a16:creationId xmlns:a16="http://schemas.microsoft.com/office/drawing/2014/main" id="{35DDF479-4639-4B47-A2B4-F1B991C27449}"/>
               </a:ext>
             </a:extLst>
           </p:cNvPr>
@@ -5666,7 +5666,7 @@
           <p:cNvPr id="36" name="">
             <a:extLst xmlns:a="http://schemas.openxmlformats.org/drawingml/2006/main">
               <a:ext uri="{FF2B5EF4-FFF2-40B4-BE49-F238E27FC236}">
-                <a16:creationId xmlns:a16="http://schemas.microsoft.com/office/drawing/2014/main" id="{4E5B3993-8D36-4802-9997-A4500EB4293F}"/>
+                <a16:creationId xmlns:a16="http://schemas.microsoft.com/office/drawing/2014/main" id="{D6191EA3-9AD6-41C7-9A8C-9CFF04531E65}"/>
               </a:ext>
             </a:extLst>
           </p:cNvPr>
@@ -5730,7 +5730,7 @@
           <p:cNvPr id="37" name="">
             <a:extLst xmlns:a="http://schemas.openxmlformats.org/drawingml/2006/main">
               <a:ext uri="{FF2B5EF4-FFF2-40B4-BE49-F238E27FC236}">
-                <a16:creationId xmlns:a16="http://schemas.microsoft.com/office/drawing/2014/main" id="{7DBACDB4-67B3-4BA4-AF91-8FE8C4EEE67B}"/>
+                <a16:creationId xmlns:a16="http://schemas.microsoft.com/office/drawing/2014/main" id="{DA4FCFDC-7CD2-404E-BD51-3AF58C7F3363}"/>
               </a:ext>
             </a:extLst>
           </p:cNvPr>
@@ -5794,7 +5794,7 @@
           <p:cNvPr id="38" name="">
             <a:extLst xmlns:a="http://schemas.openxmlformats.org/drawingml/2006/main">
               <a:ext uri="{FF2B5EF4-FFF2-40B4-BE49-F238E27FC236}">
-                <a16:creationId xmlns:a16="http://schemas.microsoft.com/office/drawing/2014/main" id="{C817AFF9-4670-4326-A3E5-D33AA8BA5F9A}"/>
+                <a16:creationId xmlns:a16="http://schemas.microsoft.com/office/drawing/2014/main" id="{4A3CFE2A-1181-40AD-A91C-9812C79E9C63}"/>
               </a:ext>
             </a:extLst>
           </p:cNvPr>
@@ -5858,7 +5858,7 @@
           <p:cNvPr id="39" name="">
             <a:extLst xmlns:a="http://schemas.openxmlformats.org/drawingml/2006/main">
               <a:ext uri="{FF2B5EF4-FFF2-40B4-BE49-F238E27FC236}">
-                <a16:creationId xmlns:a16="http://schemas.microsoft.com/office/drawing/2014/main" id="{1AA3CBE5-C809-4109-A419-FDA82F027558}"/>
+                <a16:creationId xmlns:a16="http://schemas.microsoft.com/office/drawing/2014/main" id="{D5D54E4C-6434-4C97-A0EA-5796B667A524}"/>
               </a:ext>
             </a:extLst>
           </p:cNvPr>
@@ -5996,7 +5996,7 @@
           <p:cNvPr id="40" name="">
             <a:extLst xmlns:a="http://schemas.openxmlformats.org/drawingml/2006/main">
               <a:ext uri="{FF2B5EF4-FFF2-40B4-BE49-F238E27FC236}">
-                <a16:creationId xmlns:a16="http://schemas.microsoft.com/office/drawing/2014/main" id="{EEA47911-DB4C-48CA-B253-1F74398799D8}"/>
+                <a16:creationId xmlns:a16="http://schemas.microsoft.com/office/drawing/2014/main" id="{46F14423-1DEC-4BD7-9FFE-0BF129C22BB0}"/>
               </a:ext>
             </a:extLst>
           </p:cNvPr>
@@ -6029,7 +6029,7 @@
           <p:cNvPr id="41" name="">
             <a:extLst xmlns:a="http://schemas.openxmlformats.org/drawingml/2006/main">
               <a:ext uri="{FF2B5EF4-FFF2-40B4-BE49-F238E27FC236}">
-                <a16:creationId xmlns:a16="http://schemas.microsoft.com/office/drawing/2014/main" id="{D581F1BD-FE36-42FD-A5AD-27467BD27B58}"/>
+                <a16:creationId xmlns:a16="http://schemas.microsoft.com/office/drawing/2014/main" id="{8D27A868-ACA0-4093-828A-AC56A9248AF7}"/>
               </a:ext>
             </a:extLst>
           </p:cNvPr>
@@ -6116,7 +6116,7 @@
           <p:cNvPr id="42" name="">
             <a:extLst xmlns:a="http://schemas.openxmlformats.org/drawingml/2006/main">
               <a:ext uri="{FF2B5EF4-FFF2-40B4-BE49-F238E27FC236}">
-                <a16:creationId xmlns:a16="http://schemas.microsoft.com/office/drawing/2014/main" id="{CC225525-8401-4B65-9803-CFBD5380232D}"/>
+                <a16:creationId xmlns:a16="http://schemas.microsoft.com/office/drawing/2014/main" id="{87904554-BCF6-46CC-821F-E3DB02EFBE3B}"/>
               </a:ext>
             </a:extLst>
           </p:cNvPr>
@@ -6180,7 +6180,7 @@
           <p:cNvPr id="43" name="">
             <a:extLst xmlns:a="http://schemas.openxmlformats.org/drawingml/2006/main">
               <a:ext uri="{FF2B5EF4-FFF2-40B4-BE49-F238E27FC236}">
-                <a16:creationId xmlns:a16="http://schemas.microsoft.com/office/drawing/2014/main" id="{7B1FED10-9D61-4DB4-AF78-348890912A24}"/>
+                <a16:creationId xmlns:a16="http://schemas.microsoft.com/office/drawing/2014/main" id="{0D5DC894-F353-4AA6-91E7-A1C6878A77C0}"/>
               </a:ext>
             </a:extLst>
           </p:cNvPr>
@@ -6242,7 +6242,7 @@
     </p:spTree>
     <p:extLst>
       <p:ext uri="{BB962C8B-B14F-4D97-AF65-F5344CB8AC3E}">
-        <p14:creationId xmlns:p14="http://schemas.microsoft.com/office/powerpoint/2010/main" val="375496618"/>
+        <p14:creationId xmlns:p14="http://schemas.microsoft.com/office/powerpoint/2010/main" val="927234113"/>
       </p:ext>
     </p:extLst>
   </p:cSld>
@@ -6266,7 +6266,7 @@
           <p:cNvPr id="1" name="">
             <a:extLst xmlns:a="http://schemas.openxmlformats.org/drawingml/2006/main">
               <a:ext uri="{FF2B5EF4-FFF2-40B4-BE49-F238E27FC236}">
-                <a16:creationId xmlns:a16="http://schemas.microsoft.com/office/drawing/2014/main" id="{4AD05C3A-C83F-438C-8723-414D31A56898}"/>
+                <a16:creationId xmlns:a16="http://schemas.microsoft.com/office/drawing/2014/main" id="{E836D02C-DAB5-460D-8368-79C585D21D9C}"/>
               </a:ext>
             </a:extLst>
           </p:cNvPr>
@@ -6299,7 +6299,7 @@
           <p:cNvPr id="2" name="">
             <a:extLst xmlns:a="http://schemas.openxmlformats.org/drawingml/2006/main">
               <a:ext uri="{FF2B5EF4-FFF2-40B4-BE49-F238E27FC236}">
-                <a16:creationId xmlns:a16="http://schemas.microsoft.com/office/drawing/2014/main" id="{862C56FC-58E4-4DF1-96FB-06B82C277258}"/>
+                <a16:creationId xmlns:a16="http://schemas.microsoft.com/office/drawing/2014/main" id="{F37E68AA-2523-47BF-9A05-AE1A3302DB2E}"/>
               </a:ext>
             </a:extLst>
           </p:cNvPr>
@@ -6332,7 +6332,7 @@
           <p:cNvPr id="3" name="">
             <a:extLst xmlns:a="http://schemas.openxmlformats.org/drawingml/2006/main">
               <a:ext uri="{FF2B5EF4-FFF2-40B4-BE49-F238E27FC236}">
-                <a16:creationId xmlns:a16="http://schemas.microsoft.com/office/drawing/2014/main" id="{D37F502A-C2F9-4FDA-9397-EB7049A14416}"/>
+                <a16:creationId xmlns:a16="http://schemas.microsoft.com/office/drawing/2014/main" id="{8875BA51-19AE-4BC7-A739-1AAF36128EE1}"/>
               </a:ext>
             </a:extLst>
           </p:cNvPr>
@@ -6396,7 +6396,7 @@
           <p:cNvPr id="4" name="">
             <a:extLst xmlns:a="http://schemas.openxmlformats.org/drawingml/2006/main">
               <a:ext uri="{FF2B5EF4-FFF2-40B4-BE49-F238E27FC236}">
-                <a16:creationId xmlns:a16="http://schemas.microsoft.com/office/drawing/2014/main" id="{93B5CC9C-6DEB-44D2-A06D-E16F2A72419E}"/>
+                <a16:creationId xmlns:a16="http://schemas.microsoft.com/office/drawing/2014/main" id="{55939726-3564-4E83-BC3E-128FAB0D1D00}"/>
               </a:ext>
             </a:extLst>
           </p:cNvPr>
@@ -6460,7 +6460,7 @@
           <p:cNvPr id="5" name="">
             <a:extLst xmlns:a="http://schemas.openxmlformats.org/drawingml/2006/main">
               <a:ext uri="{FF2B5EF4-FFF2-40B4-BE49-F238E27FC236}">
-                <a16:creationId xmlns:a16="http://schemas.microsoft.com/office/drawing/2014/main" id="{A2538EDA-DAC6-45D0-ADFE-A20A83AC33E0}"/>
+                <a16:creationId xmlns:a16="http://schemas.microsoft.com/office/drawing/2014/main" id="{4CA75A03-D8A0-4C67-812B-9B421C0A1A28}"/>
               </a:ext>
             </a:extLst>
           </p:cNvPr>
@@ -6493,7 +6493,7 @@
           <p:cNvPr id="6" name="">
             <a:extLst xmlns:a="http://schemas.openxmlformats.org/drawingml/2006/main">
               <a:ext uri="{FF2B5EF4-FFF2-40B4-BE49-F238E27FC236}">
-                <a16:creationId xmlns:a16="http://schemas.microsoft.com/office/drawing/2014/main" id="{F66947E7-FD36-487C-8C3D-4D93DB807DB6}"/>
+                <a16:creationId xmlns:a16="http://schemas.microsoft.com/office/drawing/2014/main" id="{61444A4D-5219-496E-A676-EDDB1236D201}"/>
               </a:ext>
             </a:extLst>
           </p:cNvPr>
@@ -6557,7 +6557,7 @@
           <p:cNvPr id="7" name="">
             <a:extLst xmlns:a="http://schemas.openxmlformats.org/drawingml/2006/main">
               <a:ext uri="{FF2B5EF4-FFF2-40B4-BE49-F238E27FC236}">
-                <a16:creationId xmlns:a16="http://schemas.microsoft.com/office/drawing/2014/main" id="{2141E407-FEB7-4DD0-BC06-C7EABCC81259}"/>
+                <a16:creationId xmlns:a16="http://schemas.microsoft.com/office/drawing/2014/main" id="{9F82B8DD-45F2-4D52-8705-8DC66704644D}"/>
               </a:ext>
             </a:extLst>
           </p:cNvPr>
@@ -6590,7 +6590,7 @@
           <p:cNvPr id="8" name="">
             <a:extLst xmlns:a="http://schemas.openxmlformats.org/drawingml/2006/main">
               <a:ext uri="{FF2B5EF4-FFF2-40B4-BE49-F238E27FC236}">
-                <a16:creationId xmlns:a16="http://schemas.microsoft.com/office/drawing/2014/main" id="{D6942407-CF85-437F-9053-5EE69F952020}"/>
+                <a16:creationId xmlns:a16="http://schemas.microsoft.com/office/drawing/2014/main" id="{5E4F4C23-B8C6-4B0A-B0FD-B0F3EEAB0BDD}"/>
               </a:ext>
             </a:extLst>
           </p:cNvPr>
@@ -6654,7 +6654,7 @@
           <p:cNvPr id="9" name="">
             <a:extLst xmlns:a="http://schemas.openxmlformats.org/drawingml/2006/main">
               <a:ext uri="{FF2B5EF4-FFF2-40B4-BE49-F238E27FC236}">
-                <a16:creationId xmlns:a16="http://schemas.microsoft.com/office/drawing/2014/main" id="{5169767E-9D83-4734-BE0D-3E97F9F015C7}"/>
+                <a16:creationId xmlns:a16="http://schemas.microsoft.com/office/drawing/2014/main" id="{050B64A8-26E8-44E4-BBB9-8886934F0777}"/>
               </a:ext>
             </a:extLst>
           </p:cNvPr>
@@ -6687,7 +6687,7 @@
           <p:cNvPr id="10" name="">
             <a:extLst xmlns:a="http://schemas.openxmlformats.org/drawingml/2006/main">
               <a:ext uri="{FF2B5EF4-FFF2-40B4-BE49-F238E27FC236}">
-                <a16:creationId xmlns:a16="http://schemas.microsoft.com/office/drawing/2014/main" id="{94C7D583-EA7E-4248-B5A7-5B1762A99624}"/>
+                <a16:creationId xmlns:a16="http://schemas.microsoft.com/office/drawing/2014/main" id="{A0532F10-468C-4B1D-854B-3AA2AEC2D2E2}"/>
               </a:ext>
             </a:extLst>
           </p:cNvPr>
@@ -6751,7 +6751,7 @@
           <p:cNvPr id="11" name="">
             <a:extLst xmlns:a="http://schemas.openxmlformats.org/drawingml/2006/main">
               <a:ext uri="{FF2B5EF4-FFF2-40B4-BE49-F238E27FC236}">
-                <a16:creationId xmlns:a16="http://schemas.microsoft.com/office/drawing/2014/main" id="{6B0C765B-7413-40B6-9CE1-31BB897F59AD}"/>
+                <a16:creationId xmlns:a16="http://schemas.microsoft.com/office/drawing/2014/main" id="{8B7274EA-4494-4DB8-9E99-C174B3E0D243}"/>
               </a:ext>
             </a:extLst>
           </p:cNvPr>
@@ -6784,7 +6784,7 @@
           <p:cNvPr id="12" name="">
             <a:extLst xmlns:a="http://schemas.openxmlformats.org/drawingml/2006/main">
               <a:ext uri="{FF2B5EF4-FFF2-40B4-BE49-F238E27FC236}">
-                <a16:creationId xmlns:a16="http://schemas.microsoft.com/office/drawing/2014/main" id="{0FFF6E1A-0D15-445B-9DDF-0F5AD236F6EF}"/>
+                <a16:creationId xmlns:a16="http://schemas.microsoft.com/office/drawing/2014/main" id="{749A6DAA-9ACF-4ADE-896C-73F023F6CE69}"/>
               </a:ext>
             </a:extLst>
           </p:cNvPr>
@@ -6848,7 +6848,7 @@
           <p:cNvPr id="13" name="">
             <a:extLst xmlns:a="http://schemas.openxmlformats.org/drawingml/2006/main">
               <a:ext uri="{FF2B5EF4-FFF2-40B4-BE49-F238E27FC236}">
-                <a16:creationId xmlns:a16="http://schemas.microsoft.com/office/drawing/2014/main" id="{4FF6C592-9E36-457E-AB68-D58BA2E0E298}"/>
+                <a16:creationId xmlns:a16="http://schemas.microsoft.com/office/drawing/2014/main" id="{27F992F9-3BBF-4718-80BE-2972F806DBC2}"/>
               </a:ext>
             </a:extLst>
           </p:cNvPr>
@@ -6881,7 +6881,7 @@
           <p:cNvPr id="14" name="">
             <a:extLst xmlns:a="http://schemas.openxmlformats.org/drawingml/2006/main">
               <a:ext uri="{FF2B5EF4-FFF2-40B4-BE49-F238E27FC236}">
-                <a16:creationId xmlns:a16="http://schemas.microsoft.com/office/drawing/2014/main" id="{1D2B9C1A-7730-42AA-AC0B-42105B362550}"/>
+                <a16:creationId xmlns:a16="http://schemas.microsoft.com/office/drawing/2014/main" id="{6CCE3A5D-A842-404E-B0CC-6F9E00940755}"/>
               </a:ext>
             </a:extLst>
           </p:cNvPr>
@@ -6945,7 +6945,7 @@
           <p:cNvPr id="15" name="">
             <a:extLst xmlns:a="http://schemas.openxmlformats.org/drawingml/2006/main">
               <a:ext uri="{FF2B5EF4-FFF2-40B4-BE49-F238E27FC236}">
-                <a16:creationId xmlns:a16="http://schemas.microsoft.com/office/drawing/2014/main" id="{C014016F-C107-4F28-AA10-0E7D96628916}"/>
+                <a16:creationId xmlns:a16="http://schemas.microsoft.com/office/drawing/2014/main" id="{3F3C0BD5-4FC3-4380-A588-BA2BFDE98723}"/>
               </a:ext>
             </a:extLst>
           </p:cNvPr>
@@ -6978,7 +6978,7 @@
           <p:cNvPr id="16" name="">
             <a:extLst xmlns:a="http://schemas.openxmlformats.org/drawingml/2006/main">
               <a:ext uri="{FF2B5EF4-FFF2-40B4-BE49-F238E27FC236}">
-                <a16:creationId xmlns:a16="http://schemas.microsoft.com/office/drawing/2014/main" id="{091BD359-C8BA-45AA-813E-B143DF21EC77}"/>
+                <a16:creationId xmlns:a16="http://schemas.microsoft.com/office/drawing/2014/main" id="{CF862607-54E9-4151-8E1E-C97DD76D8B0C}"/>
               </a:ext>
             </a:extLst>
           </p:cNvPr>
@@ -7042,7 +7042,7 @@
           <p:cNvPr id="17" name="">
             <a:extLst xmlns:a="http://schemas.openxmlformats.org/drawingml/2006/main">
               <a:ext uri="{FF2B5EF4-FFF2-40B4-BE49-F238E27FC236}">
-                <a16:creationId xmlns:a16="http://schemas.microsoft.com/office/drawing/2014/main" id="{5FD1E5E7-C791-4279-9334-43EE7BA16D18}"/>
+                <a16:creationId xmlns:a16="http://schemas.microsoft.com/office/drawing/2014/main" id="{32B36E91-0EAB-4751-8502-409DFF581865}"/>
               </a:ext>
             </a:extLst>
           </p:cNvPr>
@@ -7075,7 +7075,7 @@
           <p:cNvPr id="18" name="">
             <a:extLst xmlns:a="http://schemas.openxmlformats.org/drawingml/2006/main">
               <a:ext uri="{FF2B5EF4-FFF2-40B4-BE49-F238E27FC236}">
-                <a16:creationId xmlns:a16="http://schemas.microsoft.com/office/drawing/2014/main" id="{9F8D62AA-21B8-4F5E-A524-7730BB8C0C82}"/>
+                <a16:creationId xmlns:a16="http://schemas.microsoft.com/office/drawing/2014/main" id="{32334ECC-AC71-43A7-BDE4-403155D34319}"/>
               </a:ext>
             </a:extLst>
           </p:cNvPr>
@@ -7139,7 +7139,7 @@
           <p:cNvPr id="19" name="">
             <a:extLst xmlns:a="http://schemas.openxmlformats.org/drawingml/2006/main">
               <a:ext uri="{FF2B5EF4-FFF2-40B4-BE49-F238E27FC236}">
-                <a16:creationId xmlns:a16="http://schemas.microsoft.com/office/drawing/2014/main" id="{F3D1BEBB-A38F-4D5F-B15C-81B7612A5984}"/>
+                <a16:creationId xmlns:a16="http://schemas.microsoft.com/office/drawing/2014/main" id="{BD358748-A45E-4F29-A8A0-366A4EDDDAAC}"/>
               </a:ext>
             </a:extLst>
           </p:cNvPr>
@@ -7172,7 +7172,7 @@
           <p:cNvPr id="20" name="">
             <a:extLst xmlns:a="http://schemas.openxmlformats.org/drawingml/2006/main">
               <a:ext uri="{FF2B5EF4-FFF2-40B4-BE49-F238E27FC236}">
-                <a16:creationId xmlns:a16="http://schemas.microsoft.com/office/drawing/2014/main" id="{0322DDAB-A502-4E55-B01C-C146966A3561}"/>
+                <a16:creationId xmlns:a16="http://schemas.microsoft.com/office/drawing/2014/main" id="{F8F4D98C-8CC5-4E06-8F4D-E6DBD8A420BC}"/>
               </a:ext>
             </a:extLst>
           </p:cNvPr>
@@ -7236,7 +7236,7 @@
           <p:cNvPr id="21" name="">
             <a:extLst xmlns:a="http://schemas.openxmlformats.org/drawingml/2006/main">
               <a:ext uri="{FF2B5EF4-FFF2-40B4-BE49-F238E27FC236}">
-                <a16:creationId xmlns:a16="http://schemas.microsoft.com/office/drawing/2014/main" id="{5BAC0DB1-A002-4BC1-9DD5-6214AB22C70E}"/>
+                <a16:creationId xmlns:a16="http://schemas.microsoft.com/office/drawing/2014/main" id="{8CC7A01D-49A8-4E23-BC61-B2159CD99450}"/>
               </a:ext>
             </a:extLst>
           </p:cNvPr>
@@ -7269,7 +7269,7 @@
           <p:cNvPr id="22" name="">
             <a:extLst xmlns:a="http://schemas.openxmlformats.org/drawingml/2006/main">
               <a:ext uri="{FF2B5EF4-FFF2-40B4-BE49-F238E27FC236}">
-                <a16:creationId xmlns:a16="http://schemas.microsoft.com/office/drawing/2014/main" id="{2971BD83-65E2-49BD-95A1-027ACFF8C552}"/>
+                <a16:creationId xmlns:a16="http://schemas.microsoft.com/office/drawing/2014/main" id="{2C8EF79C-688D-41F3-9421-8B17DA2A37CA}"/>
               </a:ext>
             </a:extLst>
           </p:cNvPr>
@@ -7333,7 +7333,7 @@
           <p:cNvPr id="23" name="">
             <a:extLst xmlns:a="http://schemas.openxmlformats.org/drawingml/2006/main">
               <a:ext uri="{FF2B5EF4-FFF2-40B4-BE49-F238E27FC236}">
-                <a16:creationId xmlns:a16="http://schemas.microsoft.com/office/drawing/2014/main" id="{4F3F1006-5010-4565-B658-448333CBD860}"/>
+                <a16:creationId xmlns:a16="http://schemas.microsoft.com/office/drawing/2014/main" id="{18B2AA93-1A04-430F-9A5D-7B6E9D9B1797}"/>
               </a:ext>
             </a:extLst>
           </p:cNvPr>
@@ -7471,7 +7471,7 @@
           <p:cNvPr id="24" name="">
             <a:extLst xmlns:a="http://schemas.openxmlformats.org/drawingml/2006/main">
               <a:ext uri="{FF2B5EF4-FFF2-40B4-BE49-F238E27FC236}">
-                <a16:creationId xmlns:a16="http://schemas.microsoft.com/office/drawing/2014/main" id="{A44A263B-30CE-47BD-A436-E06EB06CE83E}"/>
+                <a16:creationId xmlns:a16="http://schemas.microsoft.com/office/drawing/2014/main" id="{0509B9C7-B46D-49BF-8308-B03E4352AF9B}"/>
               </a:ext>
             </a:extLst>
           </p:cNvPr>
@@ -7535,7 +7535,7 @@
           <p:cNvPr id="25" name="">
             <a:extLst xmlns:a="http://schemas.openxmlformats.org/drawingml/2006/main">
               <a:ext uri="{FF2B5EF4-FFF2-40B4-BE49-F238E27FC236}">
-                <a16:creationId xmlns:a16="http://schemas.microsoft.com/office/drawing/2014/main" id="{2D48E907-4C99-4009-969F-48C8FE8F2B73}"/>
+                <a16:creationId xmlns:a16="http://schemas.microsoft.com/office/drawing/2014/main" id="{04841B03-C986-4226-B40F-40D2F4E0D29C}"/>
               </a:ext>
             </a:extLst>
           </p:cNvPr>
@@ -7568,7 +7568,7 @@
           <p:cNvPr id="26" name="">
             <a:extLst xmlns:a="http://schemas.openxmlformats.org/drawingml/2006/main">
               <a:ext uri="{FF2B5EF4-FFF2-40B4-BE49-F238E27FC236}">
-                <a16:creationId xmlns:a16="http://schemas.microsoft.com/office/drawing/2014/main" id="{7363CCB2-9639-48C7-ABA5-6BA560197103}"/>
+                <a16:creationId xmlns:a16="http://schemas.microsoft.com/office/drawing/2014/main" id="{991674C2-6C94-4CA6-AD7D-8073CFE141DF}"/>
               </a:ext>
             </a:extLst>
           </p:cNvPr>
@@ -7632,7 +7632,7 @@
           <p:cNvPr id="27" name="">
             <a:extLst xmlns:a="http://schemas.openxmlformats.org/drawingml/2006/main">
               <a:ext uri="{FF2B5EF4-FFF2-40B4-BE49-F238E27FC236}">
-                <a16:creationId xmlns:a16="http://schemas.microsoft.com/office/drawing/2014/main" id="{8F643BEE-AF08-483C-9B8F-F0E7AACF9777}"/>
+                <a16:creationId xmlns:a16="http://schemas.microsoft.com/office/drawing/2014/main" id="{BFC0BFC6-8F5C-4CC2-89D7-5E713F50A115}"/>
               </a:ext>
             </a:extLst>
           </p:cNvPr>
@@ -7696,7 +7696,7 @@
           <p:cNvPr id="28" name="">
             <a:extLst xmlns:a="http://schemas.openxmlformats.org/drawingml/2006/main">
               <a:ext uri="{FF2B5EF4-FFF2-40B4-BE49-F238E27FC236}">
-                <a16:creationId xmlns:a16="http://schemas.microsoft.com/office/drawing/2014/main" id="{C808AB78-4B4B-4A34-8FF0-4DAC895D23F6}"/>
+                <a16:creationId xmlns:a16="http://schemas.microsoft.com/office/drawing/2014/main" id="{EB7ECC6B-DEBA-4991-99FA-91917404601A}"/>
               </a:ext>
             </a:extLst>
           </p:cNvPr>
@@ -7758,7 +7758,7 @@
     </p:spTree>
     <p:extLst>
       <p:ext uri="{BB962C8B-B14F-4D97-AF65-F5344CB8AC3E}">
-        <p14:creationId xmlns:p14="http://schemas.microsoft.com/office/powerpoint/2010/main" val="526515037"/>
+        <p14:creationId xmlns:p14="http://schemas.microsoft.com/office/powerpoint/2010/main" val="460708796"/>
       </p:ext>
     </p:extLst>
   </p:cSld>
@@ -7782,7 +7782,7 @@
           <p:cNvPr id="1" name="">
             <a:extLst xmlns:a="http://schemas.openxmlformats.org/drawingml/2006/main">
               <a:ext uri="{FF2B5EF4-FFF2-40B4-BE49-F238E27FC236}">
-                <a16:creationId xmlns:a16="http://schemas.microsoft.com/office/drawing/2014/main" id="{1667AE84-ED94-45EF-A9E2-0046AF3F3CEE}"/>
+                <a16:creationId xmlns:a16="http://schemas.microsoft.com/office/drawing/2014/main" id="{4B53D3EE-8313-4DB2-8101-6DF8611C1D59}"/>
               </a:ext>
             </a:extLst>
           </p:cNvPr>
@@ -7815,7 +7815,7 @@
           <p:cNvPr id="2" name="">
             <a:extLst xmlns:a="http://schemas.openxmlformats.org/drawingml/2006/main">
               <a:ext uri="{FF2B5EF4-FFF2-40B4-BE49-F238E27FC236}">
-                <a16:creationId xmlns:a16="http://schemas.microsoft.com/office/drawing/2014/main" id="{FC1CE3CC-E924-4A1B-AF42-37B8F9E54566}"/>
+                <a16:creationId xmlns:a16="http://schemas.microsoft.com/office/drawing/2014/main" id="{68CDA96A-69F0-4D9B-8AB0-0BFEC7AC608C}"/>
               </a:ext>
             </a:extLst>
           </p:cNvPr>
@@ -7848,7 +7848,7 @@
           <p:cNvPr id="3" name="">
             <a:extLst xmlns:a="http://schemas.openxmlformats.org/drawingml/2006/main">
               <a:ext uri="{FF2B5EF4-FFF2-40B4-BE49-F238E27FC236}">
-                <a16:creationId xmlns:a16="http://schemas.microsoft.com/office/drawing/2014/main" id="{A963A9F0-1F5C-4232-AB49-59A7FD37C1E9}"/>
+                <a16:creationId xmlns:a16="http://schemas.microsoft.com/office/drawing/2014/main" id="{A6EC4C7F-554F-4F7B-9265-9638169BE40D}"/>
               </a:ext>
             </a:extLst>
           </p:cNvPr>
@@ -7912,7 +7912,7 @@
           <p:cNvPr id="4" name="">
             <a:extLst xmlns:a="http://schemas.openxmlformats.org/drawingml/2006/main">
               <a:ext uri="{FF2B5EF4-FFF2-40B4-BE49-F238E27FC236}">
-                <a16:creationId xmlns:a16="http://schemas.microsoft.com/office/drawing/2014/main" id="{AB13B59F-9622-4F40-9491-5CD56BFD26D0}"/>
+                <a16:creationId xmlns:a16="http://schemas.microsoft.com/office/drawing/2014/main" id="{70F07DBF-E5F4-44D8-82E3-C87FA8A57659}"/>
               </a:ext>
             </a:extLst>
           </p:cNvPr>
@@ -7976,7 +7976,7 @@
           <p:cNvPr id="5" name="">
             <a:extLst xmlns:a="http://schemas.openxmlformats.org/drawingml/2006/main">
               <a:ext uri="{FF2B5EF4-FFF2-40B4-BE49-F238E27FC236}">
-                <a16:creationId xmlns:a16="http://schemas.microsoft.com/office/drawing/2014/main" id="{2AEE558E-5879-4744-964A-B410A85234B0}"/>
+                <a16:creationId xmlns:a16="http://schemas.microsoft.com/office/drawing/2014/main" id="{9CE8A84C-5B69-4548-93C1-D4EE33F1FCCC}"/>
               </a:ext>
             </a:extLst>
           </p:cNvPr>
@@ -8009,7 +8009,7 @@
           <p:cNvPr id="6" name="">
             <a:extLst xmlns:a="http://schemas.openxmlformats.org/drawingml/2006/main">
               <a:ext uri="{FF2B5EF4-FFF2-40B4-BE49-F238E27FC236}">
-                <a16:creationId xmlns:a16="http://schemas.microsoft.com/office/drawing/2014/main" id="{F58E32F1-B26A-4915-AFAB-B39957CE75AE}"/>
+                <a16:creationId xmlns:a16="http://schemas.microsoft.com/office/drawing/2014/main" id="{02EC3F43-8601-4C2F-B7A1-8B2D21E06B49}"/>
               </a:ext>
             </a:extLst>
           </p:cNvPr>
@@ -8073,7 +8073,7 @@
           <p:cNvPr id="7" name="">
             <a:extLst xmlns:a="http://schemas.openxmlformats.org/drawingml/2006/main">
               <a:ext uri="{FF2B5EF4-FFF2-40B4-BE49-F238E27FC236}">
-                <a16:creationId xmlns:a16="http://schemas.microsoft.com/office/drawing/2014/main" id="{9111D507-A852-4031-8983-BCA472DA28A2}"/>
+                <a16:creationId xmlns:a16="http://schemas.microsoft.com/office/drawing/2014/main" id="{ED5BCB8F-EFF6-4506-B418-3F9C7901989B}"/>
               </a:ext>
             </a:extLst>
           </p:cNvPr>
@@ -8137,7 +8137,7 @@
           <p:cNvPr id="8" name="">
             <a:extLst xmlns:a="http://schemas.openxmlformats.org/drawingml/2006/main">
               <a:ext uri="{FF2B5EF4-FFF2-40B4-BE49-F238E27FC236}">
-                <a16:creationId xmlns:a16="http://schemas.microsoft.com/office/drawing/2014/main" id="{39714324-8FD2-4262-9EB6-6103A9351401}"/>
+                <a16:creationId xmlns:a16="http://schemas.microsoft.com/office/drawing/2014/main" id="{5F946D48-7480-4884-94A1-607FA6973824}"/>
               </a:ext>
             </a:extLst>
           </p:cNvPr>
@@ -8201,7 +8201,7 @@
           <p:cNvPr id="9" name="">
             <a:extLst xmlns:a="http://schemas.openxmlformats.org/drawingml/2006/main">
               <a:ext uri="{FF2B5EF4-FFF2-40B4-BE49-F238E27FC236}">
-                <a16:creationId xmlns:a16="http://schemas.microsoft.com/office/drawing/2014/main" id="{C8FBDCE6-B354-4DCA-84E0-92368B67BBBE}"/>
+                <a16:creationId xmlns:a16="http://schemas.microsoft.com/office/drawing/2014/main" id="{25EC81E6-78A4-403A-B248-2664BF14A18B}"/>
               </a:ext>
             </a:extLst>
           </p:cNvPr>
@@ -8265,7 +8265,7 @@
           <p:cNvPr id="10" name="">
             <a:extLst xmlns:a="http://schemas.openxmlformats.org/drawingml/2006/main">
               <a:ext uri="{FF2B5EF4-FFF2-40B4-BE49-F238E27FC236}">
-                <a16:creationId xmlns:a16="http://schemas.microsoft.com/office/drawing/2014/main" id="{C4D4D7D6-CB30-4D85-B36B-1842A9492799}"/>
+                <a16:creationId xmlns:a16="http://schemas.microsoft.com/office/drawing/2014/main" id="{65C1E0FC-574D-4384-B3CF-4CFAE6329915}"/>
               </a:ext>
             </a:extLst>
           </p:cNvPr>
@@ -8329,7 +8329,7 @@
           <p:cNvPr id="11" name="">
             <a:extLst xmlns:a="http://schemas.openxmlformats.org/drawingml/2006/main">
               <a:ext uri="{FF2B5EF4-FFF2-40B4-BE49-F238E27FC236}">
-                <a16:creationId xmlns:a16="http://schemas.microsoft.com/office/drawing/2014/main" id="{96617983-2927-4033-9AF6-C483C2588FB4}"/>
+                <a16:creationId xmlns:a16="http://schemas.microsoft.com/office/drawing/2014/main" id="{BB558057-CFF6-4F02-B4EE-0BBECC585B2E}"/>
               </a:ext>
             </a:extLst>
           </p:cNvPr>
@@ -8362,7 +8362,7 @@
           <p:cNvPr id="12" name="">
             <a:extLst xmlns:a="http://schemas.openxmlformats.org/drawingml/2006/main">
               <a:ext uri="{FF2B5EF4-FFF2-40B4-BE49-F238E27FC236}">
-                <a16:creationId xmlns:a16="http://schemas.microsoft.com/office/drawing/2014/main" id="{C441FCF7-BE48-49AA-A987-F7B063C7A51D}"/>
+                <a16:creationId xmlns:a16="http://schemas.microsoft.com/office/drawing/2014/main" id="{559F14E8-DD0A-49CB-96BC-C789042AE8F0}"/>
               </a:ext>
             </a:extLst>
           </p:cNvPr>
@@ -8426,7 +8426,7 @@
           <p:cNvPr id="13" name="">
             <a:extLst xmlns:a="http://schemas.openxmlformats.org/drawingml/2006/main">
               <a:ext uri="{FF2B5EF4-FFF2-40B4-BE49-F238E27FC236}">
-                <a16:creationId xmlns:a16="http://schemas.microsoft.com/office/drawing/2014/main" id="{F9E2B9C9-5AC6-4E5C-AD9E-E961752C5568}"/>
+                <a16:creationId xmlns:a16="http://schemas.microsoft.com/office/drawing/2014/main" id="{9B57A148-82DD-4D44-9EBB-6D196D24E3D3}"/>
               </a:ext>
             </a:extLst>
           </p:cNvPr>
@@ -8490,7 +8490,7 @@
           <p:cNvPr id="14" name="">
             <a:extLst xmlns:a="http://schemas.openxmlformats.org/drawingml/2006/main">
               <a:ext uri="{FF2B5EF4-FFF2-40B4-BE49-F238E27FC236}">
-                <a16:creationId xmlns:a16="http://schemas.microsoft.com/office/drawing/2014/main" id="{3AE24340-1BD1-4AAA-BE59-622031583821}"/>
+                <a16:creationId xmlns:a16="http://schemas.microsoft.com/office/drawing/2014/main" id="{B326DD22-D621-48A2-AD76-60000E21DD29}"/>
               </a:ext>
             </a:extLst>
           </p:cNvPr>
@@ -8554,7 +8554,7 @@
           <p:cNvPr id="15" name="">
             <a:extLst xmlns:a="http://schemas.openxmlformats.org/drawingml/2006/main">
               <a:ext uri="{FF2B5EF4-FFF2-40B4-BE49-F238E27FC236}">
-                <a16:creationId xmlns:a16="http://schemas.microsoft.com/office/drawing/2014/main" id="{BA446B31-BAA4-4758-9BA9-819954C8C0CB}"/>
+                <a16:creationId xmlns:a16="http://schemas.microsoft.com/office/drawing/2014/main" id="{587A1559-E081-4347-B133-82EE2CCB2AFE}"/>
               </a:ext>
             </a:extLst>
           </p:cNvPr>
@@ -8618,7 +8618,7 @@
           <p:cNvPr id="16" name="">
             <a:extLst xmlns:a="http://schemas.openxmlformats.org/drawingml/2006/main">
               <a:ext uri="{FF2B5EF4-FFF2-40B4-BE49-F238E27FC236}">
-                <a16:creationId xmlns:a16="http://schemas.microsoft.com/office/drawing/2014/main" id="{C2357E46-C907-4E18-949D-DE80C91938CB}"/>
+                <a16:creationId xmlns:a16="http://schemas.microsoft.com/office/drawing/2014/main" id="{466B93F7-B188-4F8C-8CCC-F4E951E9FF32}"/>
               </a:ext>
             </a:extLst>
           </p:cNvPr>
@@ -8682,7 +8682,7 @@
           <p:cNvPr id="17" name="">
             <a:extLst xmlns:a="http://schemas.openxmlformats.org/drawingml/2006/main">
               <a:ext uri="{FF2B5EF4-FFF2-40B4-BE49-F238E27FC236}">
-                <a16:creationId xmlns:a16="http://schemas.microsoft.com/office/drawing/2014/main" id="{3A870567-8EFF-4C08-903B-DD7030F7CD10}"/>
+                <a16:creationId xmlns:a16="http://schemas.microsoft.com/office/drawing/2014/main" id="{7DE4D9A1-50B7-4665-8DA2-157DB1938CD3}"/>
               </a:ext>
             </a:extLst>
           </p:cNvPr>
@@ -8746,7 +8746,7 @@
           <p:cNvPr id="18" name="">
             <a:extLst xmlns:a="http://schemas.openxmlformats.org/drawingml/2006/main">
               <a:ext uri="{FF2B5EF4-FFF2-40B4-BE49-F238E27FC236}">
-                <a16:creationId xmlns:a16="http://schemas.microsoft.com/office/drawing/2014/main" id="{5374AA23-0D67-41F4-9BB9-9E5991E219D0}"/>
+                <a16:creationId xmlns:a16="http://schemas.microsoft.com/office/drawing/2014/main" id="{8F6B8317-7032-49F9-9E3F-7823C257400A}"/>
               </a:ext>
             </a:extLst>
           </p:cNvPr>
@@ -8810,7 +8810,7 @@
           <p:cNvPr id="19" name="">
             <a:extLst xmlns:a="http://schemas.openxmlformats.org/drawingml/2006/main">
               <a:ext uri="{FF2B5EF4-FFF2-40B4-BE49-F238E27FC236}">
-                <a16:creationId xmlns:a16="http://schemas.microsoft.com/office/drawing/2014/main" id="{ACBB0EA2-29F6-4741-953E-AA31BF08B189}"/>
+                <a16:creationId xmlns:a16="http://schemas.microsoft.com/office/drawing/2014/main" id="{737CA75F-8168-46DC-BDAC-24A40A61FB80}"/>
               </a:ext>
             </a:extLst>
           </p:cNvPr>
@@ -8874,7 +8874,7 @@
           <p:cNvPr id="20" name="">
             <a:extLst xmlns:a="http://schemas.openxmlformats.org/drawingml/2006/main">
               <a:ext uri="{FF2B5EF4-FFF2-40B4-BE49-F238E27FC236}">
-                <a16:creationId xmlns:a16="http://schemas.microsoft.com/office/drawing/2014/main" id="{50C10ABD-ED9C-4FE0-8D80-7B751725B5F6}"/>
+                <a16:creationId xmlns:a16="http://schemas.microsoft.com/office/drawing/2014/main" id="{DA450A04-F54F-4288-94EA-AB0598E5F8CE}"/>
               </a:ext>
             </a:extLst>
           </p:cNvPr>
@@ -8907,7 +8907,7 @@
           <p:cNvPr id="21" name="">
             <a:extLst xmlns:a="http://schemas.openxmlformats.org/drawingml/2006/main">
               <a:ext uri="{FF2B5EF4-FFF2-40B4-BE49-F238E27FC236}">
-                <a16:creationId xmlns:a16="http://schemas.microsoft.com/office/drawing/2014/main" id="{B50C9CA1-9E16-457B-B9C3-21B20234FD02}"/>
+                <a16:creationId xmlns:a16="http://schemas.microsoft.com/office/drawing/2014/main" id="{3A28F45E-DFDC-4244-93C9-846967A54762}"/>
               </a:ext>
             </a:extLst>
           </p:cNvPr>
@@ -8971,7 +8971,7 @@
           <p:cNvPr id="22" name="">
             <a:extLst xmlns:a="http://schemas.openxmlformats.org/drawingml/2006/main">
               <a:ext uri="{FF2B5EF4-FFF2-40B4-BE49-F238E27FC236}">
-                <a16:creationId xmlns:a16="http://schemas.microsoft.com/office/drawing/2014/main" id="{9C86D498-D91E-4D70-9B2D-38F183E9ED62}"/>
+                <a16:creationId xmlns:a16="http://schemas.microsoft.com/office/drawing/2014/main" id="{0FA06901-20C4-4BD3-8FA0-52AACF66AB19}"/>
               </a:ext>
             </a:extLst>
           </p:cNvPr>
@@ -9035,7 +9035,7 @@
           <p:cNvPr id="23" name="">
             <a:extLst xmlns:a="http://schemas.openxmlformats.org/drawingml/2006/main">
               <a:ext uri="{FF2B5EF4-FFF2-40B4-BE49-F238E27FC236}">
-                <a16:creationId xmlns:a16="http://schemas.microsoft.com/office/drawing/2014/main" id="{E2A2680D-21BB-4C0E-A4AE-FED3B5F0CAE4}"/>
+                <a16:creationId xmlns:a16="http://schemas.microsoft.com/office/drawing/2014/main" id="{796425D9-06AD-4876-86D0-65637DBE7424}"/>
               </a:ext>
             </a:extLst>
           </p:cNvPr>
@@ -9099,7 +9099,7 @@
           <p:cNvPr id="24" name="">
             <a:extLst xmlns:a="http://schemas.openxmlformats.org/drawingml/2006/main">
               <a:ext uri="{FF2B5EF4-FFF2-40B4-BE49-F238E27FC236}">
-                <a16:creationId xmlns:a16="http://schemas.microsoft.com/office/drawing/2014/main" id="{E91BCF89-5F54-43AB-BC09-35D35850713B}"/>
+                <a16:creationId xmlns:a16="http://schemas.microsoft.com/office/drawing/2014/main" id="{C60D3125-8E01-413A-B742-47C1E4AC4FAA}"/>
               </a:ext>
             </a:extLst>
           </p:cNvPr>
@@ -9163,7 +9163,7 @@
           <p:cNvPr id="25" name="">
             <a:extLst xmlns:a="http://schemas.openxmlformats.org/drawingml/2006/main">
               <a:ext uri="{FF2B5EF4-FFF2-40B4-BE49-F238E27FC236}">
-                <a16:creationId xmlns:a16="http://schemas.microsoft.com/office/drawing/2014/main" id="{75573FCA-8035-48CE-AC47-235352BBB0CA}"/>
+                <a16:creationId xmlns:a16="http://schemas.microsoft.com/office/drawing/2014/main" id="{17AEF38E-FE1D-4719-A99C-F21AD9DCF65D}"/>
               </a:ext>
             </a:extLst>
           </p:cNvPr>
@@ -9227,7 +9227,7 @@
           <p:cNvPr id="26" name="">
             <a:extLst xmlns:a="http://schemas.openxmlformats.org/drawingml/2006/main">
               <a:ext uri="{FF2B5EF4-FFF2-40B4-BE49-F238E27FC236}">
-                <a16:creationId xmlns:a16="http://schemas.microsoft.com/office/drawing/2014/main" id="{36F240FE-5F5F-4E14-9DB6-F93CD3089111}"/>
+                <a16:creationId xmlns:a16="http://schemas.microsoft.com/office/drawing/2014/main" id="{8FECFC5F-0019-4CE8-9B50-CAC44B4660D2}"/>
               </a:ext>
             </a:extLst>
           </p:cNvPr>
@@ -9291,7 +9291,7 @@
           <p:cNvPr id="27" name="">
             <a:extLst xmlns:a="http://schemas.openxmlformats.org/drawingml/2006/main">
               <a:ext uri="{FF2B5EF4-FFF2-40B4-BE49-F238E27FC236}">
-                <a16:creationId xmlns:a16="http://schemas.microsoft.com/office/drawing/2014/main" id="{6FCB9A99-FBF6-4D20-820C-9399A150FFA0}"/>
+                <a16:creationId xmlns:a16="http://schemas.microsoft.com/office/drawing/2014/main" id="{AA1C0966-119D-4DCD-B93A-5096775B5EC9}"/>
               </a:ext>
             </a:extLst>
           </p:cNvPr>
@@ -9355,7 +9355,7 @@
           <p:cNvPr id="28" name="">
             <a:extLst xmlns:a="http://schemas.openxmlformats.org/drawingml/2006/main">
               <a:ext uri="{FF2B5EF4-FFF2-40B4-BE49-F238E27FC236}">
-                <a16:creationId xmlns:a16="http://schemas.microsoft.com/office/drawing/2014/main" id="{A4CA0C16-FE99-43B3-B0EB-D002AFC08ED0}"/>
+                <a16:creationId xmlns:a16="http://schemas.microsoft.com/office/drawing/2014/main" id="{58B7CA60-F606-482E-8DB5-D94D3CBB7886}"/>
               </a:ext>
             </a:extLst>
           </p:cNvPr>
@@ -9419,7 +9419,7 @@
           <p:cNvPr id="29" name="">
             <a:extLst xmlns:a="http://schemas.openxmlformats.org/drawingml/2006/main">
               <a:ext uri="{FF2B5EF4-FFF2-40B4-BE49-F238E27FC236}">
-                <a16:creationId xmlns:a16="http://schemas.microsoft.com/office/drawing/2014/main" id="{3FF16555-9EA5-44A2-A856-FEFA3A7E6670}"/>
+                <a16:creationId xmlns:a16="http://schemas.microsoft.com/office/drawing/2014/main" id="{7CEA6B61-E8EC-4D3D-8041-BFEA1ABC9009}"/>
               </a:ext>
             </a:extLst>
           </p:cNvPr>
@@ -9452,7 +9452,7 @@
           <p:cNvPr id="30" name="">
             <a:extLst xmlns:a="http://schemas.openxmlformats.org/drawingml/2006/main">
               <a:ext uri="{FF2B5EF4-FFF2-40B4-BE49-F238E27FC236}">
-                <a16:creationId xmlns:a16="http://schemas.microsoft.com/office/drawing/2014/main" id="{9A856A78-30D0-4052-90DB-3D7523681FA9}"/>
+                <a16:creationId xmlns:a16="http://schemas.microsoft.com/office/drawing/2014/main" id="{4A83C706-1D99-4C40-9836-06149367421B}"/>
               </a:ext>
             </a:extLst>
           </p:cNvPr>
@@ -9516,7 +9516,7 @@
           <p:cNvPr id="31" name="">
             <a:extLst xmlns:a="http://schemas.openxmlformats.org/drawingml/2006/main">
               <a:ext uri="{FF2B5EF4-FFF2-40B4-BE49-F238E27FC236}">
-                <a16:creationId xmlns:a16="http://schemas.microsoft.com/office/drawing/2014/main" id="{42EA2417-40E7-4E52-9063-DB3D64B7140B}"/>
+                <a16:creationId xmlns:a16="http://schemas.microsoft.com/office/drawing/2014/main" id="{AA4FE3AE-A70C-44FD-96AD-AD03DFD1E7DD}"/>
               </a:ext>
             </a:extLst>
           </p:cNvPr>
@@ -9580,7 +9580,7 @@
           <p:cNvPr id="32" name="">
             <a:extLst xmlns:a="http://schemas.openxmlformats.org/drawingml/2006/main">
               <a:ext uri="{FF2B5EF4-FFF2-40B4-BE49-F238E27FC236}">
-                <a16:creationId xmlns:a16="http://schemas.microsoft.com/office/drawing/2014/main" id="{2CFF7931-6431-49AF-9F59-3A5E65F78C34}"/>
+                <a16:creationId xmlns:a16="http://schemas.microsoft.com/office/drawing/2014/main" id="{D5B1AD47-2A11-40F6-98E0-99AD02CF2DB3}"/>
               </a:ext>
             </a:extLst>
           </p:cNvPr>
@@ -9644,7 +9644,7 @@
           <p:cNvPr id="33" name="">
             <a:extLst xmlns:a="http://schemas.openxmlformats.org/drawingml/2006/main">
               <a:ext uri="{FF2B5EF4-FFF2-40B4-BE49-F238E27FC236}">
-                <a16:creationId xmlns:a16="http://schemas.microsoft.com/office/drawing/2014/main" id="{91F087F6-1D48-4A93-BB2B-44EE28788A69}"/>
+                <a16:creationId xmlns:a16="http://schemas.microsoft.com/office/drawing/2014/main" id="{79A6E43E-795E-49E1-BF19-195D673345C1}"/>
               </a:ext>
             </a:extLst>
           </p:cNvPr>
@@ -9708,7 +9708,7 @@
           <p:cNvPr id="34" name="">
             <a:extLst xmlns:a="http://schemas.openxmlformats.org/drawingml/2006/main">
               <a:ext uri="{FF2B5EF4-FFF2-40B4-BE49-F238E27FC236}">
-                <a16:creationId xmlns:a16="http://schemas.microsoft.com/office/drawing/2014/main" id="{890E96BE-3B7F-4810-B7A8-0F901BC143B0}"/>
+                <a16:creationId xmlns:a16="http://schemas.microsoft.com/office/drawing/2014/main" id="{66B7E867-39A8-4F6D-98A3-A88ED17F9158}"/>
               </a:ext>
             </a:extLst>
           </p:cNvPr>
@@ -9772,7 +9772,7 @@
           <p:cNvPr id="35" name="">
             <a:extLst xmlns:a="http://schemas.openxmlformats.org/drawingml/2006/main">
               <a:ext uri="{FF2B5EF4-FFF2-40B4-BE49-F238E27FC236}">
-                <a16:creationId xmlns:a16="http://schemas.microsoft.com/office/drawing/2014/main" id="{E45574B9-24C6-4FF5-866D-25A5F831862D}"/>
+                <a16:creationId xmlns:a16="http://schemas.microsoft.com/office/drawing/2014/main" id="{AE6EA0EE-C94F-4D40-A2A3-11B880B1EAE8}"/>
               </a:ext>
             </a:extLst>
           </p:cNvPr>
@@ -9836,7 +9836,7 @@
           <p:cNvPr id="36" name="">
             <a:extLst xmlns:a="http://schemas.openxmlformats.org/drawingml/2006/main">
               <a:ext uri="{FF2B5EF4-FFF2-40B4-BE49-F238E27FC236}">
-                <a16:creationId xmlns:a16="http://schemas.microsoft.com/office/drawing/2014/main" id="{D551300E-C43E-475C-80F2-0819986FCF71}"/>
+                <a16:creationId xmlns:a16="http://schemas.microsoft.com/office/drawing/2014/main" id="{B69BB397-330C-4189-9933-7CCB4AE7E9F2}"/>
               </a:ext>
             </a:extLst>
           </p:cNvPr>
@@ -9900,7 +9900,7 @@
           <p:cNvPr id="37" name="">
             <a:extLst xmlns:a="http://schemas.openxmlformats.org/drawingml/2006/main">
               <a:ext uri="{FF2B5EF4-FFF2-40B4-BE49-F238E27FC236}">
-                <a16:creationId xmlns:a16="http://schemas.microsoft.com/office/drawing/2014/main" id="{81822819-D04A-4862-BA11-071F452FE158}"/>
+                <a16:creationId xmlns:a16="http://schemas.microsoft.com/office/drawing/2014/main" id="{3B156B3D-AFE5-440F-812B-88D222C1C5AD}"/>
               </a:ext>
             </a:extLst>
           </p:cNvPr>
@@ -9964,7 +9964,7 @@
           <p:cNvPr id="38" name="">
             <a:extLst xmlns:a="http://schemas.openxmlformats.org/drawingml/2006/main">
               <a:ext uri="{FF2B5EF4-FFF2-40B4-BE49-F238E27FC236}">
-                <a16:creationId xmlns:a16="http://schemas.microsoft.com/office/drawing/2014/main" id="{DD788D70-2140-4D38-AD3C-47B0CCCC94F3}"/>
+                <a16:creationId xmlns:a16="http://schemas.microsoft.com/office/drawing/2014/main" id="{6F1C6D36-0D71-4528-B7A3-2566F9CFB08C}"/>
               </a:ext>
             </a:extLst>
           </p:cNvPr>
@@ -9997,7 +9997,7 @@
           <p:cNvPr id="39" name="">
             <a:extLst xmlns:a="http://schemas.openxmlformats.org/drawingml/2006/main">
               <a:ext uri="{FF2B5EF4-FFF2-40B4-BE49-F238E27FC236}">
-                <a16:creationId xmlns:a16="http://schemas.microsoft.com/office/drawing/2014/main" id="{172AFF13-60E1-4219-AC70-7309D10EE7BF}"/>
+                <a16:creationId xmlns:a16="http://schemas.microsoft.com/office/drawing/2014/main" id="{1E51709A-0832-4E8D-BAFC-FB7B5B130338}"/>
               </a:ext>
             </a:extLst>
           </p:cNvPr>
@@ -10061,7 +10061,7 @@
           <p:cNvPr id="40" name="">
             <a:extLst xmlns:a="http://schemas.openxmlformats.org/drawingml/2006/main">
               <a:ext uri="{FF2B5EF4-FFF2-40B4-BE49-F238E27FC236}">
-                <a16:creationId xmlns:a16="http://schemas.microsoft.com/office/drawing/2014/main" id="{F193F617-ECC4-44BA-B489-021CB37E7897}"/>
+                <a16:creationId xmlns:a16="http://schemas.microsoft.com/office/drawing/2014/main" id="{FF297219-DE63-4B6B-A970-C4196206976E}"/>
               </a:ext>
             </a:extLst>
           </p:cNvPr>
@@ -10125,7 +10125,7 @@
           <p:cNvPr id="41" name="">
             <a:extLst xmlns:a="http://schemas.openxmlformats.org/drawingml/2006/main">
               <a:ext uri="{FF2B5EF4-FFF2-40B4-BE49-F238E27FC236}">
-                <a16:creationId xmlns:a16="http://schemas.microsoft.com/office/drawing/2014/main" id="{BEAF71B3-1971-4E1E-A9C5-6BAC011F15DE}"/>
+                <a16:creationId xmlns:a16="http://schemas.microsoft.com/office/drawing/2014/main" id="{C0460634-5038-42EB-8623-4B731786CFF8}"/>
               </a:ext>
             </a:extLst>
           </p:cNvPr>
@@ -10189,7 +10189,7 @@
           <p:cNvPr id="42" name="">
             <a:extLst xmlns:a="http://schemas.openxmlformats.org/drawingml/2006/main">
               <a:ext uri="{FF2B5EF4-FFF2-40B4-BE49-F238E27FC236}">
-                <a16:creationId xmlns:a16="http://schemas.microsoft.com/office/drawing/2014/main" id="{9092EF26-4268-4497-8037-2C9D53D2CB39}"/>
+                <a16:creationId xmlns:a16="http://schemas.microsoft.com/office/drawing/2014/main" id="{34087BB4-C1CE-43C8-8D3D-D8CC5BFE802A}"/>
               </a:ext>
             </a:extLst>
           </p:cNvPr>
@@ -10253,7 +10253,7 @@
           <p:cNvPr id="43" name="">
             <a:extLst xmlns:a="http://schemas.openxmlformats.org/drawingml/2006/main">
               <a:ext uri="{FF2B5EF4-FFF2-40B4-BE49-F238E27FC236}">
-                <a16:creationId xmlns:a16="http://schemas.microsoft.com/office/drawing/2014/main" id="{3B9D71F9-8869-45D8-B827-CE11C99BF64D}"/>
+                <a16:creationId xmlns:a16="http://schemas.microsoft.com/office/drawing/2014/main" id="{34BB755E-3620-4BDA-B2F4-975283BEDAD7}"/>
               </a:ext>
             </a:extLst>
           </p:cNvPr>
@@ -10286,7 +10286,7 @@
           <p:cNvPr id="44" name="">
             <a:extLst xmlns:a="http://schemas.openxmlformats.org/drawingml/2006/main">
               <a:ext uri="{FF2B5EF4-FFF2-40B4-BE49-F238E27FC236}">
-                <a16:creationId xmlns:a16="http://schemas.microsoft.com/office/drawing/2014/main" id="{BFF2A3D7-3ECE-48EC-915A-E7743CF5A013}"/>
+                <a16:creationId xmlns:a16="http://schemas.microsoft.com/office/drawing/2014/main" id="{B8F75C01-30D5-44F6-8993-003762579EB0}"/>
               </a:ext>
             </a:extLst>
           </p:cNvPr>
@@ -10350,7 +10350,7 @@
           <p:cNvPr id="45" name="">
             <a:extLst xmlns:a="http://schemas.openxmlformats.org/drawingml/2006/main">
               <a:ext uri="{FF2B5EF4-FFF2-40B4-BE49-F238E27FC236}">
-                <a16:creationId xmlns:a16="http://schemas.microsoft.com/office/drawing/2014/main" id="{A143ACE3-536B-4199-A808-E1C55E75D7A1}"/>
+                <a16:creationId xmlns:a16="http://schemas.microsoft.com/office/drawing/2014/main" id="{BDA8CDCB-F2FA-4BDE-8B4B-7AA073523729}"/>
               </a:ext>
             </a:extLst>
           </p:cNvPr>
@@ -10414,7 +10414,7 @@
           <p:cNvPr id="46" name="">
             <a:extLst xmlns:a="http://schemas.openxmlformats.org/drawingml/2006/main">
               <a:ext uri="{FF2B5EF4-FFF2-40B4-BE49-F238E27FC236}">
-                <a16:creationId xmlns:a16="http://schemas.microsoft.com/office/drawing/2014/main" id="{827F8B46-7F05-4888-8428-1104A1C198B5}"/>
+                <a16:creationId xmlns:a16="http://schemas.microsoft.com/office/drawing/2014/main" id="{44836949-9984-427D-859B-F080929F53FE}"/>
               </a:ext>
             </a:extLst>
           </p:cNvPr>
@@ -10476,7 +10476,7 @@
     </p:spTree>
     <p:extLst>
       <p:ext uri="{BB962C8B-B14F-4D97-AF65-F5344CB8AC3E}">
-        <p14:creationId xmlns:p14="http://schemas.microsoft.com/office/powerpoint/2010/main" val="1120835479"/>
+        <p14:creationId xmlns:p14="http://schemas.microsoft.com/office/powerpoint/2010/main" val="1455474677"/>
       </p:ext>
     </p:extLst>
   </p:cSld>
@@ -10500,7 +10500,7 @@
           <p:cNvPr id="1" name="">
             <a:extLst xmlns:a="http://schemas.openxmlformats.org/drawingml/2006/main">
               <a:ext uri="{FF2B5EF4-FFF2-40B4-BE49-F238E27FC236}">
-                <a16:creationId xmlns:a16="http://schemas.microsoft.com/office/drawing/2014/main" id="{8EE8A494-3783-4123-91EB-9453DCB758D7}"/>
+                <a16:creationId xmlns:a16="http://schemas.microsoft.com/office/drawing/2014/main" id="{E920C383-D1D3-44E8-8633-FE123BEFC185}"/>
               </a:ext>
             </a:extLst>
           </p:cNvPr>
@@ -10533,7 +10533,7 @@
           <p:cNvPr id="2" name="">
             <a:extLst xmlns:a="http://schemas.openxmlformats.org/drawingml/2006/main">
               <a:ext uri="{FF2B5EF4-FFF2-40B4-BE49-F238E27FC236}">
-                <a16:creationId xmlns:a16="http://schemas.microsoft.com/office/drawing/2014/main" id="{CB40A6AC-2978-4F07-BC21-2C1BC5EC687C}"/>
+                <a16:creationId xmlns:a16="http://schemas.microsoft.com/office/drawing/2014/main" id="{91950046-AF77-40C7-A0B7-5E1108D3562B}"/>
               </a:ext>
             </a:extLst>
           </p:cNvPr>
@@ -10566,7 +10566,7 @@
           <p:cNvPr id="3" name="">
             <a:extLst xmlns:a="http://schemas.openxmlformats.org/drawingml/2006/main">
               <a:ext uri="{FF2B5EF4-FFF2-40B4-BE49-F238E27FC236}">
-                <a16:creationId xmlns:a16="http://schemas.microsoft.com/office/drawing/2014/main" id="{3BA41DD9-871F-4CA3-8676-325E1448937B}"/>
+                <a16:creationId xmlns:a16="http://schemas.microsoft.com/office/drawing/2014/main" id="{7963B0C1-2C31-43C3-8AF2-5FEAB34C7A06}"/>
               </a:ext>
             </a:extLst>
           </p:cNvPr>
@@ -10630,7 +10630,7 @@
           <p:cNvPr id="4" name="">
             <a:extLst xmlns:a="http://schemas.openxmlformats.org/drawingml/2006/main">
               <a:ext uri="{FF2B5EF4-FFF2-40B4-BE49-F238E27FC236}">
-                <a16:creationId xmlns:a16="http://schemas.microsoft.com/office/drawing/2014/main" id="{CC0BE257-4FB6-4D0E-80D7-F3F40EA06827}"/>
+                <a16:creationId xmlns:a16="http://schemas.microsoft.com/office/drawing/2014/main" id="{94991B54-9954-4CBF-AC6C-8EEFA7CB1143}"/>
               </a:ext>
             </a:extLst>
           </p:cNvPr>
@@ -10694,7 +10694,7 @@
           <p:cNvPr id="5" name="">
             <a:extLst xmlns:a="http://schemas.openxmlformats.org/drawingml/2006/main">
               <a:ext uri="{FF2B5EF4-FFF2-40B4-BE49-F238E27FC236}">
-                <a16:creationId xmlns:a16="http://schemas.microsoft.com/office/drawing/2014/main" id="{5F4FFBDB-9918-43B9-B074-E35AC2F9D13C}"/>
+                <a16:creationId xmlns:a16="http://schemas.microsoft.com/office/drawing/2014/main" id="{6FF74844-E917-43A5-A222-632B95DD2F61}"/>
               </a:ext>
             </a:extLst>
           </p:cNvPr>
@@ -10727,7 +10727,7 @@
           <p:cNvPr id="6" name="">
             <a:extLst xmlns:a="http://schemas.openxmlformats.org/drawingml/2006/main">
               <a:ext uri="{FF2B5EF4-FFF2-40B4-BE49-F238E27FC236}">
-                <a16:creationId xmlns:a16="http://schemas.microsoft.com/office/drawing/2014/main" id="{88BD532F-99E0-4DE0-A57A-867F66AC301C}"/>
+                <a16:creationId xmlns:a16="http://schemas.microsoft.com/office/drawing/2014/main" id="{2F9E4573-5B94-444D-A894-2D958D79B4C8}"/>
               </a:ext>
             </a:extLst>
           </p:cNvPr>
@@ -10791,7 +10791,7 @@
           <p:cNvPr id="7" name="">
             <a:extLst xmlns:a="http://schemas.openxmlformats.org/drawingml/2006/main">
               <a:ext uri="{FF2B5EF4-FFF2-40B4-BE49-F238E27FC236}">
-                <a16:creationId xmlns:a16="http://schemas.microsoft.com/office/drawing/2014/main" id="{E13F41FB-78B9-4693-AD08-3FABC7FF9643}"/>
+                <a16:creationId xmlns:a16="http://schemas.microsoft.com/office/drawing/2014/main" id="{F99FEA5F-3D2E-4865-81BB-58A60636B598}"/>
               </a:ext>
             </a:extLst>
           </p:cNvPr>
@@ -10824,7 +10824,7 @@
           <p:cNvPr id="8" name="">
             <a:extLst xmlns:a="http://schemas.openxmlformats.org/drawingml/2006/main">
               <a:ext uri="{FF2B5EF4-FFF2-40B4-BE49-F238E27FC236}">
-                <a16:creationId xmlns:a16="http://schemas.microsoft.com/office/drawing/2014/main" id="{2C939C18-252F-43AB-A006-3FC12FA28A3B}"/>
+                <a16:creationId xmlns:a16="http://schemas.microsoft.com/office/drawing/2014/main" id="{DE09042F-AC2E-4823-9136-39B08243CD20}"/>
               </a:ext>
             </a:extLst>
           </p:cNvPr>
@@ -10888,7 +10888,7 @@
           <p:cNvPr id="9" name="">
             <a:extLst xmlns:a="http://schemas.openxmlformats.org/drawingml/2006/main">
               <a:ext uri="{FF2B5EF4-FFF2-40B4-BE49-F238E27FC236}">
-                <a16:creationId xmlns:a16="http://schemas.microsoft.com/office/drawing/2014/main" id="{B205CD78-CF87-4785-9D3A-DBDEF62FF46D}"/>
+                <a16:creationId xmlns:a16="http://schemas.microsoft.com/office/drawing/2014/main" id="{DD13E911-0543-4884-9E86-A4F3E3296EA1}"/>
               </a:ext>
             </a:extLst>
           </p:cNvPr>
@@ -10921,7 +10921,7 @@
           <p:cNvPr id="10" name="">
             <a:extLst xmlns:a="http://schemas.openxmlformats.org/drawingml/2006/main">
               <a:ext uri="{FF2B5EF4-FFF2-40B4-BE49-F238E27FC236}">
-                <a16:creationId xmlns:a16="http://schemas.microsoft.com/office/drawing/2014/main" id="{0498D06F-05F3-4FB4-B8F8-A4207FF93BDA}"/>
+                <a16:creationId xmlns:a16="http://schemas.microsoft.com/office/drawing/2014/main" id="{632CE090-8AE1-4257-9011-F488C877418C}"/>
               </a:ext>
             </a:extLst>
           </p:cNvPr>
@@ -10985,7 +10985,7 @@
           <p:cNvPr id="11" name="">
             <a:extLst xmlns:a="http://schemas.openxmlformats.org/drawingml/2006/main">
               <a:ext uri="{FF2B5EF4-FFF2-40B4-BE49-F238E27FC236}">
-                <a16:creationId xmlns:a16="http://schemas.microsoft.com/office/drawing/2014/main" id="{A0DC9351-A8B9-40A6-ADC8-FAB7E9F72998}"/>
+                <a16:creationId xmlns:a16="http://schemas.microsoft.com/office/drawing/2014/main" id="{58CC082F-4525-4F18-955A-A500550B6563}"/>
               </a:ext>
             </a:extLst>
           </p:cNvPr>
@@ -11018,7 +11018,7 @@
           <p:cNvPr id="12" name="">
             <a:extLst xmlns:a="http://schemas.openxmlformats.org/drawingml/2006/main">
               <a:ext uri="{FF2B5EF4-FFF2-40B4-BE49-F238E27FC236}">
-                <a16:creationId xmlns:a16="http://schemas.microsoft.com/office/drawing/2014/main" id="{C985B79D-E1DB-4278-984F-97D3092DD5B5}"/>
+                <a16:creationId xmlns:a16="http://schemas.microsoft.com/office/drawing/2014/main" id="{2E54EDCB-E84A-4E52-BA2A-5C8D438EDF2B}"/>
               </a:ext>
             </a:extLst>
           </p:cNvPr>
@@ -11082,7 +11082,7 @@
           <p:cNvPr id="13" name="">
             <a:extLst xmlns:a="http://schemas.openxmlformats.org/drawingml/2006/main">
               <a:ext uri="{FF2B5EF4-FFF2-40B4-BE49-F238E27FC236}">
-                <a16:creationId xmlns:a16="http://schemas.microsoft.com/office/drawing/2014/main" id="{18F889D1-B8CD-45B7-9661-6AB85152A939}"/>
+                <a16:creationId xmlns:a16="http://schemas.microsoft.com/office/drawing/2014/main" id="{BF9B3A15-2F96-4A53-89D2-DFD282C3AFAE}"/>
               </a:ext>
             </a:extLst>
           </p:cNvPr>
@@ -11169,7 +11169,7 @@
           <p:cNvPr id="14" name="">
             <a:extLst xmlns:a="http://schemas.openxmlformats.org/drawingml/2006/main">
               <a:ext uri="{FF2B5EF4-FFF2-40B4-BE49-F238E27FC236}">
-                <a16:creationId xmlns:a16="http://schemas.microsoft.com/office/drawing/2014/main" id="{641E6DD0-FCC8-48DA-B956-C22D0279EAB2}"/>
+                <a16:creationId xmlns:a16="http://schemas.microsoft.com/office/drawing/2014/main" id="{6C2AA874-BC76-4E91-B521-4F72F8A16B14}"/>
               </a:ext>
             </a:extLst>
           </p:cNvPr>
@@ -11202,7 +11202,7 @@
           <p:cNvPr id="15" name="">
             <a:extLst xmlns:a="http://schemas.openxmlformats.org/drawingml/2006/main">
               <a:ext uri="{FF2B5EF4-FFF2-40B4-BE49-F238E27FC236}">
-                <a16:creationId xmlns:a16="http://schemas.microsoft.com/office/drawing/2014/main" id="{3DBA5714-C4CC-4817-AEA7-4B8CEA064EEE}"/>
+                <a16:creationId xmlns:a16="http://schemas.microsoft.com/office/drawing/2014/main" id="{83D0F548-BE40-4F50-9351-24B906C8F38C}"/>
               </a:ext>
             </a:extLst>
           </p:cNvPr>
@@ -11266,7 +11266,7 @@
           <p:cNvPr id="16" name="">
             <a:extLst xmlns:a="http://schemas.openxmlformats.org/drawingml/2006/main">
               <a:ext uri="{FF2B5EF4-FFF2-40B4-BE49-F238E27FC236}">
-                <a16:creationId xmlns:a16="http://schemas.microsoft.com/office/drawing/2014/main" id="{B9631A36-D3BC-4487-B7A8-0314AC8BE14A}"/>
+                <a16:creationId xmlns:a16="http://schemas.microsoft.com/office/drawing/2014/main" id="{6BC88E9B-BD86-428E-BFFC-1BC91B6A28F8}"/>
               </a:ext>
             </a:extLst>
           </p:cNvPr>
@@ -11299,7 +11299,7 @@
           <p:cNvPr id="17" name="">
             <a:extLst xmlns:a="http://schemas.openxmlformats.org/drawingml/2006/main">
               <a:ext uri="{FF2B5EF4-FFF2-40B4-BE49-F238E27FC236}">
-                <a16:creationId xmlns:a16="http://schemas.microsoft.com/office/drawing/2014/main" id="{C45478F1-06B0-4285-9482-3254D6797ED5}"/>
+                <a16:creationId xmlns:a16="http://schemas.microsoft.com/office/drawing/2014/main" id="{6F2A4647-D305-4606-AFBB-F9808D9E9BA2}"/>
               </a:ext>
             </a:extLst>
           </p:cNvPr>
@@ -11363,7 +11363,7 @@
           <p:cNvPr id="18" name="">
             <a:extLst xmlns:a="http://schemas.openxmlformats.org/drawingml/2006/main">
               <a:ext uri="{FF2B5EF4-FFF2-40B4-BE49-F238E27FC236}">
-                <a16:creationId xmlns:a16="http://schemas.microsoft.com/office/drawing/2014/main" id="{C585F40B-6BD2-4F7E-A09E-20BA539EF15C}"/>
+                <a16:creationId xmlns:a16="http://schemas.microsoft.com/office/drawing/2014/main" id="{386112A9-25BD-49B9-819E-EA0B5EBDEB99}"/>
               </a:ext>
             </a:extLst>
           </p:cNvPr>
@@ -11396,7 +11396,7 @@
           <p:cNvPr id="19" name="">
             <a:extLst xmlns:a="http://schemas.openxmlformats.org/drawingml/2006/main">
               <a:ext uri="{FF2B5EF4-FFF2-40B4-BE49-F238E27FC236}">
-                <a16:creationId xmlns:a16="http://schemas.microsoft.com/office/drawing/2014/main" id="{BC2A02DB-D9DA-478D-949B-7F5A4D1412E0}"/>
+                <a16:creationId xmlns:a16="http://schemas.microsoft.com/office/drawing/2014/main" id="{B1BE7287-FC8C-483B-9624-6223C9133B7E}"/>
               </a:ext>
             </a:extLst>
           </p:cNvPr>
@@ -11460,7 +11460,7 @@
           <p:cNvPr id="20" name="">
             <a:extLst xmlns:a="http://schemas.openxmlformats.org/drawingml/2006/main">
               <a:ext uri="{FF2B5EF4-FFF2-40B4-BE49-F238E27FC236}">
-                <a16:creationId xmlns:a16="http://schemas.microsoft.com/office/drawing/2014/main" id="{E358FD48-AE5F-400B-95D5-2E31FF70AE8A}"/>
+                <a16:creationId xmlns:a16="http://schemas.microsoft.com/office/drawing/2014/main" id="{3FD73726-2774-4EE4-8670-A6F061266C8E}"/>
               </a:ext>
             </a:extLst>
           </p:cNvPr>
@@ -11493,7 +11493,7 @@
           <p:cNvPr id="21" name="">
             <a:extLst xmlns:a="http://schemas.openxmlformats.org/drawingml/2006/main">
               <a:ext uri="{FF2B5EF4-FFF2-40B4-BE49-F238E27FC236}">
-                <a16:creationId xmlns:a16="http://schemas.microsoft.com/office/drawing/2014/main" id="{CF59D796-F5F4-4E5A-9418-B24C3AC1C490}"/>
+                <a16:creationId xmlns:a16="http://schemas.microsoft.com/office/drawing/2014/main" id="{F3304D28-1777-4437-9B05-6083E7A327E9}"/>
               </a:ext>
             </a:extLst>
           </p:cNvPr>
@@ -11557,7 +11557,7 @@
           <p:cNvPr id="22" name="">
             <a:extLst xmlns:a="http://schemas.openxmlformats.org/drawingml/2006/main">
               <a:ext uri="{FF2B5EF4-FFF2-40B4-BE49-F238E27FC236}">
-                <a16:creationId xmlns:a16="http://schemas.microsoft.com/office/drawing/2014/main" id="{6AC832A4-32CD-4789-86A0-A0FFC21EDF93}"/>
+                <a16:creationId xmlns:a16="http://schemas.microsoft.com/office/drawing/2014/main" id="{61DCE0EF-D409-42E2-A445-42EDFF188000}"/>
               </a:ext>
             </a:extLst>
           </p:cNvPr>
@@ -11644,7 +11644,7 @@
           <p:cNvPr id="23" name="">
             <a:extLst xmlns:a="http://schemas.openxmlformats.org/drawingml/2006/main">
               <a:ext uri="{FF2B5EF4-FFF2-40B4-BE49-F238E27FC236}">
-                <a16:creationId xmlns:a16="http://schemas.microsoft.com/office/drawing/2014/main" id="{39961CFC-8DAA-4DEB-912E-15394D9F9B7A}"/>
+                <a16:creationId xmlns:a16="http://schemas.microsoft.com/office/drawing/2014/main" id="{BBC539B1-1391-4F62-B270-5A94213660E3}"/>
               </a:ext>
             </a:extLst>
           </p:cNvPr>
@@ -11677,7 +11677,7 @@
           <p:cNvPr id="24" name="">
             <a:extLst xmlns:a="http://schemas.openxmlformats.org/drawingml/2006/main">
               <a:ext uri="{FF2B5EF4-FFF2-40B4-BE49-F238E27FC236}">
-                <a16:creationId xmlns:a16="http://schemas.microsoft.com/office/drawing/2014/main" id="{D510D3D7-039F-4000-98DB-E6E44439A449}"/>
+                <a16:creationId xmlns:a16="http://schemas.microsoft.com/office/drawing/2014/main" id="{EE190A50-3DEE-440F-AC2C-6B11E4EF8CFA}"/>
               </a:ext>
             </a:extLst>
           </p:cNvPr>
@@ -11741,7 +11741,7 @@
           <p:cNvPr id="25" name="">
             <a:extLst xmlns:a="http://schemas.openxmlformats.org/drawingml/2006/main">
               <a:ext uri="{FF2B5EF4-FFF2-40B4-BE49-F238E27FC236}">
-                <a16:creationId xmlns:a16="http://schemas.microsoft.com/office/drawing/2014/main" id="{9EFEB10F-BE57-46E5-BF8D-87FF314045E1}"/>
+                <a16:creationId xmlns:a16="http://schemas.microsoft.com/office/drawing/2014/main" id="{575D1706-671A-48F9-A1A0-23895D4E7428}"/>
               </a:ext>
             </a:extLst>
           </p:cNvPr>
@@ -11774,7 +11774,7 @@
           <p:cNvPr id="26" name="">
             <a:extLst xmlns:a="http://schemas.openxmlformats.org/drawingml/2006/main">
               <a:ext uri="{FF2B5EF4-FFF2-40B4-BE49-F238E27FC236}">
-                <a16:creationId xmlns:a16="http://schemas.microsoft.com/office/drawing/2014/main" id="{ECEE929D-A5B5-4623-8294-2EEBABA47F3A}"/>
+                <a16:creationId xmlns:a16="http://schemas.microsoft.com/office/drawing/2014/main" id="{0C924592-F3F1-46DC-8E9D-31588C5AB1C5}"/>
               </a:ext>
             </a:extLst>
           </p:cNvPr>
@@ -11838,7 +11838,7 @@
           <p:cNvPr id="27" name="">
             <a:extLst xmlns:a="http://schemas.openxmlformats.org/drawingml/2006/main">
               <a:ext uri="{FF2B5EF4-FFF2-40B4-BE49-F238E27FC236}">
-                <a16:creationId xmlns:a16="http://schemas.microsoft.com/office/drawing/2014/main" id="{C285D734-64E7-40D1-A3DB-0EDA6356D8BF}"/>
+                <a16:creationId xmlns:a16="http://schemas.microsoft.com/office/drawing/2014/main" id="{A9575A13-BE41-436A-9FA9-7243A1BB4262}"/>
               </a:ext>
             </a:extLst>
           </p:cNvPr>
@@ -11871,7 +11871,7 @@
           <p:cNvPr id="28" name="">
             <a:extLst xmlns:a="http://schemas.openxmlformats.org/drawingml/2006/main">
               <a:ext uri="{FF2B5EF4-FFF2-40B4-BE49-F238E27FC236}">
-                <a16:creationId xmlns:a16="http://schemas.microsoft.com/office/drawing/2014/main" id="{8AF641F7-4528-45AD-964A-2A237D39FE46}"/>
+                <a16:creationId xmlns:a16="http://schemas.microsoft.com/office/drawing/2014/main" id="{9F11E1B4-9A90-4490-9264-82C02E54093C}"/>
               </a:ext>
             </a:extLst>
           </p:cNvPr>
@@ -11935,7 +11935,7 @@
           <p:cNvPr id="29" name="">
             <a:extLst xmlns:a="http://schemas.openxmlformats.org/drawingml/2006/main">
               <a:ext uri="{FF2B5EF4-FFF2-40B4-BE49-F238E27FC236}">
-                <a16:creationId xmlns:a16="http://schemas.microsoft.com/office/drawing/2014/main" id="{D6572FC2-0E2B-47EE-8B2C-03AAB290B827}"/>
+                <a16:creationId xmlns:a16="http://schemas.microsoft.com/office/drawing/2014/main" id="{6DA83687-EB51-4AC8-9787-0C31234F6D42}"/>
               </a:ext>
             </a:extLst>
           </p:cNvPr>
@@ -11968,7 +11968,7 @@
           <p:cNvPr id="30" name="">
             <a:extLst xmlns:a="http://schemas.openxmlformats.org/drawingml/2006/main">
               <a:ext uri="{FF2B5EF4-FFF2-40B4-BE49-F238E27FC236}">
-                <a16:creationId xmlns:a16="http://schemas.microsoft.com/office/drawing/2014/main" id="{165D1606-4054-4595-B936-A59154002992}"/>
+                <a16:creationId xmlns:a16="http://schemas.microsoft.com/office/drawing/2014/main" id="{5E1F8AA4-E98C-44FD-8848-1CC2BC972E33}"/>
               </a:ext>
             </a:extLst>
           </p:cNvPr>
@@ -12032,7 +12032,7 @@
           <p:cNvPr id="31" name="">
             <a:extLst xmlns:a="http://schemas.openxmlformats.org/drawingml/2006/main">
               <a:ext uri="{FF2B5EF4-FFF2-40B4-BE49-F238E27FC236}">
-                <a16:creationId xmlns:a16="http://schemas.microsoft.com/office/drawing/2014/main" id="{A8B87BEE-B838-4E1B-9642-F288C213B32D}"/>
+                <a16:creationId xmlns:a16="http://schemas.microsoft.com/office/drawing/2014/main" id="{DD6BB07C-D73B-4A4E-8B96-0EEB12A7F1D5}"/>
               </a:ext>
             </a:extLst>
           </p:cNvPr>
@@ -12119,7 +12119,7 @@
           <p:cNvPr id="32" name="">
             <a:extLst xmlns:a="http://schemas.openxmlformats.org/drawingml/2006/main">
               <a:ext uri="{FF2B5EF4-FFF2-40B4-BE49-F238E27FC236}">
-                <a16:creationId xmlns:a16="http://schemas.microsoft.com/office/drawing/2014/main" id="{E0A3D848-CEB2-4A49-9E46-100B6D3F1E9E}"/>
+                <a16:creationId xmlns:a16="http://schemas.microsoft.com/office/drawing/2014/main" id="{1CD6C3B3-C343-44F4-8F7C-B47FB577BA9E}"/>
               </a:ext>
             </a:extLst>
           </p:cNvPr>
@@ -12183,7 +12183,7 @@
           <p:cNvPr id="33" name="">
             <a:extLst xmlns:a="http://schemas.openxmlformats.org/drawingml/2006/main">
               <a:ext uri="{FF2B5EF4-FFF2-40B4-BE49-F238E27FC236}">
-                <a16:creationId xmlns:a16="http://schemas.microsoft.com/office/drawing/2014/main" id="{9BB0A440-6E39-4E8D-AFF4-8B46E21D6114}"/>
+                <a16:creationId xmlns:a16="http://schemas.microsoft.com/office/drawing/2014/main" id="{098B71A0-A471-4B97-984D-8A2A346E755C}"/>
               </a:ext>
             </a:extLst>
           </p:cNvPr>
@@ -12245,7 +12245,7 @@
     </p:spTree>
     <p:extLst>
       <p:ext uri="{BB962C8B-B14F-4D97-AF65-F5344CB8AC3E}">
-        <p14:creationId xmlns:p14="http://schemas.microsoft.com/office/powerpoint/2010/main" val="505058695"/>
+        <p14:creationId xmlns:p14="http://schemas.microsoft.com/office/powerpoint/2010/main" val="2121072742"/>
       </p:ext>
     </p:extLst>
   </p:cSld>
@@ -12269,7 +12269,7 @@
           <p:cNvPr id="1" name="">
             <a:extLst xmlns:a="http://schemas.openxmlformats.org/drawingml/2006/main">
               <a:ext uri="{FF2B5EF4-FFF2-40B4-BE49-F238E27FC236}">
-                <a16:creationId xmlns:a16="http://schemas.microsoft.com/office/drawing/2014/main" id="{DBF3FBF9-53BC-4E95-8473-A74D038B5CA0}"/>
+                <a16:creationId xmlns:a16="http://schemas.microsoft.com/office/drawing/2014/main" id="{D41E9B8A-8CB0-4FB8-BEF0-8B769C88AA00}"/>
               </a:ext>
             </a:extLst>
           </p:cNvPr>
@@ -12302,7 +12302,7 @@
           <p:cNvPr id="2" name="">
             <a:extLst xmlns:a="http://schemas.openxmlformats.org/drawingml/2006/main">
               <a:ext uri="{FF2B5EF4-FFF2-40B4-BE49-F238E27FC236}">
-                <a16:creationId xmlns:a16="http://schemas.microsoft.com/office/drawing/2014/main" id="{1F365759-60DB-4EC4-8E1A-948F0EDA0137}"/>
+                <a16:creationId xmlns:a16="http://schemas.microsoft.com/office/drawing/2014/main" id="{4EE807CC-F91C-4542-8B02-0717BA568D6D}"/>
               </a:ext>
             </a:extLst>
           </p:cNvPr>
@@ -12335,7 +12335,7 @@
           <p:cNvPr id="3" name="">
             <a:extLst xmlns:a="http://schemas.openxmlformats.org/drawingml/2006/main">
               <a:ext uri="{FF2B5EF4-FFF2-40B4-BE49-F238E27FC236}">
-                <a16:creationId xmlns:a16="http://schemas.microsoft.com/office/drawing/2014/main" id="{1A9FA9C2-CEF1-495B-A97C-3E0FA9962E2F}"/>
+                <a16:creationId xmlns:a16="http://schemas.microsoft.com/office/drawing/2014/main" id="{89740B41-ECD0-4D47-A960-5FE6A512473B}"/>
               </a:ext>
             </a:extLst>
           </p:cNvPr>
@@ -12399,7 +12399,7 @@
           <p:cNvPr id="4" name="">
             <a:extLst xmlns:a="http://schemas.openxmlformats.org/drawingml/2006/main">
               <a:ext uri="{FF2B5EF4-FFF2-40B4-BE49-F238E27FC236}">
-                <a16:creationId xmlns:a16="http://schemas.microsoft.com/office/drawing/2014/main" id="{F55D8DC0-F675-4FC9-AF5C-1104359B8634}"/>
+                <a16:creationId xmlns:a16="http://schemas.microsoft.com/office/drawing/2014/main" id="{A0B1F8B1-5990-4217-801C-6C676D64B3B4}"/>
               </a:ext>
             </a:extLst>
           </p:cNvPr>
@@ -12463,7 +12463,7 @@
           <p:cNvPr id="5" name="">
             <a:extLst xmlns:a="http://schemas.openxmlformats.org/drawingml/2006/main">
               <a:ext uri="{FF2B5EF4-FFF2-40B4-BE49-F238E27FC236}">
-                <a16:creationId xmlns:a16="http://schemas.microsoft.com/office/drawing/2014/main" id="{2131D937-291A-439E-B267-0D1C5C8E9598}"/>
+                <a16:creationId xmlns:a16="http://schemas.microsoft.com/office/drawing/2014/main" id="{299BFE80-E319-4A76-9012-7022F92472EA}"/>
               </a:ext>
             </a:extLst>
           </p:cNvPr>
@@ -12496,7 +12496,7 @@
           <p:cNvPr id="6" name="">
             <a:extLst xmlns:a="http://schemas.openxmlformats.org/drawingml/2006/main">
               <a:ext uri="{FF2B5EF4-FFF2-40B4-BE49-F238E27FC236}">
-                <a16:creationId xmlns:a16="http://schemas.microsoft.com/office/drawing/2014/main" id="{DF90C5CA-E171-4CED-973B-6392B1DA1C50}"/>
+                <a16:creationId xmlns:a16="http://schemas.microsoft.com/office/drawing/2014/main" id="{5B09907E-9E1A-44BA-B561-C0A98FCE7368}"/>
               </a:ext>
             </a:extLst>
           </p:cNvPr>
@@ -12560,7 +12560,7 @@
           <p:cNvPr id="7" name="">
             <a:extLst xmlns:a="http://schemas.openxmlformats.org/drawingml/2006/main">
               <a:ext uri="{FF2B5EF4-FFF2-40B4-BE49-F238E27FC236}">
-                <a16:creationId xmlns:a16="http://schemas.microsoft.com/office/drawing/2014/main" id="{3F66C8CA-17E9-4090-A3A8-0E1318F93A92}"/>
+                <a16:creationId xmlns:a16="http://schemas.microsoft.com/office/drawing/2014/main" id="{056B6B6B-C9BA-4ADE-9E0A-22F39494D2DC}"/>
               </a:ext>
             </a:extLst>
           </p:cNvPr>
@@ -12624,7 +12624,7 @@
           <p:cNvPr id="8" name="">
             <a:extLst xmlns:a="http://schemas.openxmlformats.org/drawingml/2006/main">
               <a:ext uri="{FF2B5EF4-FFF2-40B4-BE49-F238E27FC236}">
-                <a16:creationId xmlns:a16="http://schemas.microsoft.com/office/drawing/2014/main" id="{82FFBE35-F4B0-4DAB-8A31-7D34AC482F00}"/>
+                <a16:creationId xmlns:a16="http://schemas.microsoft.com/office/drawing/2014/main" id="{A2883CA5-4822-452B-827E-7E88ABA9C5B0}"/>
               </a:ext>
             </a:extLst>
           </p:cNvPr>
@@ -12688,7 +12688,7 @@
           <p:cNvPr id="9" name="">
             <a:extLst xmlns:a="http://schemas.openxmlformats.org/drawingml/2006/main">
               <a:ext uri="{FF2B5EF4-FFF2-40B4-BE49-F238E27FC236}">
-                <a16:creationId xmlns:a16="http://schemas.microsoft.com/office/drawing/2014/main" id="{A891299D-6335-415F-BB96-C5D59FE2BBDF}"/>
+                <a16:creationId xmlns:a16="http://schemas.microsoft.com/office/drawing/2014/main" id="{B8AA3A8E-1501-40AC-890D-1AA7EB76DFBE}"/>
               </a:ext>
             </a:extLst>
           </p:cNvPr>
@@ -12752,7 +12752,7 @@
           <p:cNvPr id="10" name="">
             <a:extLst xmlns:a="http://schemas.openxmlformats.org/drawingml/2006/main">
               <a:ext uri="{FF2B5EF4-FFF2-40B4-BE49-F238E27FC236}">
-                <a16:creationId xmlns:a16="http://schemas.microsoft.com/office/drawing/2014/main" id="{17B5D9DF-18C1-4429-96B3-0C11B42FD1B9}"/>
+                <a16:creationId xmlns:a16="http://schemas.microsoft.com/office/drawing/2014/main" id="{9110C6FD-5FA5-44C3-952E-7EB8A49FAD5F}"/>
               </a:ext>
             </a:extLst>
           </p:cNvPr>
@@ -12816,7 +12816,7 @@
           <p:cNvPr id="11" name="">
             <a:extLst xmlns:a="http://schemas.openxmlformats.org/drawingml/2006/main">
               <a:ext uri="{FF2B5EF4-FFF2-40B4-BE49-F238E27FC236}">
-                <a16:creationId xmlns:a16="http://schemas.microsoft.com/office/drawing/2014/main" id="{E9D09ADA-42E2-4013-ABD7-952D4D553BE1}"/>
+                <a16:creationId xmlns:a16="http://schemas.microsoft.com/office/drawing/2014/main" id="{A68FDE33-55A5-4A1A-8C77-B1FF7D3F71C9}"/>
               </a:ext>
             </a:extLst>
           </p:cNvPr>
@@ -12880,7 +12880,7 @@
           <p:cNvPr id="12" name="">
             <a:extLst xmlns:a="http://schemas.openxmlformats.org/drawingml/2006/main">
               <a:ext uri="{FF2B5EF4-FFF2-40B4-BE49-F238E27FC236}">
-                <a16:creationId xmlns:a16="http://schemas.microsoft.com/office/drawing/2014/main" id="{3ECE9245-5C67-4F99-AFE9-6D9EB95EE5A5}"/>
+                <a16:creationId xmlns:a16="http://schemas.microsoft.com/office/drawing/2014/main" id="{E75E1944-9259-4BBA-B54D-C0B2933A0D55}"/>
               </a:ext>
             </a:extLst>
           </p:cNvPr>
@@ -12944,7 +12944,7 @@
           <p:cNvPr id="13" name="">
             <a:extLst xmlns:a="http://schemas.openxmlformats.org/drawingml/2006/main">
               <a:ext uri="{FF2B5EF4-FFF2-40B4-BE49-F238E27FC236}">
-                <a16:creationId xmlns:a16="http://schemas.microsoft.com/office/drawing/2014/main" id="{F25A54A6-620D-4BEF-92C9-611F7E1CEAAF}"/>
+                <a16:creationId xmlns:a16="http://schemas.microsoft.com/office/drawing/2014/main" id="{88A16CFA-4E93-4C58-B11F-83B769AD8549}"/>
               </a:ext>
             </a:extLst>
           </p:cNvPr>
@@ -13008,7 +13008,7 @@
           <p:cNvPr id="14" name="">
             <a:extLst xmlns:a="http://schemas.openxmlformats.org/drawingml/2006/main">
               <a:ext uri="{FF2B5EF4-FFF2-40B4-BE49-F238E27FC236}">
-                <a16:creationId xmlns:a16="http://schemas.microsoft.com/office/drawing/2014/main" id="{E951177D-E526-490A-8211-27E493E2167F}"/>
+                <a16:creationId xmlns:a16="http://schemas.microsoft.com/office/drawing/2014/main" id="{DA2084C1-67FA-4D5A-AD2D-FE26CE6499E2}"/>
               </a:ext>
             </a:extLst>
           </p:cNvPr>
@@ -13072,7 +13072,7 @@
           <p:cNvPr id="15" name="">
             <a:extLst xmlns:a="http://schemas.openxmlformats.org/drawingml/2006/main">
               <a:ext uri="{FF2B5EF4-FFF2-40B4-BE49-F238E27FC236}">
-                <a16:creationId xmlns:a16="http://schemas.microsoft.com/office/drawing/2014/main" id="{3F01DBEA-0CE0-41B8-BFD4-50B72256C566}"/>
+                <a16:creationId xmlns:a16="http://schemas.microsoft.com/office/drawing/2014/main" id="{A38B5805-4986-4925-BA6C-8188E36F4BB2}"/>
               </a:ext>
             </a:extLst>
           </p:cNvPr>
@@ -13136,7 +13136,7 @@
           <p:cNvPr id="16" name="">
             <a:extLst xmlns:a="http://schemas.openxmlformats.org/drawingml/2006/main">
               <a:ext uri="{FF2B5EF4-FFF2-40B4-BE49-F238E27FC236}">
-                <a16:creationId xmlns:a16="http://schemas.microsoft.com/office/drawing/2014/main" id="{EE8D3B0B-7C62-4B89-B9E7-B8927B9D0910}"/>
+                <a16:creationId xmlns:a16="http://schemas.microsoft.com/office/drawing/2014/main" id="{8F157F4C-E3D0-4C49-950F-9F84BFD1BA53}"/>
               </a:ext>
             </a:extLst>
           </p:cNvPr>
@@ -13200,7 +13200,7 @@
           <p:cNvPr id="17" name="">
             <a:extLst xmlns:a="http://schemas.openxmlformats.org/drawingml/2006/main">
               <a:ext uri="{FF2B5EF4-FFF2-40B4-BE49-F238E27FC236}">
-                <a16:creationId xmlns:a16="http://schemas.microsoft.com/office/drawing/2014/main" id="{F6767D1F-66EC-4CA2-8D3C-36F267705C19}"/>
+                <a16:creationId xmlns:a16="http://schemas.microsoft.com/office/drawing/2014/main" id="{2BB66350-5583-49AC-9955-1411941EEA7B}"/>
               </a:ext>
             </a:extLst>
           </p:cNvPr>
@@ -13264,7 +13264,7 @@
           <p:cNvPr id="18" name="">
             <a:extLst xmlns:a="http://schemas.openxmlformats.org/drawingml/2006/main">
               <a:ext uri="{FF2B5EF4-FFF2-40B4-BE49-F238E27FC236}">
-                <a16:creationId xmlns:a16="http://schemas.microsoft.com/office/drawing/2014/main" id="{68EB9B7B-772C-4C6F-9FC4-6E07AD3F5C77}"/>
+                <a16:creationId xmlns:a16="http://schemas.microsoft.com/office/drawing/2014/main" id="{3E87A3F4-922F-42BE-B9AD-A2E7542943E7}"/>
               </a:ext>
             </a:extLst>
           </p:cNvPr>
@@ -13328,7 +13328,7 @@
           <p:cNvPr id="19" name="">
             <a:extLst xmlns:a="http://schemas.openxmlformats.org/drawingml/2006/main">
               <a:ext uri="{FF2B5EF4-FFF2-40B4-BE49-F238E27FC236}">
-                <a16:creationId xmlns:a16="http://schemas.microsoft.com/office/drawing/2014/main" id="{9DB67848-98A6-4CEA-8A7F-F292C3A802EC}"/>
+                <a16:creationId xmlns:a16="http://schemas.microsoft.com/office/drawing/2014/main" id="{39334803-5EA6-415B-9A7E-7FB8317D4AFE}"/>
               </a:ext>
             </a:extLst>
           </p:cNvPr>
@@ -13392,7 +13392,7 @@
           <p:cNvPr id="20" name="">
             <a:extLst xmlns:a="http://schemas.openxmlformats.org/drawingml/2006/main">
               <a:ext uri="{FF2B5EF4-FFF2-40B4-BE49-F238E27FC236}">
-                <a16:creationId xmlns:a16="http://schemas.microsoft.com/office/drawing/2014/main" id="{1C464D9A-2E39-4259-AF82-BB8E9FC10631}"/>
+                <a16:creationId xmlns:a16="http://schemas.microsoft.com/office/drawing/2014/main" id="{491F4EAD-E2B0-42BF-8496-9E0C83B7600D}"/>
               </a:ext>
             </a:extLst>
           </p:cNvPr>
@@ -13456,7 +13456,7 @@
           <p:cNvPr id="21" name="">
             <a:extLst xmlns:a="http://schemas.openxmlformats.org/drawingml/2006/main">
               <a:ext uri="{FF2B5EF4-FFF2-40B4-BE49-F238E27FC236}">
-                <a16:creationId xmlns:a16="http://schemas.microsoft.com/office/drawing/2014/main" id="{8074F7F8-B4D4-42D7-9CEB-AE4AE9E0EC76}"/>
+                <a16:creationId xmlns:a16="http://schemas.microsoft.com/office/drawing/2014/main" id="{178E6983-C929-4608-B2B0-9D48BD4FAF07}"/>
               </a:ext>
             </a:extLst>
           </p:cNvPr>
@@ -13520,7 +13520,7 @@
           <p:cNvPr id="22" name="">
             <a:extLst xmlns:a="http://schemas.openxmlformats.org/drawingml/2006/main">
               <a:ext uri="{FF2B5EF4-FFF2-40B4-BE49-F238E27FC236}">
-                <a16:creationId xmlns:a16="http://schemas.microsoft.com/office/drawing/2014/main" id="{E3724F80-F12E-4AB0-BCD6-04B05577C521}"/>
+                <a16:creationId xmlns:a16="http://schemas.microsoft.com/office/drawing/2014/main" id="{0D608888-11FD-45E7-93A8-52E9C03CE493}"/>
               </a:ext>
             </a:extLst>
           </p:cNvPr>
@@ -13584,7 +13584,7 @@
           <p:cNvPr id="23" name="">
             <a:extLst xmlns:a="http://schemas.openxmlformats.org/drawingml/2006/main">
               <a:ext uri="{FF2B5EF4-FFF2-40B4-BE49-F238E27FC236}">
-                <a16:creationId xmlns:a16="http://schemas.microsoft.com/office/drawing/2014/main" id="{91714046-6C77-4ADE-99A3-E5182B9389C2}"/>
+                <a16:creationId xmlns:a16="http://schemas.microsoft.com/office/drawing/2014/main" id="{B428DC68-3EB4-4D07-9A1D-58383309B31C}"/>
               </a:ext>
             </a:extLst>
           </p:cNvPr>
@@ -13648,7 +13648,7 @@
           <p:cNvPr id="24" name="">
             <a:extLst xmlns:a="http://schemas.openxmlformats.org/drawingml/2006/main">
               <a:ext uri="{FF2B5EF4-FFF2-40B4-BE49-F238E27FC236}">
-                <a16:creationId xmlns:a16="http://schemas.microsoft.com/office/drawing/2014/main" id="{9C6750EE-5438-4C6C-A6BC-AF89CCA1C6DE}"/>
+                <a16:creationId xmlns:a16="http://schemas.microsoft.com/office/drawing/2014/main" id="{CC69B63C-E5EC-4D49-A41D-DA7968EC7FD2}"/>
               </a:ext>
             </a:extLst>
           </p:cNvPr>
@@ -13712,7 +13712,7 @@
           <p:cNvPr id="25" name="">
             <a:extLst xmlns:a="http://schemas.openxmlformats.org/drawingml/2006/main">
               <a:ext uri="{FF2B5EF4-FFF2-40B4-BE49-F238E27FC236}">
-                <a16:creationId xmlns:a16="http://schemas.microsoft.com/office/drawing/2014/main" id="{3BE7E09C-7658-4F0D-AC86-F559D4698553}"/>
+                <a16:creationId xmlns:a16="http://schemas.microsoft.com/office/drawing/2014/main" id="{6593A29F-EBBD-4FC9-AB75-571356BCF528}"/>
               </a:ext>
             </a:extLst>
           </p:cNvPr>
@@ -13776,7 +13776,7 @@
           <p:cNvPr id="26" name="">
             <a:extLst xmlns:a="http://schemas.openxmlformats.org/drawingml/2006/main">
               <a:ext uri="{FF2B5EF4-FFF2-40B4-BE49-F238E27FC236}">
-                <a16:creationId xmlns:a16="http://schemas.microsoft.com/office/drawing/2014/main" id="{543A94A5-0F78-480B-9956-AD3A230C440A}"/>
+                <a16:creationId xmlns:a16="http://schemas.microsoft.com/office/drawing/2014/main" id="{A7E5B14C-A96C-4081-A73F-F0A1047F475D}"/>
               </a:ext>
             </a:extLst>
           </p:cNvPr>
@@ -13840,7 +13840,7 @@
           <p:cNvPr id="27" name="">
             <a:extLst xmlns:a="http://schemas.openxmlformats.org/drawingml/2006/main">
               <a:ext uri="{FF2B5EF4-FFF2-40B4-BE49-F238E27FC236}">
-                <a16:creationId xmlns:a16="http://schemas.microsoft.com/office/drawing/2014/main" id="{1DFA7E1E-71B5-4986-9FF0-4AA5EB943141}"/>
+                <a16:creationId xmlns:a16="http://schemas.microsoft.com/office/drawing/2014/main" id="{D5062F52-F9EA-4CA7-9AA2-58716410DCFC}"/>
               </a:ext>
             </a:extLst>
           </p:cNvPr>
@@ -13904,7 +13904,7 @@
           <p:cNvPr id="28" name="">
             <a:extLst xmlns:a="http://schemas.openxmlformats.org/drawingml/2006/main">
               <a:ext uri="{FF2B5EF4-FFF2-40B4-BE49-F238E27FC236}">
-                <a16:creationId xmlns:a16="http://schemas.microsoft.com/office/drawing/2014/main" id="{30FA078E-F7B4-455D-9724-21C4CECFAA28}"/>
+                <a16:creationId xmlns:a16="http://schemas.microsoft.com/office/drawing/2014/main" id="{DB54B6A0-620C-4039-BEF6-D0DC4E19C8BF}"/>
               </a:ext>
             </a:extLst>
           </p:cNvPr>
@@ -13968,7 +13968,7 @@
           <p:cNvPr id="29" name="">
             <a:extLst xmlns:a="http://schemas.openxmlformats.org/drawingml/2006/main">
               <a:ext uri="{FF2B5EF4-FFF2-40B4-BE49-F238E27FC236}">
-                <a16:creationId xmlns:a16="http://schemas.microsoft.com/office/drawing/2014/main" id="{18FB1EFF-116C-4D68-B897-77A1C79034B9}"/>
+                <a16:creationId xmlns:a16="http://schemas.microsoft.com/office/drawing/2014/main" id="{BCE27C92-5B3D-4E6E-946E-1C5B0D0BBE14}"/>
               </a:ext>
             </a:extLst>
           </p:cNvPr>
@@ -14032,7 +14032,7 @@
           <p:cNvPr id="30" name="">
             <a:extLst xmlns:a="http://schemas.openxmlformats.org/drawingml/2006/main">
               <a:ext uri="{FF2B5EF4-FFF2-40B4-BE49-F238E27FC236}">
-                <a16:creationId xmlns:a16="http://schemas.microsoft.com/office/drawing/2014/main" id="{B184C8C1-1462-4A87-B7C7-A4107E7E2F10}"/>
+                <a16:creationId xmlns:a16="http://schemas.microsoft.com/office/drawing/2014/main" id="{473FE6CF-9EE0-4F61-8933-761838CF4506}"/>
               </a:ext>
             </a:extLst>
           </p:cNvPr>
@@ -14096,7 +14096,7 @@
           <p:cNvPr id="31" name="">
             <a:extLst xmlns:a="http://schemas.openxmlformats.org/drawingml/2006/main">
               <a:ext uri="{FF2B5EF4-FFF2-40B4-BE49-F238E27FC236}">
-                <a16:creationId xmlns:a16="http://schemas.microsoft.com/office/drawing/2014/main" id="{D61BF823-E667-46B2-BCE3-955C0E0EDB31}"/>
+                <a16:creationId xmlns:a16="http://schemas.microsoft.com/office/drawing/2014/main" id="{DB68A248-EEAA-4BA9-AD39-897361FF115C}"/>
               </a:ext>
             </a:extLst>
           </p:cNvPr>
@@ -14160,7 +14160,7 @@
           <p:cNvPr id="32" name="">
             <a:extLst xmlns:a="http://schemas.openxmlformats.org/drawingml/2006/main">
               <a:ext uri="{FF2B5EF4-FFF2-40B4-BE49-F238E27FC236}">
-                <a16:creationId xmlns:a16="http://schemas.microsoft.com/office/drawing/2014/main" id="{54B0C754-7C11-46C3-83FA-41C660FEC0ED}"/>
+                <a16:creationId xmlns:a16="http://schemas.microsoft.com/office/drawing/2014/main" id="{2FA70025-BF49-479A-BCDE-454C206B2D53}"/>
               </a:ext>
             </a:extLst>
           </p:cNvPr>
@@ -14224,7 +14224,7 @@
           <p:cNvPr id="33" name="">
             <a:extLst xmlns:a="http://schemas.openxmlformats.org/drawingml/2006/main">
               <a:ext uri="{FF2B5EF4-FFF2-40B4-BE49-F238E27FC236}">
-                <a16:creationId xmlns:a16="http://schemas.microsoft.com/office/drawing/2014/main" id="{F166B0AA-2324-46B3-A8E2-BD5B06A78207}"/>
+                <a16:creationId xmlns:a16="http://schemas.microsoft.com/office/drawing/2014/main" id="{6B568B95-6950-4E76-AA79-1C79DFA0427E}"/>
               </a:ext>
             </a:extLst>
           </p:cNvPr>
@@ -14288,7 +14288,7 @@
           <p:cNvPr id="34" name="">
             <a:extLst xmlns:a="http://schemas.openxmlformats.org/drawingml/2006/main">
               <a:ext uri="{FF2B5EF4-FFF2-40B4-BE49-F238E27FC236}">
-                <a16:creationId xmlns:a16="http://schemas.microsoft.com/office/drawing/2014/main" id="{D5E8D09A-4A77-492F-B564-059DEB2AE70E}"/>
+                <a16:creationId xmlns:a16="http://schemas.microsoft.com/office/drawing/2014/main" id="{4D6E0D31-E853-4421-86A3-C3FA6FDD6B15}"/>
               </a:ext>
             </a:extLst>
           </p:cNvPr>
@@ -14352,7 +14352,7 @@
           <p:cNvPr id="35" name="">
             <a:extLst xmlns:a="http://schemas.openxmlformats.org/drawingml/2006/main">
               <a:ext uri="{FF2B5EF4-FFF2-40B4-BE49-F238E27FC236}">
-                <a16:creationId xmlns:a16="http://schemas.microsoft.com/office/drawing/2014/main" id="{C42F6976-FA1B-4AFB-A807-D0E9574A2C9F}"/>
+                <a16:creationId xmlns:a16="http://schemas.microsoft.com/office/drawing/2014/main" id="{7862E70A-AF8E-45D2-8BE0-4A0862C6AC11}"/>
               </a:ext>
             </a:extLst>
           </p:cNvPr>
@@ -14416,7 +14416,7 @@
           <p:cNvPr id="36" name="">
             <a:extLst xmlns:a="http://schemas.openxmlformats.org/drawingml/2006/main">
               <a:ext uri="{FF2B5EF4-FFF2-40B4-BE49-F238E27FC236}">
-                <a16:creationId xmlns:a16="http://schemas.microsoft.com/office/drawing/2014/main" id="{AFA52CA4-C8D6-47A2-80BD-F69BFBC70F8B}"/>
+                <a16:creationId xmlns:a16="http://schemas.microsoft.com/office/drawing/2014/main" id="{E72F9361-97F3-4DB8-A3ED-55BA8AE37D2F}"/>
               </a:ext>
             </a:extLst>
           </p:cNvPr>
@@ -14480,7 +14480,7 @@
           <p:cNvPr id="37" name="">
             <a:extLst xmlns:a="http://schemas.openxmlformats.org/drawingml/2006/main">
               <a:ext uri="{FF2B5EF4-FFF2-40B4-BE49-F238E27FC236}">
-                <a16:creationId xmlns:a16="http://schemas.microsoft.com/office/drawing/2014/main" id="{46E230D0-DC4D-487A-87EC-435A68ADAA51}"/>
+                <a16:creationId xmlns:a16="http://schemas.microsoft.com/office/drawing/2014/main" id="{20D7042E-4074-49FA-B662-50EE7A360E0A}"/>
               </a:ext>
             </a:extLst>
           </p:cNvPr>
@@ -14544,7 +14544,7 @@
           <p:cNvPr id="38" name="">
             <a:extLst xmlns:a="http://schemas.openxmlformats.org/drawingml/2006/main">
               <a:ext uri="{FF2B5EF4-FFF2-40B4-BE49-F238E27FC236}">
-                <a16:creationId xmlns:a16="http://schemas.microsoft.com/office/drawing/2014/main" id="{4FD2BEE1-1D3B-45A5-AB0E-B46FE47EFAAE}"/>
+                <a16:creationId xmlns:a16="http://schemas.microsoft.com/office/drawing/2014/main" id="{88ED3FF3-F923-4EF1-8E53-57551A62E638}"/>
               </a:ext>
             </a:extLst>
           </p:cNvPr>
@@ -14608,7 +14608,7 @@
           <p:cNvPr id="39" name="">
             <a:extLst xmlns:a="http://schemas.openxmlformats.org/drawingml/2006/main">
               <a:ext uri="{FF2B5EF4-FFF2-40B4-BE49-F238E27FC236}">
-                <a16:creationId xmlns:a16="http://schemas.microsoft.com/office/drawing/2014/main" id="{EF52020C-9E54-409E-AC43-B8AED1751AE7}"/>
+                <a16:creationId xmlns:a16="http://schemas.microsoft.com/office/drawing/2014/main" id="{5960E834-7F62-4930-82BE-0F0348A9D184}"/>
               </a:ext>
             </a:extLst>
           </p:cNvPr>
@@ -14672,7 +14672,7 @@
           <p:cNvPr id="40" name="">
             <a:extLst xmlns:a="http://schemas.openxmlformats.org/drawingml/2006/main">
               <a:ext uri="{FF2B5EF4-FFF2-40B4-BE49-F238E27FC236}">
-                <a16:creationId xmlns:a16="http://schemas.microsoft.com/office/drawing/2014/main" id="{86B0DEB2-894A-4360-A336-20BFEFE702F4}"/>
+                <a16:creationId xmlns:a16="http://schemas.microsoft.com/office/drawing/2014/main" id="{124F7B49-7128-4453-8B10-C17D5A918C81}"/>
               </a:ext>
             </a:extLst>
           </p:cNvPr>
@@ -14736,7 +14736,7 @@
           <p:cNvPr id="41" name="">
             <a:extLst xmlns:a="http://schemas.openxmlformats.org/drawingml/2006/main">
               <a:ext uri="{FF2B5EF4-FFF2-40B4-BE49-F238E27FC236}">
-                <a16:creationId xmlns:a16="http://schemas.microsoft.com/office/drawing/2014/main" id="{7261A548-8F12-4F5F-A139-289D8BE4B5E2}"/>
+                <a16:creationId xmlns:a16="http://schemas.microsoft.com/office/drawing/2014/main" id="{8B5E8CE3-3EE9-455A-9357-D4919DFD4F95}"/>
               </a:ext>
             </a:extLst>
           </p:cNvPr>
@@ -14800,7 +14800,7 @@
           <p:cNvPr id="42" name="">
             <a:extLst xmlns:a="http://schemas.openxmlformats.org/drawingml/2006/main">
               <a:ext uri="{FF2B5EF4-FFF2-40B4-BE49-F238E27FC236}">
-                <a16:creationId xmlns:a16="http://schemas.microsoft.com/office/drawing/2014/main" id="{9CF5EFE3-96EC-4EC6-854D-DB58C1ABAC0D}"/>
+                <a16:creationId xmlns:a16="http://schemas.microsoft.com/office/drawing/2014/main" id="{4C981841-8EF4-41DC-B413-B089F12C663F}"/>
               </a:ext>
             </a:extLst>
           </p:cNvPr>
@@ -14864,7 +14864,7 @@
           <p:cNvPr id="43" name="">
             <a:extLst xmlns:a="http://schemas.openxmlformats.org/drawingml/2006/main">
               <a:ext uri="{FF2B5EF4-FFF2-40B4-BE49-F238E27FC236}">
-                <a16:creationId xmlns:a16="http://schemas.microsoft.com/office/drawing/2014/main" id="{AD2EBAF9-1725-477E-8681-DA491B79E5AA}"/>
+                <a16:creationId xmlns:a16="http://schemas.microsoft.com/office/drawing/2014/main" id="{2A50713A-A06C-4206-A978-0AC7BAA4557F}"/>
               </a:ext>
             </a:extLst>
           </p:cNvPr>
@@ -14897,7 +14897,7 @@
           <p:cNvPr id="44" name="">
             <a:extLst xmlns:a="http://schemas.openxmlformats.org/drawingml/2006/main">
               <a:ext uri="{FF2B5EF4-FFF2-40B4-BE49-F238E27FC236}">
-                <a16:creationId xmlns:a16="http://schemas.microsoft.com/office/drawing/2014/main" id="{13A49C19-7372-4974-89B2-1A24673DC8AE}"/>
+                <a16:creationId xmlns:a16="http://schemas.microsoft.com/office/drawing/2014/main" id="{2DEB5CE7-C33F-416F-9DC9-659A74563ABD}"/>
               </a:ext>
             </a:extLst>
           </p:cNvPr>
@@ -14961,7 +14961,7 @@
           <p:cNvPr id="45" name="">
             <a:extLst xmlns:a="http://schemas.openxmlformats.org/drawingml/2006/main">
               <a:ext uri="{FF2B5EF4-FFF2-40B4-BE49-F238E27FC236}">
-                <a16:creationId xmlns:a16="http://schemas.microsoft.com/office/drawing/2014/main" id="{D1DC1AAE-7F5C-469B-BE95-F157F742AFB7}"/>
+                <a16:creationId xmlns:a16="http://schemas.microsoft.com/office/drawing/2014/main" id="{E98D8C2A-1D5B-47C6-A3B2-F72F9B3126D9}"/>
               </a:ext>
             </a:extLst>
           </p:cNvPr>
@@ -14994,7 +14994,7 @@
           <p:cNvPr id="46" name="">
             <a:extLst xmlns:a="http://schemas.openxmlformats.org/drawingml/2006/main">
               <a:ext uri="{FF2B5EF4-FFF2-40B4-BE49-F238E27FC236}">
-                <a16:creationId xmlns:a16="http://schemas.microsoft.com/office/drawing/2014/main" id="{3F045EB3-235E-46D6-8698-802D57DBA319}"/>
+                <a16:creationId xmlns:a16="http://schemas.microsoft.com/office/drawing/2014/main" id="{16D35E85-7D32-47EA-A236-AEA8B6B872AB}"/>
               </a:ext>
             </a:extLst>
           </p:cNvPr>
@@ -15058,7 +15058,7 @@
           <p:cNvPr id="47" name="">
             <a:extLst xmlns:a="http://schemas.openxmlformats.org/drawingml/2006/main">
               <a:ext uri="{FF2B5EF4-FFF2-40B4-BE49-F238E27FC236}">
-                <a16:creationId xmlns:a16="http://schemas.microsoft.com/office/drawing/2014/main" id="{7257421F-6298-4D5F-9401-47CB4B7F0832}"/>
+                <a16:creationId xmlns:a16="http://schemas.microsoft.com/office/drawing/2014/main" id="{2DC0DA33-364A-435A-92B0-507086CCF868}"/>
               </a:ext>
             </a:extLst>
           </p:cNvPr>
@@ -15122,7 +15122,7 @@
           <p:cNvPr id="48" name="">
             <a:extLst xmlns:a="http://schemas.openxmlformats.org/drawingml/2006/main">
               <a:ext uri="{FF2B5EF4-FFF2-40B4-BE49-F238E27FC236}">
-                <a16:creationId xmlns:a16="http://schemas.microsoft.com/office/drawing/2014/main" id="{69775C96-37C6-4284-8525-ABE0EAE32391}"/>
+                <a16:creationId xmlns:a16="http://schemas.microsoft.com/office/drawing/2014/main" id="{69D745DC-3C3B-4AFD-BF79-E710D71051B2}"/>
               </a:ext>
             </a:extLst>
           </p:cNvPr>
@@ -15155,7 +15155,7 @@
           <p:cNvPr id="49" name="">
             <a:extLst xmlns:a="http://schemas.openxmlformats.org/drawingml/2006/main">
               <a:ext uri="{FF2B5EF4-FFF2-40B4-BE49-F238E27FC236}">
-                <a16:creationId xmlns:a16="http://schemas.microsoft.com/office/drawing/2014/main" id="{05F98170-FEE2-48D3-9A4D-5432F78F2940}"/>
+                <a16:creationId xmlns:a16="http://schemas.microsoft.com/office/drawing/2014/main" id="{27C4F90F-4C56-4AB2-8A71-4EB68512C9F4}"/>
               </a:ext>
             </a:extLst>
           </p:cNvPr>
@@ -15219,7 +15219,7 @@
           <p:cNvPr id="50" name="">
             <a:extLst xmlns:a="http://schemas.openxmlformats.org/drawingml/2006/main">
               <a:ext uri="{FF2B5EF4-FFF2-40B4-BE49-F238E27FC236}">
-                <a16:creationId xmlns:a16="http://schemas.microsoft.com/office/drawing/2014/main" id="{B08ACD70-59D2-479A-B8E1-9AD188BC08CA}"/>
+                <a16:creationId xmlns:a16="http://schemas.microsoft.com/office/drawing/2014/main" id="{A1B568A9-255E-4C4C-8DDE-0754992DC457}"/>
               </a:ext>
             </a:extLst>
           </p:cNvPr>
@@ -15283,7 +15283,7 @@
           <p:cNvPr id="51" name="">
             <a:extLst xmlns:a="http://schemas.openxmlformats.org/drawingml/2006/main">
               <a:ext uri="{FF2B5EF4-FFF2-40B4-BE49-F238E27FC236}">
-                <a16:creationId xmlns:a16="http://schemas.microsoft.com/office/drawing/2014/main" id="{1175DF4C-811C-4A6E-B183-9551C1580938}"/>
+                <a16:creationId xmlns:a16="http://schemas.microsoft.com/office/drawing/2014/main" id="{7186FC94-40EE-45D5-9B57-2A7889CAC777}"/>
               </a:ext>
             </a:extLst>
           </p:cNvPr>
@@ -15316,7 +15316,7 @@
           <p:cNvPr id="52" name="">
             <a:extLst xmlns:a="http://schemas.openxmlformats.org/drawingml/2006/main">
               <a:ext uri="{FF2B5EF4-FFF2-40B4-BE49-F238E27FC236}">
-                <a16:creationId xmlns:a16="http://schemas.microsoft.com/office/drawing/2014/main" id="{464DF42D-D846-41B8-9C5D-C6C166223682}"/>
+                <a16:creationId xmlns:a16="http://schemas.microsoft.com/office/drawing/2014/main" id="{10D041D0-ECCE-469A-8F16-913D5ABEA9B3}"/>
               </a:ext>
             </a:extLst>
           </p:cNvPr>
@@ -15380,7 +15380,7 @@
           <p:cNvPr id="53" name="">
             <a:extLst xmlns:a="http://schemas.openxmlformats.org/drawingml/2006/main">
               <a:ext uri="{FF2B5EF4-FFF2-40B4-BE49-F238E27FC236}">
-                <a16:creationId xmlns:a16="http://schemas.microsoft.com/office/drawing/2014/main" id="{A318A287-00AF-4F76-86E8-7DEA7EB5A6CF}"/>
+                <a16:creationId xmlns:a16="http://schemas.microsoft.com/office/drawing/2014/main" id="{0327B751-E0BE-419C-B721-CE37619F91BB}"/>
               </a:ext>
             </a:extLst>
           </p:cNvPr>
@@ -15444,7 +15444,7 @@
           <p:cNvPr id="54" name="">
             <a:extLst xmlns:a="http://schemas.openxmlformats.org/drawingml/2006/main">
               <a:ext uri="{FF2B5EF4-FFF2-40B4-BE49-F238E27FC236}">
-                <a16:creationId xmlns:a16="http://schemas.microsoft.com/office/drawing/2014/main" id="{E62B75C5-F6F5-46B3-A935-2A6651181BAE}"/>
+                <a16:creationId xmlns:a16="http://schemas.microsoft.com/office/drawing/2014/main" id="{AEA2F0BE-2CF1-4C01-90FD-432CCECA7DD7}"/>
               </a:ext>
             </a:extLst>
           </p:cNvPr>
@@ -15477,7 +15477,7 @@
           <p:cNvPr id="55" name="">
             <a:extLst xmlns:a="http://schemas.openxmlformats.org/drawingml/2006/main">
               <a:ext uri="{FF2B5EF4-FFF2-40B4-BE49-F238E27FC236}">
-                <a16:creationId xmlns:a16="http://schemas.microsoft.com/office/drawing/2014/main" id="{D31A96CE-241A-43FA-A885-48EC13267F17}"/>
+                <a16:creationId xmlns:a16="http://schemas.microsoft.com/office/drawing/2014/main" id="{ED0CE918-10DB-48F1-8781-A4491C18506D}"/>
               </a:ext>
             </a:extLst>
           </p:cNvPr>
@@ -15541,7 +15541,7 @@
           <p:cNvPr id="56" name="">
             <a:extLst xmlns:a="http://schemas.openxmlformats.org/drawingml/2006/main">
               <a:ext uri="{FF2B5EF4-FFF2-40B4-BE49-F238E27FC236}">
-                <a16:creationId xmlns:a16="http://schemas.microsoft.com/office/drawing/2014/main" id="{8C0DE87B-8612-4587-8410-F6ACA08AC055}"/>
+                <a16:creationId xmlns:a16="http://schemas.microsoft.com/office/drawing/2014/main" id="{F1547A0A-32DC-4960-B736-230E0494B1D9}"/>
               </a:ext>
             </a:extLst>
           </p:cNvPr>
@@ -15605,7 +15605,7 @@
           <p:cNvPr id="57" name="">
             <a:extLst xmlns:a="http://schemas.openxmlformats.org/drawingml/2006/main">
               <a:ext uri="{FF2B5EF4-FFF2-40B4-BE49-F238E27FC236}">
-                <a16:creationId xmlns:a16="http://schemas.microsoft.com/office/drawing/2014/main" id="{3A6E2BFC-FF41-4E51-A653-A32B9103F7AC}"/>
+                <a16:creationId xmlns:a16="http://schemas.microsoft.com/office/drawing/2014/main" id="{A1930683-8D01-49EC-820D-0F71676FBEA9}"/>
               </a:ext>
             </a:extLst>
           </p:cNvPr>
@@ -15669,7 +15669,7 @@
           <p:cNvPr id="58" name="">
             <a:extLst xmlns:a="http://schemas.openxmlformats.org/drawingml/2006/main">
               <a:ext uri="{FF2B5EF4-FFF2-40B4-BE49-F238E27FC236}">
-                <a16:creationId xmlns:a16="http://schemas.microsoft.com/office/drawing/2014/main" id="{57DE8E2A-1964-48DE-8F15-21440BDF3CE7}"/>
+                <a16:creationId xmlns:a16="http://schemas.microsoft.com/office/drawing/2014/main" id="{ECCBE86D-5D97-4816-9FA0-8D514DDBEA09}"/>
               </a:ext>
             </a:extLst>
           </p:cNvPr>
@@ -15731,7 +15731,7 @@
     </p:spTree>
     <p:extLst>
       <p:ext uri="{BB962C8B-B14F-4D97-AF65-F5344CB8AC3E}">
-        <p14:creationId xmlns:p14="http://schemas.microsoft.com/office/powerpoint/2010/main" val="543760889"/>
+        <p14:creationId xmlns:p14="http://schemas.microsoft.com/office/powerpoint/2010/main" val="1557319144"/>
       </p:ext>
     </p:extLst>
   </p:cSld>
@@ -15755,7 +15755,7 @@
           <p:cNvPr id="1" name="">
             <a:extLst xmlns:a="http://schemas.openxmlformats.org/drawingml/2006/main">
               <a:ext uri="{FF2B5EF4-FFF2-40B4-BE49-F238E27FC236}">
-                <a16:creationId xmlns:a16="http://schemas.microsoft.com/office/drawing/2014/main" id="{752300D3-F2A2-4156-833E-73B931B49F07}"/>
+                <a16:creationId xmlns:a16="http://schemas.microsoft.com/office/drawing/2014/main" id="{8C6E12F3-E10C-454E-B9F8-8041F1DF383A}"/>
               </a:ext>
             </a:extLst>
           </p:cNvPr>
@@ -15788,7 +15788,7 @@
           <p:cNvPr id="2" name="">
             <a:extLst xmlns:a="http://schemas.openxmlformats.org/drawingml/2006/main">
               <a:ext uri="{FF2B5EF4-FFF2-40B4-BE49-F238E27FC236}">
-                <a16:creationId xmlns:a16="http://schemas.microsoft.com/office/drawing/2014/main" id="{8BA145C9-60DD-44BA-A95E-1611644D9EF9}"/>
+                <a16:creationId xmlns:a16="http://schemas.microsoft.com/office/drawing/2014/main" id="{BE44C26F-534B-42AC-BE19-2BAB7BCC4178}"/>
               </a:ext>
             </a:extLst>
           </p:cNvPr>
@@ -15821,7 +15821,7 @@
           <p:cNvPr id="3" name="">
             <a:extLst xmlns:a="http://schemas.openxmlformats.org/drawingml/2006/main">
               <a:ext uri="{FF2B5EF4-FFF2-40B4-BE49-F238E27FC236}">
-                <a16:creationId xmlns:a16="http://schemas.microsoft.com/office/drawing/2014/main" id="{34787A1D-9338-43DE-8DE1-C2EDA12D55A6}"/>
+                <a16:creationId xmlns:a16="http://schemas.microsoft.com/office/drawing/2014/main" id="{B28E399B-9DBC-43D0-BDC3-6EB32BECE158}"/>
               </a:ext>
             </a:extLst>
           </p:cNvPr>
@@ -15885,7 +15885,7 @@
           <p:cNvPr id="4" name="">
             <a:extLst xmlns:a="http://schemas.openxmlformats.org/drawingml/2006/main">
               <a:ext uri="{FF2B5EF4-FFF2-40B4-BE49-F238E27FC236}">
-                <a16:creationId xmlns:a16="http://schemas.microsoft.com/office/drawing/2014/main" id="{A08DAB7B-CDD8-405E-9212-3AE5F382DA09}"/>
+                <a16:creationId xmlns:a16="http://schemas.microsoft.com/office/drawing/2014/main" id="{C4281732-7375-43BD-B294-1D59A87BA23C}"/>
               </a:ext>
             </a:extLst>
           </p:cNvPr>
@@ -15949,7 +15949,7 @@
           <p:cNvPr id="5" name="">
             <a:extLst xmlns:a="http://schemas.openxmlformats.org/drawingml/2006/main">
               <a:ext uri="{FF2B5EF4-FFF2-40B4-BE49-F238E27FC236}">
-                <a16:creationId xmlns:a16="http://schemas.microsoft.com/office/drawing/2014/main" id="{502985B6-AAEC-4DE7-BD59-F2340D1E5A6E}"/>
+                <a16:creationId xmlns:a16="http://schemas.microsoft.com/office/drawing/2014/main" id="{32088D5D-FFFA-4D05-8A9C-6CC1B016D27D}"/>
               </a:ext>
             </a:extLst>
           </p:cNvPr>
@@ -15982,7 +15982,7 @@
           <p:cNvPr id="6" name="">
             <a:extLst xmlns:a="http://schemas.openxmlformats.org/drawingml/2006/main">
               <a:ext uri="{FF2B5EF4-FFF2-40B4-BE49-F238E27FC236}">
-                <a16:creationId xmlns:a16="http://schemas.microsoft.com/office/drawing/2014/main" id="{61A3014C-3340-44EE-9007-B1C0B6726947}"/>
+                <a16:creationId xmlns:a16="http://schemas.microsoft.com/office/drawing/2014/main" id="{56E39D26-B5B2-4ED2-BAF0-8E87CDDEA1CB}"/>
               </a:ext>
             </a:extLst>
           </p:cNvPr>
@@ -16046,7 +16046,7 @@
           <p:cNvPr id="7" name="">
             <a:extLst xmlns:a="http://schemas.openxmlformats.org/drawingml/2006/main">
               <a:ext uri="{FF2B5EF4-FFF2-40B4-BE49-F238E27FC236}">
-                <a16:creationId xmlns:a16="http://schemas.microsoft.com/office/drawing/2014/main" id="{ECC13CB4-D7E4-4A0F-926E-455E8C308239}"/>
+                <a16:creationId xmlns:a16="http://schemas.microsoft.com/office/drawing/2014/main" id="{D74F521B-13C8-4FCF-B1E9-A9694BE5BE16}"/>
               </a:ext>
             </a:extLst>
           </p:cNvPr>
@@ -16079,7 +16079,7 @@
           <p:cNvPr id="8" name="">
             <a:extLst xmlns:a="http://schemas.openxmlformats.org/drawingml/2006/main">
               <a:ext uri="{FF2B5EF4-FFF2-40B4-BE49-F238E27FC236}">
-                <a16:creationId xmlns:a16="http://schemas.microsoft.com/office/drawing/2014/main" id="{9227DF92-9CA5-4101-ACF3-B1D87D7AA823}"/>
+                <a16:creationId xmlns:a16="http://schemas.microsoft.com/office/drawing/2014/main" id="{7E2153C5-28E7-4573-A88B-16CF2ACFCB33}"/>
               </a:ext>
             </a:extLst>
           </p:cNvPr>
@@ -16143,7 +16143,7 @@
           <p:cNvPr id="9" name="">
             <a:extLst xmlns:a="http://schemas.openxmlformats.org/drawingml/2006/main">
               <a:ext uri="{FF2B5EF4-FFF2-40B4-BE49-F238E27FC236}">
-                <a16:creationId xmlns:a16="http://schemas.microsoft.com/office/drawing/2014/main" id="{F3990C9C-76E2-47DE-B483-DCC19AF40C52}"/>
+                <a16:creationId xmlns:a16="http://schemas.microsoft.com/office/drawing/2014/main" id="{63759CA1-9627-4B1F-920B-19F2FF223E9A}"/>
               </a:ext>
             </a:extLst>
           </p:cNvPr>
@@ -16176,7 +16176,7 @@
           <p:cNvPr id="10" name="">
             <a:extLst xmlns:a="http://schemas.openxmlformats.org/drawingml/2006/main">
               <a:ext uri="{FF2B5EF4-FFF2-40B4-BE49-F238E27FC236}">
-                <a16:creationId xmlns:a16="http://schemas.microsoft.com/office/drawing/2014/main" id="{7D534124-A7C2-4F23-A1BD-AB4280F68303}"/>
+                <a16:creationId xmlns:a16="http://schemas.microsoft.com/office/drawing/2014/main" id="{771E0B0C-595B-4976-B80E-52919B6672D4}"/>
               </a:ext>
             </a:extLst>
           </p:cNvPr>
@@ -16240,7 +16240,7 @@
           <p:cNvPr id="11" name="">
             <a:extLst xmlns:a="http://schemas.openxmlformats.org/drawingml/2006/main">
               <a:ext uri="{FF2B5EF4-FFF2-40B4-BE49-F238E27FC236}">
-                <a16:creationId xmlns:a16="http://schemas.microsoft.com/office/drawing/2014/main" id="{D8209159-1AA2-4F73-8E48-803AA06317E4}"/>
+                <a16:creationId xmlns:a16="http://schemas.microsoft.com/office/drawing/2014/main" id="{CD386AB6-C598-42FA-8DF6-DF9559CD1082}"/>
               </a:ext>
             </a:extLst>
           </p:cNvPr>
@@ -16273,7 +16273,7 @@
           <p:cNvPr id="12" name="">
             <a:extLst xmlns:a="http://schemas.openxmlformats.org/drawingml/2006/main">
               <a:ext uri="{FF2B5EF4-FFF2-40B4-BE49-F238E27FC236}">
-                <a16:creationId xmlns:a16="http://schemas.microsoft.com/office/drawing/2014/main" id="{AC7AEE01-EC4E-4CBD-8476-6E1319D28899}"/>
+                <a16:creationId xmlns:a16="http://schemas.microsoft.com/office/drawing/2014/main" id="{329850B4-EBD5-4801-AD5C-5019464A49D3}"/>
               </a:ext>
             </a:extLst>
           </p:cNvPr>
@@ -16337,7 +16337,7 @@
           <p:cNvPr id="13" name="">
             <a:extLst xmlns:a="http://schemas.openxmlformats.org/drawingml/2006/main">
               <a:ext uri="{FF2B5EF4-FFF2-40B4-BE49-F238E27FC236}">
-                <a16:creationId xmlns:a16="http://schemas.microsoft.com/office/drawing/2014/main" id="{3CEE337C-BDC8-4CBA-82C5-69447C5BAB32}"/>
+                <a16:creationId xmlns:a16="http://schemas.microsoft.com/office/drawing/2014/main" id="{80B4E1E0-28B0-46AD-B2DA-8873207F8FA9}"/>
               </a:ext>
             </a:extLst>
           </p:cNvPr>
@@ -16370,7 +16370,7 @@
           <p:cNvPr id="14" name="">
             <a:extLst xmlns:a="http://schemas.openxmlformats.org/drawingml/2006/main">
               <a:ext uri="{FF2B5EF4-FFF2-40B4-BE49-F238E27FC236}">
-                <a16:creationId xmlns:a16="http://schemas.microsoft.com/office/drawing/2014/main" id="{9AF50190-0F8D-4653-99A3-EC3E1A208C8A}"/>
+                <a16:creationId xmlns:a16="http://schemas.microsoft.com/office/drawing/2014/main" id="{0AA26781-8D0D-4081-969E-7F86E3CDE9E5}"/>
               </a:ext>
             </a:extLst>
           </p:cNvPr>
@@ -16434,7 +16434,7 @@
           <p:cNvPr id="15" name="">
             <a:extLst xmlns:a="http://schemas.openxmlformats.org/drawingml/2006/main">
               <a:ext uri="{FF2B5EF4-FFF2-40B4-BE49-F238E27FC236}">
-                <a16:creationId xmlns:a16="http://schemas.microsoft.com/office/drawing/2014/main" id="{0900E5B8-2CA9-4348-AFAA-511E098D6A92}"/>
+                <a16:creationId xmlns:a16="http://schemas.microsoft.com/office/drawing/2014/main" id="{936D4DE5-6505-4B13-B2B6-15DA84DFF7A1}"/>
               </a:ext>
             </a:extLst>
           </p:cNvPr>
@@ -16526,7 +16526,7 @@
           <p:cNvPr id="16" name="">
             <a:extLst xmlns:a="http://schemas.openxmlformats.org/drawingml/2006/main">
               <a:ext uri="{FF2B5EF4-FFF2-40B4-BE49-F238E27FC236}">
-                <a16:creationId xmlns:a16="http://schemas.microsoft.com/office/drawing/2014/main" id="{F992A17E-928D-4FD7-8B5E-F635DB3B6723}"/>
+                <a16:creationId xmlns:a16="http://schemas.microsoft.com/office/drawing/2014/main" id="{4BF1F511-51BD-409B-A973-E282473F5558}"/>
               </a:ext>
             </a:extLst>
           </p:cNvPr>
@@ -16590,7 +16590,7 @@
           <p:cNvPr id="17" name="">
             <a:extLst xmlns:a="http://schemas.openxmlformats.org/drawingml/2006/main">
               <a:ext uri="{FF2B5EF4-FFF2-40B4-BE49-F238E27FC236}">
-                <a16:creationId xmlns:a16="http://schemas.microsoft.com/office/drawing/2014/main" id="{E39D6214-365C-45C9-9653-2D3E01BA4557}"/>
+                <a16:creationId xmlns:a16="http://schemas.microsoft.com/office/drawing/2014/main" id="{141C20D8-B34B-406A-B836-D851DF7D8655}"/>
               </a:ext>
             </a:extLst>
           </p:cNvPr>
@@ -16623,7 +16623,7 @@
           <p:cNvPr id="18" name="">
             <a:extLst xmlns:a="http://schemas.openxmlformats.org/drawingml/2006/main">
               <a:ext uri="{FF2B5EF4-FFF2-40B4-BE49-F238E27FC236}">
-                <a16:creationId xmlns:a16="http://schemas.microsoft.com/office/drawing/2014/main" id="{E35B8D15-8D07-4EF4-82F8-01C5BAA92983}"/>
+                <a16:creationId xmlns:a16="http://schemas.microsoft.com/office/drawing/2014/main" id="{2F7F6624-0BAB-44E2-BA29-1EAA7E1694F4}"/>
               </a:ext>
             </a:extLst>
           </p:cNvPr>
@@ -16687,7 +16687,7 @@
           <p:cNvPr id="19" name="">
             <a:extLst xmlns:a="http://schemas.openxmlformats.org/drawingml/2006/main">
               <a:ext uri="{FF2B5EF4-FFF2-40B4-BE49-F238E27FC236}">
-                <a16:creationId xmlns:a16="http://schemas.microsoft.com/office/drawing/2014/main" id="{771073FE-9A31-4A18-AC29-FB55178AD68C}"/>
+                <a16:creationId xmlns:a16="http://schemas.microsoft.com/office/drawing/2014/main" id="{D6F16631-C906-433A-BE25-743F2384EBFF}"/>
               </a:ext>
             </a:extLst>
           </p:cNvPr>
@@ -16751,7 +16751,7 @@
           <p:cNvPr id="20" name="">
             <a:extLst xmlns:a="http://schemas.openxmlformats.org/drawingml/2006/main">
               <a:ext uri="{FF2B5EF4-FFF2-40B4-BE49-F238E27FC236}">
-                <a16:creationId xmlns:a16="http://schemas.microsoft.com/office/drawing/2014/main" id="{3DCF5C8A-0990-4F8F-B798-119CC116B5D6}"/>
+                <a16:creationId xmlns:a16="http://schemas.microsoft.com/office/drawing/2014/main" id="{D41FA0E7-280B-4285-A32B-C301CB0674C2}"/>
               </a:ext>
             </a:extLst>
           </p:cNvPr>
@@ -16813,7 +16813,7 @@
     </p:spTree>
     <p:extLst>
       <p:ext uri="{BB962C8B-B14F-4D97-AF65-F5344CB8AC3E}">
-        <p14:creationId xmlns:p14="http://schemas.microsoft.com/office/powerpoint/2010/main" val="2061043336"/>
+        <p14:creationId xmlns:p14="http://schemas.microsoft.com/office/powerpoint/2010/main" val="74149965"/>
       </p:ext>
     </p:extLst>
   </p:cSld>
@@ -16837,7 +16837,7 @@
           <p:cNvPr id="1" name="">
             <a:extLst xmlns:a="http://schemas.openxmlformats.org/drawingml/2006/main">
               <a:ext uri="{FF2B5EF4-FFF2-40B4-BE49-F238E27FC236}">
-                <a16:creationId xmlns:a16="http://schemas.microsoft.com/office/drawing/2014/main" id="{13066570-6F60-4BF8-9B25-0DA96171FC1B}"/>
+                <a16:creationId xmlns:a16="http://schemas.microsoft.com/office/drawing/2014/main" id="{59F55A3A-4CC0-4570-A110-0AD1E2DE679B}"/>
               </a:ext>
             </a:extLst>
           </p:cNvPr>
@@ -16870,7 +16870,7 @@
           <p:cNvPr id="2" name="">
             <a:extLst xmlns:a="http://schemas.openxmlformats.org/drawingml/2006/main">
               <a:ext uri="{FF2B5EF4-FFF2-40B4-BE49-F238E27FC236}">
-                <a16:creationId xmlns:a16="http://schemas.microsoft.com/office/drawing/2014/main" id="{2228DE2B-B7D3-4221-B0BE-D052659B9C35}"/>
+                <a16:creationId xmlns:a16="http://schemas.microsoft.com/office/drawing/2014/main" id="{A2BB2CEE-D35E-46CE-AA5D-22EC70B85EFD}"/>
               </a:ext>
             </a:extLst>
           </p:cNvPr>
@@ -16903,7 +16903,7 @@
           <p:cNvPr id="3" name="">
             <a:extLst xmlns:a="http://schemas.openxmlformats.org/drawingml/2006/main">
               <a:ext uri="{FF2B5EF4-FFF2-40B4-BE49-F238E27FC236}">
-                <a16:creationId xmlns:a16="http://schemas.microsoft.com/office/drawing/2014/main" id="{A6834563-013E-42CE-8A67-A4888A06F38D}"/>
+                <a16:creationId xmlns:a16="http://schemas.microsoft.com/office/drawing/2014/main" id="{9FF9C77F-0344-4526-A64C-8ADE87A9E525}"/>
               </a:ext>
             </a:extLst>
           </p:cNvPr>
@@ -16967,7 +16967,7 @@
           <p:cNvPr id="4" name="">
             <a:extLst xmlns:a="http://schemas.openxmlformats.org/drawingml/2006/main">
               <a:ext uri="{FF2B5EF4-FFF2-40B4-BE49-F238E27FC236}">
-                <a16:creationId xmlns:a16="http://schemas.microsoft.com/office/drawing/2014/main" id="{73E545BA-E350-45E4-8CEB-3C19B2ACFAF0}"/>
+                <a16:creationId xmlns:a16="http://schemas.microsoft.com/office/drawing/2014/main" id="{E11737F4-6960-4753-8893-15AB01E3D726}"/>
               </a:ext>
             </a:extLst>
           </p:cNvPr>
@@ -17031,7 +17031,7 @@
           <p:cNvPr id="5" name="">
             <a:extLst xmlns:a="http://schemas.openxmlformats.org/drawingml/2006/main">
               <a:ext uri="{FF2B5EF4-FFF2-40B4-BE49-F238E27FC236}">
-                <a16:creationId xmlns:a16="http://schemas.microsoft.com/office/drawing/2014/main" id="{408C6E56-84F7-4C4B-963B-8EEF56311496}"/>
+                <a16:creationId xmlns:a16="http://schemas.microsoft.com/office/drawing/2014/main" id="{1D1F9DD7-9E6A-4847-9230-273BA1D86111}"/>
               </a:ext>
             </a:extLst>
           </p:cNvPr>
@@ -17064,7 +17064,7 @@
           <p:cNvPr id="6" name="">
             <a:extLst xmlns:a="http://schemas.openxmlformats.org/drawingml/2006/main">
               <a:ext uri="{FF2B5EF4-FFF2-40B4-BE49-F238E27FC236}">
-                <a16:creationId xmlns:a16="http://schemas.microsoft.com/office/drawing/2014/main" id="{E167A98B-7D67-4769-B87E-241FC0728AC1}"/>
+                <a16:creationId xmlns:a16="http://schemas.microsoft.com/office/drawing/2014/main" id="{FC519B1B-A62B-4E74-879F-1F8F6A1AC0D7}"/>
               </a:ext>
             </a:extLst>
           </p:cNvPr>
@@ -17128,7 +17128,7 @@
           <p:cNvPr id="7" name="">
             <a:extLst xmlns:a="http://schemas.openxmlformats.org/drawingml/2006/main">
               <a:ext uri="{FF2B5EF4-FFF2-40B4-BE49-F238E27FC236}">
-                <a16:creationId xmlns:a16="http://schemas.microsoft.com/office/drawing/2014/main" id="{F600483F-6CBC-4121-8199-53D7CE6E8085}"/>
+                <a16:creationId xmlns:a16="http://schemas.microsoft.com/office/drawing/2014/main" id="{9383CC48-98D3-4FE4-8168-00DDEAF771FA}"/>
               </a:ext>
             </a:extLst>
           </p:cNvPr>
@@ -17161,7 +17161,7 @@
           <p:cNvPr id="8" name="">
             <a:extLst xmlns:a="http://schemas.openxmlformats.org/drawingml/2006/main">
               <a:ext uri="{FF2B5EF4-FFF2-40B4-BE49-F238E27FC236}">
-                <a16:creationId xmlns:a16="http://schemas.microsoft.com/office/drawing/2014/main" id="{2980A48C-9674-44F0-B343-FEFA9DD33FE8}"/>
+                <a16:creationId xmlns:a16="http://schemas.microsoft.com/office/drawing/2014/main" id="{F2D9E3F3-159B-47C5-93F2-7E735B11829B}"/>
               </a:ext>
             </a:extLst>
           </p:cNvPr>
@@ -17225,7 +17225,7 @@
           <p:cNvPr id="9" name="">
             <a:extLst xmlns:a="http://schemas.openxmlformats.org/drawingml/2006/main">
               <a:ext uri="{FF2B5EF4-FFF2-40B4-BE49-F238E27FC236}">
-                <a16:creationId xmlns:a16="http://schemas.microsoft.com/office/drawing/2014/main" id="{F4E73C58-47FA-409F-B942-22702B9EE692}"/>
+                <a16:creationId xmlns:a16="http://schemas.microsoft.com/office/drawing/2014/main" id="{7875AF80-620F-46E7-88F7-229604872B5F}"/>
               </a:ext>
             </a:extLst>
           </p:cNvPr>
@@ -17258,7 +17258,7 @@
           <p:cNvPr id="10" name="">
             <a:extLst xmlns:a="http://schemas.openxmlformats.org/drawingml/2006/main">
               <a:ext uri="{FF2B5EF4-FFF2-40B4-BE49-F238E27FC236}">
-                <a16:creationId xmlns:a16="http://schemas.microsoft.com/office/drawing/2014/main" id="{A88FC661-55E0-499E-B2BC-94A9A972FCE2}"/>
+                <a16:creationId xmlns:a16="http://schemas.microsoft.com/office/drawing/2014/main" id="{52A9063A-48E5-400B-9E15-294FB94464F6}"/>
               </a:ext>
             </a:extLst>
           </p:cNvPr>
@@ -17322,7 +17322,7 @@
           <p:cNvPr id="11" name="">
             <a:extLst xmlns:a="http://schemas.openxmlformats.org/drawingml/2006/main">
               <a:ext uri="{FF2B5EF4-FFF2-40B4-BE49-F238E27FC236}">
-                <a16:creationId xmlns:a16="http://schemas.microsoft.com/office/drawing/2014/main" id="{D85712E5-272E-439F-892F-2CB82F13A5E5}"/>
+                <a16:creationId xmlns:a16="http://schemas.microsoft.com/office/drawing/2014/main" id="{F3B3E907-2A33-426D-A315-0204BD2FAA14}"/>
               </a:ext>
             </a:extLst>
           </p:cNvPr>
@@ -17355,7 +17355,7 @@
           <p:cNvPr id="12" name="">
             <a:extLst xmlns:a="http://schemas.openxmlformats.org/drawingml/2006/main">
               <a:ext uri="{FF2B5EF4-FFF2-40B4-BE49-F238E27FC236}">
-                <a16:creationId xmlns:a16="http://schemas.microsoft.com/office/drawing/2014/main" id="{DF487B1B-E86B-47D0-BC0D-7621A4D760CF}"/>
+                <a16:creationId xmlns:a16="http://schemas.microsoft.com/office/drawing/2014/main" id="{31DCF93D-D479-4BEF-9DB6-197B62BCF77C}"/>
               </a:ext>
             </a:extLst>
           </p:cNvPr>
@@ -17419,7 +17419,7 @@
           <p:cNvPr id="13" name="">
             <a:extLst xmlns:a="http://schemas.openxmlformats.org/drawingml/2006/main">
               <a:ext uri="{FF2B5EF4-FFF2-40B4-BE49-F238E27FC236}">
-                <a16:creationId xmlns:a16="http://schemas.microsoft.com/office/drawing/2014/main" id="{BD66043F-C7E7-4F0D-B44B-DA2605E9B5AB}"/>
+                <a16:creationId xmlns:a16="http://schemas.microsoft.com/office/drawing/2014/main" id="{798B5284-042C-4947-B324-F709CD5D84C4}"/>
               </a:ext>
             </a:extLst>
           </p:cNvPr>
@@ -17506,7 +17506,7 @@
           <p:cNvPr id="14" name="">
             <a:extLst xmlns:a="http://schemas.openxmlformats.org/drawingml/2006/main">
               <a:ext uri="{FF2B5EF4-FFF2-40B4-BE49-F238E27FC236}">
-                <a16:creationId xmlns:a16="http://schemas.microsoft.com/office/drawing/2014/main" id="{22B4BB32-2D0E-4627-B6AC-7980C224A35B}"/>
+                <a16:creationId xmlns:a16="http://schemas.microsoft.com/office/drawing/2014/main" id="{2FE703DD-D20B-42BD-8CC1-3B67FA67B7D1}"/>
               </a:ext>
             </a:extLst>
           </p:cNvPr>
@@ -17539,7 +17539,7 @@
           <p:cNvPr id="15" name="">
             <a:extLst xmlns:a="http://schemas.openxmlformats.org/drawingml/2006/main">
               <a:ext uri="{FF2B5EF4-FFF2-40B4-BE49-F238E27FC236}">
-                <a16:creationId xmlns:a16="http://schemas.microsoft.com/office/drawing/2014/main" id="{77459190-F39D-471B-B66B-18C03F1ADF32}"/>
+                <a16:creationId xmlns:a16="http://schemas.microsoft.com/office/drawing/2014/main" id="{ABB7EB5E-1228-4034-8067-6FA731672C5C}"/>
               </a:ext>
             </a:extLst>
           </p:cNvPr>
@@ -17603,7 +17603,7 @@
           <p:cNvPr id="16" name="">
             <a:extLst xmlns:a="http://schemas.openxmlformats.org/drawingml/2006/main">
               <a:ext uri="{FF2B5EF4-FFF2-40B4-BE49-F238E27FC236}">
-                <a16:creationId xmlns:a16="http://schemas.microsoft.com/office/drawing/2014/main" id="{A74EB6D2-097F-4F2F-A6D4-B6D20EDF9900}"/>
+                <a16:creationId xmlns:a16="http://schemas.microsoft.com/office/drawing/2014/main" id="{91E23565-4074-4916-A07A-9AA61015E712}"/>
               </a:ext>
             </a:extLst>
           </p:cNvPr>
@@ -17636,7 +17636,7 @@
           <p:cNvPr id="17" name="">
             <a:extLst xmlns:a="http://schemas.openxmlformats.org/drawingml/2006/main">
               <a:ext uri="{FF2B5EF4-FFF2-40B4-BE49-F238E27FC236}">
-                <a16:creationId xmlns:a16="http://schemas.microsoft.com/office/drawing/2014/main" id="{28CDA86A-9811-4694-9170-0CFA4C72AD82}"/>
+                <a16:creationId xmlns:a16="http://schemas.microsoft.com/office/drawing/2014/main" id="{F94E26A7-19A9-45B1-8625-03A4EA05822E}"/>
               </a:ext>
             </a:extLst>
           </p:cNvPr>
@@ -17700,7 +17700,7 @@
           <p:cNvPr id="18" name="">
             <a:extLst xmlns:a="http://schemas.openxmlformats.org/drawingml/2006/main">
               <a:ext uri="{FF2B5EF4-FFF2-40B4-BE49-F238E27FC236}">
-                <a16:creationId xmlns:a16="http://schemas.microsoft.com/office/drawing/2014/main" id="{8E5767B8-1E5A-4BFC-A7FA-F12E268003A2}"/>
+                <a16:creationId xmlns:a16="http://schemas.microsoft.com/office/drawing/2014/main" id="{B6D3F036-6ED5-450E-A414-3E05065145D0}"/>
               </a:ext>
             </a:extLst>
           </p:cNvPr>
@@ -17733,7 +17733,7 @@
           <p:cNvPr id="19" name="">
             <a:extLst xmlns:a="http://schemas.openxmlformats.org/drawingml/2006/main">
               <a:ext uri="{FF2B5EF4-FFF2-40B4-BE49-F238E27FC236}">
-                <a16:creationId xmlns:a16="http://schemas.microsoft.com/office/drawing/2014/main" id="{78BF0F08-908E-4A43-B0F2-92CBFDDCC2C7}"/>
+                <a16:creationId xmlns:a16="http://schemas.microsoft.com/office/drawing/2014/main" id="{57EA8F90-845B-40C2-86AE-D8150D4B437A}"/>
               </a:ext>
             </a:extLst>
           </p:cNvPr>
@@ -17797,7 +17797,7 @@
           <p:cNvPr id="20" name="">
             <a:extLst xmlns:a="http://schemas.openxmlformats.org/drawingml/2006/main">
               <a:ext uri="{FF2B5EF4-FFF2-40B4-BE49-F238E27FC236}">
-                <a16:creationId xmlns:a16="http://schemas.microsoft.com/office/drawing/2014/main" id="{88779D56-60C3-4A55-9E2A-C521D456786B}"/>
+                <a16:creationId xmlns:a16="http://schemas.microsoft.com/office/drawing/2014/main" id="{7086A164-220A-4BD3-AB35-EFF7A851C0E4}"/>
               </a:ext>
             </a:extLst>
           </p:cNvPr>
@@ -17830,7 +17830,7 @@
           <p:cNvPr id="21" name="">
             <a:extLst xmlns:a="http://schemas.openxmlformats.org/drawingml/2006/main">
               <a:ext uri="{FF2B5EF4-FFF2-40B4-BE49-F238E27FC236}">
-                <a16:creationId xmlns:a16="http://schemas.microsoft.com/office/drawing/2014/main" id="{618398ED-6C32-43B3-82A9-1ED5DC4525DA}"/>
+                <a16:creationId xmlns:a16="http://schemas.microsoft.com/office/drawing/2014/main" id="{53FD61AA-F6E3-45BC-853C-339AC27D429F}"/>
               </a:ext>
             </a:extLst>
           </p:cNvPr>
@@ -17894,7 +17894,7 @@
           <p:cNvPr id="22" name="">
             <a:extLst xmlns:a="http://schemas.openxmlformats.org/drawingml/2006/main">
               <a:ext uri="{FF2B5EF4-FFF2-40B4-BE49-F238E27FC236}">
-                <a16:creationId xmlns:a16="http://schemas.microsoft.com/office/drawing/2014/main" id="{E4F62FF7-FEAD-46EC-9D06-1E3FA3E9BE0B}"/>
+                <a16:creationId xmlns:a16="http://schemas.microsoft.com/office/drawing/2014/main" id="{649D76F0-AB4E-4681-A149-E35DD6FC67B0}"/>
               </a:ext>
             </a:extLst>
           </p:cNvPr>
@@ -17981,7 +17981,7 @@
           <p:cNvPr id="23" name="">
             <a:extLst xmlns:a="http://schemas.openxmlformats.org/drawingml/2006/main">
               <a:ext uri="{FF2B5EF4-FFF2-40B4-BE49-F238E27FC236}">
-                <a16:creationId xmlns:a16="http://schemas.microsoft.com/office/drawing/2014/main" id="{E203C6BD-483F-4ED5-BB8E-1A9181FAFBDD}"/>
+                <a16:creationId xmlns:a16="http://schemas.microsoft.com/office/drawing/2014/main" id="{91ACD529-86CD-491D-ADFC-E58B1CF45EAB}"/>
               </a:ext>
             </a:extLst>
           </p:cNvPr>
@@ -18014,7 +18014,7 @@
           <p:cNvPr id="24" name="">
             <a:extLst xmlns:a="http://schemas.openxmlformats.org/drawingml/2006/main">
               <a:ext uri="{FF2B5EF4-FFF2-40B4-BE49-F238E27FC236}">
-                <a16:creationId xmlns:a16="http://schemas.microsoft.com/office/drawing/2014/main" id="{FDB038C5-6C12-4FF7-ABE9-B12825BE21A1}"/>
+                <a16:creationId xmlns:a16="http://schemas.microsoft.com/office/drawing/2014/main" id="{C5583659-F799-4C9B-8770-F7FCC254989C}"/>
               </a:ext>
             </a:extLst>
           </p:cNvPr>
@@ -18078,7 +18078,7 @@
           <p:cNvPr id="25" name="">
             <a:extLst xmlns:a="http://schemas.openxmlformats.org/drawingml/2006/main">
               <a:ext uri="{FF2B5EF4-FFF2-40B4-BE49-F238E27FC236}">
-                <a16:creationId xmlns:a16="http://schemas.microsoft.com/office/drawing/2014/main" id="{2A82377B-90C1-4F0C-904B-FCF1DCE4AA0A}"/>
+                <a16:creationId xmlns:a16="http://schemas.microsoft.com/office/drawing/2014/main" id="{CF0DDD3C-333F-4F19-9A6D-8EDC6ED36A18}"/>
               </a:ext>
             </a:extLst>
           </p:cNvPr>
@@ -18111,7 +18111,7 @@
           <p:cNvPr id="26" name="">
             <a:extLst xmlns:a="http://schemas.openxmlformats.org/drawingml/2006/main">
               <a:ext uri="{FF2B5EF4-FFF2-40B4-BE49-F238E27FC236}">
-                <a16:creationId xmlns:a16="http://schemas.microsoft.com/office/drawing/2014/main" id="{19B46442-03C5-4E41-A956-B99A52B45224}"/>
+                <a16:creationId xmlns:a16="http://schemas.microsoft.com/office/drawing/2014/main" id="{40BB5C3E-5AD2-40C0-B355-8C55DA1539BD}"/>
               </a:ext>
             </a:extLst>
           </p:cNvPr>
@@ -18175,7 +18175,7 @@
           <p:cNvPr id="27" name="">
             <a:extLst xmlns:a="http://schemas.openxmlformats.org/drawingml/2006/main">
               <a:ext uri="{FF2B5EF4-FFF2-40B4-BE49-F238E27FC236}">
-                <a16:creationId xmlns:a16="http://schemas.microsoft.com/office/drawing/2014/main" id="{B40DCAE4-80CD-4A86-B16C-DCD03D5CF9E1}"/>
+                <a16:creationId xmlns:a16="http://schemas.microsoft.com/office/drawing/2014/main" id="{A6D1D49B-94EE-47E8-B134-0BF570A0DDA0}"/>
               </a:ext>
             </a:extLst>
           </p:cNvPr>
@@ -18208,7 +18208,7 @@
           <p:cNvPr id="28" name="">
             <a:extLst xmlns:a="http://schemas.openxmlformats.org/drawingml/2006/main">
               <a:ext uri="{FF2B5EF4-FFF2-40B4-BE49-F238E27FC236}">
-                <a16:creationId xmlns:a16="http://schemas.microsoft.com/office/drawing/2014/main" id="{E4AB8456-5A0F-4A46-8490-DD2E648306B8}"/>
+                <a16:creationId xmlns:a16="http://schemas.microsoft.com/office/drawing/2014/main" id="{C1FB992E-6578-496B-943E-DD4FDA16B3D6}"/>
               </a:ext>
             </a:extLst>
           </p:cNvPr>
@@ -18272,7 +18272,7 @@
           <p:cNvPr id="29" name="">
             <a:extLst xmlns:a="http://schemas.openxmlformats.org/drawingml/2006/main">
               <a:ext uri="{FF2B5EF4-FFF2-40B4-BE49-F238E27FC236}">
-                <a16:creationId xmlns:a16="http://schemas.microsoft.com/office/drawing/2014/main" id="{01E26D81-8D69-4794-8578-8B425F21F2FF}"/>
+                <a16:creationId xmlns:a16="http://schemas.microsoft.com/office/drawing/2014/main" id="{E5A21442-C3FD-4101-8FD8-3C1C45B6DC08}"/>
               </a:ext>
             </a:extLst>
           </p:cNvPr>
@@ -18305,7 +18305,7 @@
           <p:cNvPr id="30" name="">
             <a:extLst xmlns:a="http://schemas.openxmlformats.org/drawingml/2006/main">
               <a:ext uri="{FF2B5EF4-FFF2-40B4-BE49-F238E27FC236}">
-                <a16:creationId xmlns:a16="http://schemas.microsoft.com/office/drawing/2014/main" id="{12B0EB36-4E00-432D-9152-09A384A3834C}"/>
+                <a16:creationId xmlns:a16="http://schemas.microsoft.com/office/drawing/2014/main" id="{E970BF57-19F1-4185-ADE4-81568DC9A6AC}"/>
               </a:ext>
             </a:extLst>
           </p:cNvPr>
@@ -18369,7 +18369,7 @@
           <p:cNvPr id="31" name="">
             <a:extLst xmlns:a="http://schemas.openxmlformats.org/drawingml/2006/main">
               <a:ext uri="{FF2B5EF4-FFF2-40B4-BE49-F238E27FC236}">
-                <a16:creationId xmlns:a16="http://schemas.microsoft.com/office/drawing/2014/main" id="{612611EB-60B3-47A8-B953-36D71923C1A2}"/>
+                <a16:creationId xmlns:a16="http://schemas.microsoft.com/office/drawing/2014/main" id="{89F18BEC-9EB5-45E8-91D9-FB8C7591AA48}"/>
               </a:ext>
             </a:extLst>
           </p:cNvPr>
@@ -18456,7 +18456,7 @@
           <p:cNvPr id="32" name="">
             <a:extLst xmlns:a="http://schemas.openxmlformats.org/drawingml/2006/main">
               <a:ext uri="{FF2B5EF4-FFF2-40B4-BE49-F238E27FC236}">
-                <a16:creationId xmlns:a16="http://schemas.microsoft.com/office/drawing/2014/main" id="{01B10EE3-6FCD-4543-95FF-9E610845B04E}"/>
+                <a16:creationId xmlns:a16="http://schemas.microsoft.com/office/drawing/2014/main" id="{8623141D-4F7C-45AD-9D67-599E33FF510D}"/>
               </a:ext>
             </a:extLst>
           </p:cNvPr>
@@ -18489,7 +18489,7 @@
           <p:cNvPr id="33" name="">
             <a:extLst xmlns:a="http://schemas.openxmlformats.org/drawingml/2006/main">
               <a:ext uri="{FF2B5EF4-FFF2-40B4-BE49-F238E27FC236}">
-                <a16:creationId xmlns:a16="http://schemas.microsoft.com/office/drawing/2014/main" id="{F55FA5FA-302C-4398-A654-1F2C0E1E987C}"/>
+                <a16:creationId xmlns:a16="http://schemas.microsoft.com/office/drawing/2014/main" id="{0E98483A-5BF0-4B39-A9F6-82EDA0E6C762}"/>
               </a:ext>
             </a:extLst>
           </p:cNvPr>
@@ -18553,7 +18553,7 @@
           <p:cNvPr id="34" name="">
             <a:extLst xmlns:a="http://schemas.openxmlformats.org/drawingml/2006/main">
               <a:ext uri="{FF2B5EF4-FFF2-40B4-BE49-F238E27FC236}">
-                <a16:creationId xmlns:a16="http://schemas.microsoft.com/office/drawing/2014/main" id="{540D079A-0C47-451E-B316-BC5AE8CAE733}"/>
+                <a16:creationId xmlns:a16="http://schemas.microsoft.com/office/drawing/2014/main" id="{BBC73596-39C6-42BF-AD0F-DBF0359A1BA4}"/>
               </a:ext>
             </a:extLst>
           </p:cNvPr>
@@ -18617,7 +18617,7 @@
           <p:cNvPr id="35" name="">
             <a:extLst xmlns:a="http://schemas.openxmlformats.org/drawingml/2006/main">
               <a:ext uri="{FF2B5EF4-FFF2-40B4-BE49-F238E27FC236}">
-                <a16:creationId xmlns:a16="http://schemas.microsoft.com/office/drawing/2014/main" id="{09250BDE-E916-4429-B2E3-01C00D51ED7A}"/>
+                <a16:creationId xmlns:a16="http://schemas.microsoft.com/office/drawing/2014/main" id="{3F54EBC4-63E4-4BB3-AB68-F0480C2C4DD2}"/>
               </a:ext>
             </a:extLst>
           </p:cNvPr>
@@ -18679,7 +18679,7 @@
     </p:spTree>
     <p:extLst>
       <p:ext uri="{BB962C8B-B14F-4D97-AF65-F5344CB8AC3E}">
-        <p14:creationId xmlns:p14="http://schemas.microsoft.com/office/powerpoint/2010/main" val="1537468161"/>
+        <p14:creationId xmlns:p14="http://schemas.microsoft.com/office/powerpoint/2010/main" val="1819865960"/>
       </p:ext>
     </p:extLst>
   </p:cSld>
@@ -18703,7 +18703,7 @@
           <p:cNvPr id="1" name="">
             <a:extLst xmlns:a="http://schemas.openxmlformats.org/drawingml/2006/main">
               <a:ext uri="{FF2B5EF4-FFF2-40B4-BE49-F238E27FC236}">
-                <a16:creationId xmlns:a16="http://schemas.microsoft.com/office/drawing/2014/main" id="{87BE3947-D45C-4943-87C2-FB6ABE6F852E}"/>
+                <a16:creationId xmlns:a16="http://schemas.microsoft.com/office/drawing/2014/main" id="{1E462BD2-EA0A-41B3-8FC3-6ED65CC9C483}"/>
               </a:ext>
             </a:extLst>
           </p:cNvPr>
@@ -18736,7 +18736,7 @@
           <p:cNvPr id="2" name="">
             <a:extLst xmlns:a="http://schemas.openxmlformats.org/drawingml/2006/main">
               <a:ext uri="{FF2B5EF4-FFF2-40B4-BE49-F238E27FC236}">
-                <a16:creationId xmlns:a16="http://schemas.microsoft.com/office/drawing/2014/main" id="{741F85C0-2598-42D9-A234-B1BD271AD83F}"/>
+                <a16:creationId xmlns:a16="http://schemas.microsoft.com/office/drawing/2014/main" id="{131CAC5D-98EB-4EB8-8742-0635284C6FDB}"/>
               </a:ext>
             </a:extLst>
           </p:cNvPr>
@@ -18769,7 +18769,7 @@
           <p:cNvPr id="3" name="">
             <a:extLst xmlns:a="http://schemas.openxmlformats.org/drawingml/2006/main">
               <a:ext uri="{FF2B5EF4-FFF2-40B4-BE49-F238E27FC236}">
-                <a16:creationId xmlns:a16="http://schemas.microsoft.com/office/drawing/2014/main" id="{41E37E1B-AA16-4248-A8B9-863FEB9AD2DE}"/>
+                <a16:creationId xmlns:a16="http://schemas.microsoft.com/office/drawing/2014/main" id="{6A3C05AD-D5D6-4189-A6C2-FD1EB4FCF31F}"/>
               </a:ext>
             </a:extLst>
           </p:cNvPr>
@@ -18833,7 +18833,7 @@
           <p:cNvPr id="4" name="">
             <a:extLst xmlns:a="http://schemas.openxmlformats.org/drawingml/2006/main">
               <a:ext uri="{FF2B5EF4-FFF2-40B4-BE49-F238E27FC236}">
-                <a16:creationId xmlns:a16="http://schemas.microsoft.com/office/drawing/2014/main" id="{25C99FA7-F3B6-42E6-82A6-451E8400DD42}"/>
+                <a16:creationId xmlns:a16="http://schemas.microsoft.com/office/drawing/2014/main" id="{3CE04083-2EEA-4196-B2F1-60A2CB0A0897}"/>
               </a:ext>
             </a:extLst>
           </p:cNvPr>
@@ -18897,7 +18897,7 @@
           <p:cNvPr id="5" name="">
             <a:extLst xmlns:a="http://schemas.openxmlformats.org/drawingml/2006/main">
               <a:ext uri="{FF2B5EF4-FFF2-40B4-BE49-F238E27FC236}">
-                <a16:creationId xmlns:a16="http://schemas.microsoft.com/office/drawing/2014/main" id="{A4965D36-9DF4-4D53-A88F-AE6B41EF100F}"/>
+                <a16:creationId xmlns:a16="http://schemas.microsoft.com/office/drawing/2014/main" id="{6CC4A0AC-AB74-4383-A0A3-C7C2CC24307E}"/>
               </a:ext>
             </a:extLst>
           </p:cNvPr>
@@ -18930,7 +18930,7 @@
           <p:cNvPr id="6" name="">
             <a:extLst xmlns:a="http://schemas.openxmlformats.org/drawingml/2006/main">
               <a:ext uri="{FF2B5EF4-FFF2-40B4-BE49-F238E27FC236}">
-                <a16:creationId xmlns:a16="http://schemas.microsoft.com/office/drawing/2014/main" id="{CEE6B73E-A58A-4863-8C91-919E10F81345}"/>
+                <a16:creationId xmlns:a16="http://schemas.microsoft.com/office/drawing/2014/main" id="{8B5DF3FE-F740-484F-A7C9-A63B40253F4F}"/>
               </a:ext>
             </a:extLst>
           </p:cNvPr>
@@ -18963,7 +18963,7 @@
           <p:cNvPr id="7" name="">
             <a:extLst xmlns:a="http://schemas.openxmlformats.org/drawingml/2006/main">
               <a:ext uri="{FF2B5EF4-FFF2-40B4-BE49-F238E27FC236}">
-                <a16:creationId xmlns:a16="http://schemas.microsoft.com/office/drawing/2014/main" id="{7591922C-A079-45AD-80F2-1322F5C24A1B}"/>
+                <a16:creationId xmlns:a16="http://schemas.microsoft.com/office/drawing/2014/main" id="{4323B51E-8AB1-4EF7-A332-EEF37A819E67}"/>
               </a:ext>
             </a:extLst>
           </p:cNvPr>
@@ -19027,7 +19027,7 @@
           <p:cNvPr id="8" name="">
             <a:extLst xmlns:a="http://schemas.openxmlformats.org/drawingml/2006/main">
               <a:ext uri="{FF2B5EF4-FFF2-40B4-BE49-F238E27FC236}">
-                <a16:creationId xmlns:a16="http://schemas.microsoft.com/office/drawing/2014/main" id="{8890DA3A-8A1C-498E-89F9-49ECA1ED7D88}"/>
+                <a16:creationId xmlns:a16="http://schemas.microsoft.com/office/drawing/2014/main" id="{3A5D0DF4-C6D4-4B80-AFB4-CFDDBB41A3E5}"/>
               </a:ext>
             </a:extLst>
           </p:cNvPr>
@@ -19091,7 +19091,7 @@
           <p:cNvPr id="9" name="">
             <a:extLst xmlns:a="http://schemas.openxmlformats.org/drawingml/2006/main">
               <a:ext uri="{FF2B5EF4-FFF2-40B4-BE49-F238E27FC236}">
-                <a16:creationId xmlns:a16="http://schemas.microsoft.com/office/drawing/2014/main" id="{CC987458-EF13-481F-B499-F15AB5AD40CC}"/>
+                <a16:creationId xmlns:a16="http://schemas.microsoft.com/office/drawing/2014/main" id="{A92008C0-F95F-4156-9C54-AE1155540390}"/>
               </a:ext>
             </a:extLst>
           </p:cNvPr>
@@ -19206,7 +19206,7 @@
           <p:cNvPr id="10" name="">
             <a:extLst xmlns:a="http://schemas.openxmlformats.org/drawingml/2006/main">
               <a:ext uri="{FF2B5EF4-FFF2-40B4-BE49-F238E27FC236}">
-                <a16:creationId xmlns:a16="http://schemas.microsoft.com/office/drawing/2014/main" id="{C901A09B-8C64-4C66-BB24-2B2AAC7B8CEC}"/>
+                <a16:creationId xmlns:a16="http://schemas.microsoft.com/office/drawing/2014/main" id="{D1C54C99-45FF-4684-8E2F-10931489EC15}"/>
               </a:ext>
             </a:extLst>
           </p:cNvPr>
@@ -19239,7 +19239,7 @@
           <p:cNvPr id="11" name="">
             <a:extLst xmlns:a="http://schemas.openxmlformats.org/drawingml/2006/main">
               <a:ext uri="{FF2B5EF4-FFF2-40B4-BE49-F238E27FC236}">
-                <a16:creationId xmlns:a16="http://schemas.microsoft.com/office/drawing/2014/main" id="{54981E25-7C73-4252-91DD-028A5189FF81}"/>
+                <a16:creationId xmlns:a16="http://schemas.microsoft.com/office/drawing/2014/main" id="{0F5D9F98-16C9-4BA8-AF41-61F7BDE53FD0}"/>
               </a:ext>
             </a:extLst>
           </p:cNvPr>
@@ -19272,7 +19272,7 @@
           <p:cNvPr id="12" name="">
             <a:extLst xmlns:a="http://schemas.openxmlformats.org/drawingml/2006/main">
               <a:ext uri="{FF2B5EF4-FFF2-40B4-BE49-F238E27FC236}">
-                <a16:creationId xmlns:a16="http://schemas.microsoft.com/office/drawing/2014/main" id="{D8215E2E-26C1-4B58-88B9-C4E2893F04EE}"/>
+                <a16:creationId xmlns:a16="http://schemas.microsoft.com/office/drawing/2014/main" id="{0B0FF880-0C15-478B-A0EF-833BE7FA76D1}"/>
               </a:ext>
             </a:extLst>
           </p:cNvPr>
@@ -19336,7 +19336,7 @@
           <p:cNvPr id="13" name="">
             <a:extLst xmlns:a="http://schemas.openxmlformats.org/drawingml/2006/main">
               <a:ext uri="{FF2B5EF4-FFF2-40B4-BE49-F238E27FC236}">
-                <a16:creationId xmlns:a16="http://schemas.microsoft.com/office/drawing/2014/main" id="{5E0EDA86-6080-480F-BE58-28827646EC99}"/>
+                <a16:creationId xmlns:a16="http://schemas.microsoft.com/office/drawing/2014/main" id="{AB12B2B4-554E-4F47-A32A-0D588B98EDCB}"/>
               </a:ext>
             </a:extLst>
           </p:cNvPr>
@@ -19400,7 +19400,7 @@
           <p:cNvPr id="14" name="">
             <a:extLst xmlns:a="http://schemas.openxmlformats.org/drawingml/2006/main">
               <a:ext uri="{FF2B5EF4-FFF2-40B4-BE49-F238E27FC236}">
-                <a16:creationId xmlns:a16="http://schemas.microsoft.com/office/drawing/2014/main" id="{2108B3AA-1F1D-4A44-BFED-C1393F6B82F2}"/>
+                <a16:creationId xmlns:a16="http://schemas.microsoft.com/office/drawing/2014/main" id="{BBCE50E4-ADA8-4C3E-8C3F-E4A4DE3EE7F3}"/>
               </a:ext>
             </a:extLst>
           </p:cNvPr>
@@ -19515,7 +19515,7 @@
           <p:cNvPr id="15" name="">
             <a:extLst xmlns:a="http://schemas.openxmlformats.org/drawingml/2006/main">
               <a:ext uri="{FF2B5EF4-FFF2-40B4-BE49-F238E27FC236}">
-                <a16:creationId xmlns:a16="http://schemas.microsoft.com/office/drawing/2014/main" id="{9FC2C487-55AA-4D0D-94F4-B1A7DC16183C}"/>
+                <a16:creationId xmlns:a16="http://schemas.microsoft.com/office/drawing/2014/main" id="{61BF6E37-2546-42C8-8E89-D9CEB820EDFA}"/>
               </a:ext>
             </a:extLst>
           </p:cNvPr>
@@ -19548,7 +19548,7 @@
           <p:cNvPr id="16" name="">
             <a:extLst xmlns:a="http://schemas.openxmlformats.org/drawingml/2006/main">
               <a:ext uri="{FF2B5EF4-FFF2-40B4-BE49-F238E27FC236}">
-                <a16:creationId xmlns:a16="http://schemas.microsoft.com/office/drawing/2014/main" id="{BEA8FFA6-A437-483F-AF97-662A2D88FE08}"/>
+                <a16:creationId xmlns:a16="http://schemas.microsoft.com/office/drawing/2014/main" id="{7F2A1696-47E8-4C72-8DA0-C50FF629B2EC}"/>
               </a:ext>
             </a:extLst>
           </p:cNvPr>
@@ -19581,7 +19581,7 @@
           <p:cNvPr id="17" name="">
             <a:extLst xmlns:a="http://schemas.openxmlformats.org/drawingml/2006/main">
               <a:ext uri="{FF2B5EF4-FFF2-40B4-BE49-F238E27FC236}">
-                <a16:creationId xmlns:a16="http://schemas.microsoft.com/office/drawing/2014/main" id="{892D6FB9-E426-4F68-91B7-09D047E8F87C}"/>
+                <a16:creationId xmlns:a16="http://schemas.microsoft.com/office/drawing/2014/main" id="{94681091-8E31-4758-855E-F0B009DA3BA8}"/>
               </a:ext>
             </a:extLst>
           </p:cNvPr>
@@ -19645,7 +19645,7 @@
           <p:cNvPr id="18" name="">
             <a:extLst xmlns:a="http://schemas.openxmlformats.org/drawingml/2006/main">
               <a:ext uri="{FF2B5EF4-FFF2-40B4-BE49-F238E27FC236}">
-                <a16:creationId xmlns:a16="http://schemas.microsoft.com/office/drawing/2014/main" id="{83DB8738-8C3F-4208-90EE-C5D72E2CE463}"/>
+                <a16:creationId xmlns:a16="http://schemas.microsoft.com/office/drawing/2014/main" id="{B59FA6D0-5DC5-4B0F-BE20-18CF97FF2ADF}"/>
               </a:ext>
             </a:extLst>
           </p:cNvPr>
@@ -19709,7 +19709,7 @@
           <p:cNvPr id="19" name="">
             <a:extLst xmlns:a="http://schemas.openxmlformats.org/drawingml/2006/main">
               <a:ext uri="{FF2B5EF4-FFF2-40B4-BE49-F238E27FC236}">
-                <a16:creationId xmlns:a16="http://schemas.microsoft.com/office/drawing/2014/main" id="{DCF5A28C-AF46-4517-AE1F-24879E456224}"/>
+                <a16:creationId xmlns:a16="http://schemas.microsoft.com/office/drawing/2014/main" id="{51187161-C399-456F-84C5-F7C1CE518689}"/>
               </a:ext>
             </a:extLst>
           </p:cNvPr>
@@ -19824,7 +19824,7 @@
           <p:cNvPr id="20" name="">
             <a:extLst xmlns:a="http://schemas.openxmlformats.org/drawingml/2006/main">
               <a:ext uri="{FF2B5EF4-FFF2-40B4-BE49-F238E27FC236}">
-                <a16:creationId xmlns:a16="http://schemas.microsoft.com/office/drawing/2014/main" id="{434276C6-D822-4B8A-93D5-13E96F956FC7}"/>
+                <a16:creationId xmlns:a16="http://schemas.microsoft.com/office/drawing/2014/main" id="{A2B049F8-7044-4CA0-A874-6A3E40963900}"/>
               </a:ext>
             </a:extLst>
           </p:cNvPr>
@@ -19857,7 +19857,7 @@
           <p:cNvPr id="21" name="">
             <a:extLst xmlns:a="http://schemas.openxmlformats.org/drawingml/2006/main">
               <a:ext uri="{FF2B5EF4-FFF2-40B4-BE49-F238E27FC236}">
-                <a16:creationId xmlns:a16="http://schemas.microsoft.com/office/drawing/2014/main" id="{5FEA3314-ADFF-4A2F-B311-45147031D2DD}"/>
+                <a16:creationId xmlns:a16="http://schemas.microsoft.com/office/drawing/2014/main" id="{B5F80DFA-C176-4E67-AA6A-D6897A3A8CE7}"/>
               </a:ext>
             </a:extLst>
           </p:cNvPr>
@@ -19921,7 +19921,7 @@
           <p:cNvPr id="22" name="">
             <a:extLst xmlns:a="http://schemas.openxmlformats.org/drawingml/2006/main">
               <a:ext uri="{FF2B5EF4-FFF2-40B4-BE49-F238E27FC236}">
-                <a16:creationId xmlns:a16="http://schemas.microsoft.com/office/drawing/2014/main" id="{789E66E4-9177-46D4-B58A-C5FC48BBA087}"/>
+                <a16:creationId xmlns:a16="http://schemas.microsoft.com/office/drawing/2014/main" id="{E333B9BE-FE48-408F-AB89-5AD8B3DDE3C1}"/>
               </a:ext>
             </a:extLst>
           </p:cNvPr>
@@ -19985,7 +19985,7 @@
           <p:cNvPr id="23" name="">
             <a:extLst xmlns:a="http://schemas.openxmlformats.org/drawingml/2006/main">
               <a:ext uri="{FF2B5EF4-FFF2-40B4-BE49-F238E27FC236}">
-                <a16:creationId xmlns:a16="http://schemas.microsoft.com/office/drawing/2014/main" id="{84760D6E-D527-480E-83F2-AFB9F4774D5C}"/>
+                <a16:creationId xmlns:a16="http://schemas.microsoft.com/office/drawing/2014/main" id="{25080A5D-3B7A-43BF-BD02-DEACA679D303}"/>
               </a:ext>
             </a:extLst>
           </p:cNvPr>
@@ -20047,7 +20047,7 @@
     </p:spTree>
     <p:extLst>
       <p:ext uri="{BB962C8B-B14F-4D97-AF65-F5344CB8AC3E}">
-        <p14:creationId xmlns:p14="http://schemas.microsoft.com/office/powerpoint/2010/main" val="611091721"/>
+        <p14:creationId xmlns:p14="http://schemas.microsoft.com/office/powerpoint/2010/main" val="363252475"/>
       </p:ext>
     </p:extLst>
   </p:cSld>
